--- a/presentation/ТЗ-Ревьюер — питч Demo Day.pptx
+++ b/presentation/ТЗ-Ревьюер — питч Demo Day.pptx
@@ -12,9 +12,10 @@
     <p:sldId id="260" r:id="rId6"/>
     <p:sldId id="261" r:id="rId7"/>
     <p:sldId id="262" r:id="rId8"/>
+    <p:sldId id="263" r:id="rId9"/>
   </p:sldIdLst>
   <p:notesMasterIdLst>
-    <p:notesMasterId r:id="rId9"/>
+    <p:notesMasterId r:id="rId10"/>
   </p:notesMasterIdLst>
   <p:sldSz cx="12192000" cy="6858000"/>
   <p:notesSz cx="6858000" cy="12192000"/>
@@ -508,7 +509,7 @@
           <a:p>
             <a:r>
               <a:rPr lang="en-US" dirty="0"/>
-              <a:t>0:00–0:30. Мы создали ТЗ-Ревьюер для аналитика продукта NET, который находит в техническом задании места, непонятные разработчику, — до передачи задачи в разработку.</a:t>
+              <a:t>0:00–0:30. Здравствуйте! Мы создали ТЗ-Ревьюер для аналитика продукта NET — инструмент, который находит в техническом задании места, непонятные разработчику, ещё до передачи задачи в разработку.</a:t>
             </a:r>
             <a:endParaRPr lang="en-US" dirty="0"/>
           </a:p>
@@ -596,7 +597,7 @@
           <a:p>
             <a:r>
               <a:rPr lang="en-US" dirty="0"/>
-              <a:t>0:30–0:50. Сейчас ТЗ вычитывают вручную. Часть неточностей всё равно доходит до разработки, и тогда запускается дорогой цикл: возврат, пересогласование, переделка, повторное тестирование.</a:t>
+              <a:t>0:30–1:00. Сейчас техзадание вычитывают вручную. Часть неточностей всё равно доходит до разработки — и тогда документ возвращают аналитику, требования пересогласовывают, реализацию переделывают. Наш инструмент показывает эти места раньше, пока документ ещё у аналитика.</a:t>
             </a:r>
             <a:endParaRPr lang="en-US" dirty="0"/>
           </a:p>
@@ -684,7 +685,7 @@
           <a:p>
             <a:r>
               <a:rPr lang="en-US" dirty="0"/>
-              <a:t>1:00–3:10 — живое демо. Показать: берём реальный документ кейсодателя, нажимаем «Проверить ТЗ», получаем список замечаний. Раскрыть одно замечание целиком. План Б — скриншоты со следующего слайда.</a:t>
+              <a:t>1:00–3:10 — живое демо. План Б: этот и следующие слайды содержат настоящие экраны инструмента.</a:t>
             </a:r>
             <a:endParaRPr lang="en-US" dirty="0"/>
           </a:p>
@@ -772,7 +773,7 @@
           <a:p>
             <a:r>
               <a:rPr lang="en-US" dirty="0"/>
-              <a:t>Ключевое доказательство. Это не общий совет, а конкретное место в тексте: инструмент привёл цитату, объяснил риск и сформулировал вопрос аналитику.</a:t>
+              <a:t>Ключевое доказательство: два раздела одного ТЗ требуют разной задержки. Инструмент привёл обе цитаты и задал вопрос аналитику.</a:t>
             </a:r>
             <a:endParaRPr lang="en-US" dirty="0"/>
           </a:p>
@@ -860,7 +861,7 @@
           <a:p>
             <a:r>
               <a:rPr lang="en-US" dirty="0"/>
-              <a:t>3:10–4:10. Два слоя из трёх — обычный код, они детерминированы и воспроизводимы. LLM отвечает только за смысловые вещи. Это же даёт страховку: если модели нет, первые два слоя работают.</a:t>
+              <a:t>Настоящий экран инструмента: список замечаний с фильтром по категории, раскрытое замечание с цитатой, объяснением и вопросом аналитику.</a:t>
             </a:r>
             <a:endParaRPr lang="en-US" dirty="0"/>
           </a:p>
@@ -948,7 +949,7 @@
           <a:p>
             <a:r>
               <a:rPr lang="en-US" dirty="0"/>
-              <a:t>Разделяем измеренное и гипотезу. Для точных метрик нужна размеченная экспертом выборка и реальные правки разработчиков NET.</a:t>
+              <a:t>Кроме замечаний инструмент детерминированно проверяет 21 раздел шаблона: заполнен, пустой, помечен «не применимо», упомянут вне раздела или не найден.</a:t>
             </a:r>
             <a:endParaRPr lang="en-US" dirty="0"/>
           </a:p>
@@ -1036,7 +1037,7 @@
           <a:p>
             <a:r>
               <a:rPr lang="en-US" dirty="0"/>
-              <a:t>4:10–5:00. Финальная фраза читается дословно, 12–15 секунд. Ценность + что доказано + следующий шаг + запрос.</a:t>
+              <a:t>3:10–4:10. Первые два слоя — обычный код, детерминированы и воспроизводимы. LLM отвечает только за смысл, и каждое его замечание обязано содержать дословную цитату, иначе отбрасывается. Провайдера меняли на живой Gemini без единой правки кода.</a:t>
             </a:r>
             <a:endParaRPr lang="en-US" dirty="0"/>
           </a:p>
@@ -1060,6 +1061,94 @@
             <a:fld id="{F7021451-1387-4CA6-816F-3879F97B5CBC}" type="slidenum">
               <a:rPr lang="en-US"/>
               <a:t>7</a:t>
+            </a:fld>
+            <a:endParaRPr lang="en-US"/>
+          </a:p>
+        </p:txBody>
+      </p:sp>
+    </p:spTree>
+    <p:extLst>
+      <p:ext uri="{BB962C8B-B14F-4D97-AF65-F5344CB8AC3E}">
+        <p14:creationId xmlns:p14="http://schemas.microsoft.com/office/powerpoint/2010/main" val="1024086991"/>
+      </p:ext>
+    </p:extLst>
+  </p:cSld>
+  <p:clrMapOvr>
+    <a:masterClrMapping/>
+  </p:clrMapOvr>
+</p:notes>
+</file>
+
+<file path=ppt/notesSlides/notesSlide8.xml><?xml version="1.0" encoding="utf-8"?>
+<p:notes xmlns:a="http://schemas.openxmlformats.org/drawingml/2006/main" xmlns:r="http://schemas.openxmlformats.org/officeDocument/2006/relationships" xmlns:p="http://schemas.openxmlformats.org/presentationml/2006/main">
+  <p:cSld>
+    <p:spTree>
+      <p:nvGrpSpPr>
+        <p:cNvPr id="1" name=""/>
+        <p:cNvGrpSpPr/>
+        <p:nvPr/>
+      </p:nvGrpSpPr>
+      <p:grpSpPr>
+        <a:xfrm>
+          <a:off x="0" y="0"/>
+          <a:ext cx="0" cy="0"/>
+          <a:chOff x="0" y="0"/>
+          <a:chExt cx="0" cy="0"/>
+        </a:xfrm>
+      </p:grpSpPr>
+      <p:sp>
+        <p:nvSpPr>
+          <p:cNvPr id="2" name="Slide Image Placeholder 1"/>
+          <p:cNvSpPr>
+            <a:spLocks noGrp="1" noRot="1" noChangeAspect="1"/>
+          </p:cNvSpPr>
+          <p:nvPr>
+            <p:ph type="sldImg"/>
+          </p:nvPr>
+        </p:nvSpPr>
+        <p:spPr/>
+      </p:sp>
+      <p:sp>
+        <p:nvSpPr>
+          <p:cNvPr id="3" name="Notes Placeholder 2"/>
+          <p:cNvSpPr>
+            <a:spLocks noGrp="1"/>
+          </p:cNvSpPr>
+          <p:nvPr>
+            <p:ph type="body" idx="1"/>
+          </p:nvPr>
+        </p:nvSpPr>
+        <p:spPr/>
+        <p:txBody>
+          <a:bodyPr/>
+          <a:lstStyle/>
+          <a:p>
+            <a:r>
+              <a:rPr lang="en-US" dirty="0"/>
+              <a:t>4:10–5:00. Финальная фраза читается дословно, 12–15 секунд.</a:t>
+            </a:r>
+            <a:endParaRPr lang="en-US" dirty="0"/>
+          </a:p>
+        </p:txBody>
+      </p:sp>
+      <p:sp>
+        <p:nvSpPr>
+          <p:cNvPr id="4" name="Slide Number Placeholder 3"/>
+          <p:cNvSpPr>
+            <a:spLocks noGrp="1"/>
+          </p:cNvSpPr>
+          <p:nvPr>
+            <p:ph type="sldNum" sz="quarter" idx="10"/>
+          </p:nvPr>
+        </p:nvSpPr>
+        <p:spPr/>
+        <p:txBody>
+          <a:bodyPr/>
+          <a:lstStyle/>
+          <a:p>
+            <a:fld id="{F7021451-1387-4CA6-816F-3879F97B5CBC}" type="slidenum">
+              <a:rPr lang="en-US"/>
+              <a:t>8</a:t>
             </a:fld>
             <a:endParaRPr lang="en-US"/>
           </a:p>
@@ -1391,7 +1480,7 @@
     <p:bg>
       <p:bgPr>
         <a:solidFill>
-          <a:srgbClr val="13223B"/>
+          <a:srgbClr val="0E1B2E"/>
         </a:solidFill>
       </p:bgPr>
     </p:bg>
@@ -1411,14 +1500,34 @@
       </p:grpSpPr>
       <p:sp>
         <p:nvSpPr>
-          <p:cNvPr id="2" name="Text 0"/>
-          <p:cNvSpPr txBox="1"/>
-          <p:nvPr/>
-        </p:nvSpPr>
-        <p:spPr>
-          <a:xfrm>
-            <a:off x="566928" y="1371600"/>
-            <a:ext cx="11027664" cy="365760"/>
+          <p:cNvPr id="2" name="Shape 0"/>
+          <p:cNvSpPr/>
+          <p:nvPr/>
+        </p:nvSpPr>
+        <p:spPr>
+          <a:xfrm>
+            <a:off x="0" y="0"/>
+            <a:ext cx="12161520" cy="82296"/>
+          </a:xfrm>
+          <a:prstGeom prst="rect">
+            <a:avLst/>
+          </a:prstGeom>
+          <a:solidFill>
+            <a:srgbClr val="C9A227"/>
+          </a:solidFill>
+          <a:ln/>
+        </p:spPr>
+      </p:sp>
+      <p:sp>
+        <p:nvSpPr>
+          <p:cNvPr id="3" name="Text 1"/>
+          <p:cNvSpPr txBox="1"/>
+          <p:nvPr/>
+        </p:nvSpPr>
+        <p:spPr>
+          <a:xfrm>
+            <a:off x="658368" y="1417320"/>
+            <a:ext cx="10844784" cy="320040"/>
           </a:xfrm>
           <a:prstGeom prst="rect">
             <a:avLst/>
@@ -1434,30 +1543,30 @@
               <a:buNone/>
             </a:pPr>
             <a:r>
-              <a:rPr lang="en-US" sz="1600" b="1" spc="300" kern="0" dirty="0">
-                <a:solidFill>
-                  <a:srgbClr val="D98324"/>
-                </a:solidFill>
-                <a:latin typeface="Calibri" pitchFamily="34" charset="0"/>
-                <a:ea typeface="Calibri" pitchFamily="34" charset="-122"/>
-                <a:cs typeface="Calibri" pitchFamily="34" charset="-120"/>
-              </a:rPr>
-              <a:t>AI TALENT HUB · КЕЙС МТС · КОМАНДА 6</a:t>
-            </a:r>
-            <a:endParaRPr lang="en-US" sz="1600" dirty="0"/>
-          </a:p>
-        </p:txBody>
-      </p:sp>
-      <p:sp>
-        <p:nvSpPr>
-          <p:cNvPr id="3" name="Text 1"/>
-          <p:cNvSpPr txBox="1"/>
-          <p:nvPr/>
-        </p:nvSpPr>
-        <p:spPr>
-          <a:xfrm>
-            <a:off x="566928" y="1828800"/>
-            <a:ext cx="11027664" cy="1097280"/>
+              <a:rPr lang="en-US" sz="1300" b="1" spc="400" kern="0" dirty="0">
+                <a:solidFill>
+                  <a:srgbClr val="C9A227"/>
+                </a:solidFill>
+                <a:latin typeface="Calibri" pitchFamily="34" charset="0"/>
+                <a:ea typeface="Calibri" pitchFamily="34" charset="-122"/>
+                <a:cs typeface="Calibri" pitchFamily="34" charset="-120"/>
+              </a:rPr>
+              <a:t>AI TALENT HUB  ·  КЕЙС МТС  ·  ПРОДУКТ NET</a:t>
+            </a:r>
+            <a:endParaRPr lang="en-US" sz="1300" dirty="0"/>
+          </a:p>
+        </p:txBody>
+      </p:sp>
+      <p:sp>
+        <p:nvSpPr>
+          <p:cNvPr id="4" name="Text 2"/>
+          <p:cNvSpPr txBox="1"/>
+          <p:nvPr/>
+        </p:nvSpPr>
+        <p:spPr>
+          <a:xfrm>
+            <a:off x="658368" y="1965960"/>
+            <a:ext cx="10844784" cy="1234440"/>
           </a:xfrm>
           <a:prstGeom prst="rect">
             <a:avLst/>
@@ -1473,7 +1582,7 @@
               <a:buNone/>
             </a:pPr>
             <a:r>
-              <a:rPr lang="en-US" sz="6000" b="1" dirty="0">
+              <a:rPr lang="en-US" sz="6600" b="1" dirty="0">
                 <a:solidFill>
                   <a:srgbClr val="FFFFFF"/>
                 </a:solidFill>
@@ -1483,20 +1592,20 @@
               </a:rPr>
               <a:t>ТЗ-Ревьюер</a:t>
             </a:r>
-            <a:endParaRPr lang="en-US" sz="6000" dirty="0"/>
-          </a:p>
-        </p:txBody>
-      </p:sp>
-      <p:sp>
-        <p:nvSpPr>
-          <p:cNvPr id="4" name="Text 2"/>
-          <p:cNvSpPr txBox="1"/>
-          <p:nvPr/>
-        </p:nvSpPr>
-        <p:spPr>
-          <a:xfrm>
-            <a:off x="566928" y="3017520"/>
-            <a:ext cx="11027664" cy="548640"/>
+            <a:endParaRPr lang="en-US" sz="6600" dirty="0"/>
+          </a:p>
+        </p:txBody>
+      </p:sp>
+      <p:sp>
+        <p:nvSpPr>
+          <p:cNvPr id="5" name="Text 3"/>
+          <p:cNvSpPr txBox="1"/>
+          <p:nvPr/>
+        </p:nvSpPr>
+        <p:spPr>
+          <a:xfrm>
+            <a:off x="658368" y="3246120"/>
+            <a:ext cx="10844784" cy="502920"/>
           </a:xfrm>
           <a:prstGeom prst="rect">
             <a:avLst/>
@@ -1512,51 +1621,119 @@
               <a:buNone/>
             </a:pPr>
             <a:r>
-              <a:rPr lang="en-US" sz="3000" dirty="0">
-                <a:solidFill>
-                  <a:srgbClr val="D6DFEC"/>
-                </a:solidFill>
-                <a:latin typeface="Calibri" pitchFamily="34" charset="0"/>
-                <a:ea typeface="Calibri" pitchFamily="34" charset="-122"/>
-                <a:cs typeface="Calibri" pitchFamily="34" charset="-120"/>
-              </a:rPr>
-              <a:t>AI-ревьюер технических заданий для аналитика продукта NET</a:t>
-            </a:r>
-            <a:endParaRPr lang="en-US" sz="3000" dirty="0"/>
-          </a:p>
-        </p:txBody>
-      </p:sp>
-      <p:sp>
-        <p:nvSpPr>
-          <p:cNvPr id="5" name="Text 3"/>
-          <p:cNvSpPr txBox="1"/>
-          <p:nvPr/>
-        </p:nvSpPr>
-        <p:spPr>
-          <a:xfrm>
-            <a:off x="566928" y="3657600"/>
-            <a:ext cx="9483791" cy="914400"/>
-          </a:xfrm>
-          <a:prstGeom prst="rect">
-            <a:avLst/>
-          </a:prstGeom>
-          <a:noFill/>
-          <a:ln/>
-        </p:spPr>
-        <p:txBody>
-          <a:bodyPr wrap="square" lIns="0" tIns="0" rIns="0" bIns="0" rtlCol="0" anchor="t">
-            <a:normAutofit/>
-          </a:bodyPr>
+              <a:rPr lang="en-US" sz="2700" dirty="0">
+                <a:solidFill>
+                  <a:srgbClr val="9FB0C7"/>
+                </a:solidFill>
+                <a:latin typeface="Calibri" pitchFamily="34" charset="0"/>
+                <a:ea typeface="Calibri" pitchFamily="34" charset="-122"/>
+                <a:cs typeface="Calibri" pitchFamily="34" charset="-120"/>
+              </a:rPr>
+              <a:t>AI-ревьюер технических заданий для аналитика</a:t>
+            </a:r>
+            <a:endParaRPr lang="en-US" sz="2700" dirty="0"/>
+          </a:p>
+        </p:txBody>
+      </p:sp>
+      <p:sp>
+        <p:nvSpPr>
+          <p:cNvPr id="6" name="Shape 4"/>
+          <p:cNvSpPr/>
+          <p:nvPr/>
+        </p:nvSpPr>
+        <p:spPr>
+          <a:xfrm>
+            <a:off x="658368" y="4251960"/>
+            <a:ext cx="1828800" cy="27432"/>
+          </a:xfrm>
+          <a:prstGeom prst="rect">
+            <a:avLst/>
+          </a:prstGeom>
+          <a:solidFill>
+            <a:srgbClr val="C9A227"/>
+          </a:solidFill>
+          <a:ln/>
+        </p:spPr>
+      </p:sp>
+      <p:sp>
+        <p:nvSpPr>
+          <p:cNvPr id="7" name="Text 5"/>
+          <p:cNvSpPr txBox="1"/>
+          <p:nvPr/>
+        </p:nvSpPr>
+        <p:spPr>
+          <a:xfrm>
+            <a:off x="658368" y="4572000"/>
+            <a:ext cx="10844784" cy="274320"/>
+          </a:xfrm>
+          <a:prstGeom prst="rect">
+            <a:avLst/>
+          </a:prstGeom>
+          <a:noFill/>
+          <a:ln/>
+        </p:spPr>
+        <p:txBody>
+          <a:bodyPr wrap="square" lIns="0" tIns="0" rIns="0" bIns="0" rtlCol="0" anchor="t"/>
           <a:lstStyle/>
           <a:p>
             <a:pPr indent="0" marL="0">
-              <a:lnSpc>
-                <a:spcPct val="125000"/>
-              </a:lnSpc>
-              <a:buNone/>
-            </a:pPr>
-            <a:r>
-              <a:rPr lang="en-US" sz="2600" dirty="0">
+              <a:buNone/>
+            </a:pPr>
+            <a:r>
+              <a:rPr lang="en-US" sz="1200" b="1" spc="300" kern="0" dirty="0">
+                <a:solidFill>
+                  <a:srgbClr val="6E8299"/>
+                </a:solidFill>
+                <a:latin typeface="Calibri" pitchFamily="34" charset="0"/>
+                <a:ea typeface="Calibri" pitchFamily="34" charset="-122"/>
+                <a:cs typeface="Calibri" pitchFamily="34" charset="-120"/>
+              </a:rPr>
+              <a:t>КОМАНДА 6</a:t>
+            </a:r>
+            <a:endParaRPr lang="en-US" sz="1200" dirty="0"/>
+          </a:p>
+        </p:txBody>
+      </p:sp>
+      <p:sp>
+        <p:nvSpPr>
+          <p:cNvPr id="8" name="Text 6"/>
+          <p:cNvSpPr txBox="1"/>
+          <p:nvPr/>
+        </p:nvSpPr>
+        <p:spPr>
+          <a:xfrm>
+            <a:off x="658368" y="4937760"/>
+            <a:ext cx="10844784" cy="384048"/>
+          </a:xfrm>
+          <a:prstGeom prst="rect">
+            <a:avLst/>
+          </a:prstGeom>
+          <a:noFill/>
+          <a:ln/>
+        </p:spPr>
+        <p:txBody>
+          <a:bodyPr wrap="square" lIns="0" tIns="0" rIns="0" bIns="0" rtlCol="0" anchor="t"/>
+          <a:lstStyle/>
+          <a:p>
+            <a:pPr indent="0" marL="0">
+              <a:buNone/>
+            </a:pPr>
+            <a:r>
+              <a:rPr lang="en-US" sz="2400" b="1" dirty="0">
+                <a:solidFill>
+                  <a:srgbClr val="FFFFFF"/>
+                </a:solidFill>
+                <a:latin typeface="Calibri" pitchFamily="34" charset="0"/>
+                <a:ea typeface="Calibri" pitchFamily="34" charset="-122"/>
+                <a:cs typeface="Calibri" pitchFamily="34" charset="-120"/>
+              </a:rPr>
+              <a:t>Кайаал Яхья</a:t>
+            </a:r>
+            <a:pPr indent="0" marL="0">
+              <a:buNone/>
+            </a:pPr>
+            <a:r>
+              <a:rPr lang="en-US" sz="1800" dirty="0">
                 <a:solidFill>
                   <a:srgbClr val="9FB0C7"/>
                 </a:solidFill>
@@ -1564,22 +1741,22 @@
                 <a:ea typeface="Calibri" pitchFamily="34" charset="-122"/>
                 <a:cs typeface="Calibri" pitchFamily="34" charset="-120"/>
               </a:rPr>
-              <a:t>Находит в тексте места, которые разработчик поймёт неоднозначно, — до передачи задачи в разработку.</a:t>
-            </a:r>
-            <a:endParaRPr lang="en-US" sz="2600" dirty="0"/>
-          </a:p>
-        </p:txBody>
-      </p:sp>
-      <p:sp>
-        <p:nvSpPr>
-          <p:cNvPr id="6" name="Text 4"/>
-          <p:cNvSpPr txBox="1"/>
-          <p:nvPr/>
-        </p:nvSpPr>
-        <p:spPr>
-          <a:xfrm>
-            <a:off x="566928" y="5852160"/>
-            <a:ext cx="11027664" cy="365760"/>
+              <a:t>   AI Engineer</a:t>
+            </a:r>
+            <a:endParaRPr lang="en-US" sz="2400" dirty="0"/>
+          </a:p>
+        </p:txBody>
+      </p:sp>
+      <p:sp>
+        <p:nvSpPr>
+          <p:cNvPr id="9" name="Text 7"/>
+          <p:cNvSpPr txBox="1"/>
+          <p:nvPr/>
+        </p:nvSpPr>
+        <p:spPr>
+          <a:xfrm>
+            <a:off x="658368" y="5394960"/>
+            <a:ext cx="10844784" cy="384048"/>
           </a:xfrm>
           <a:prstGeom prst="rect">
             <a:avLst/>
@@ -1595,17 +1772,31 @@
               <a:buNone/>
             </a:pPr>
             <a:r>
+              <a:rPr lang="en-US" sz="2400" b="1" dirty="0">
+                <a:solidFill>
+                  <a:srgbClr val="FFFFFF"/>
+                </a:solidFill>
+                <a:latin typeface="Calibri" pitchFamily="34" charset="0"/>
+                <a:ea typeface="Calibri" pitchFamily="34" charset="-122"/>
+                <a:cs typeface="Calibri" pitchFamily="34" charset="-120"/>
+              </a:rPr>
+              <a:t>Караташоглу Фырат</a:t>
+            </a:r>
+            <a:pPr indent="0" marL="0">
+              <a:buNone/>
+            </a:pPr>
+            <a:r>
               <a:rPr lang="en-US" sz="1800" dirty="0">
                 <a:solidFill>
-                  <a:srgbClr val="8A8F98"/>
-                </a:solidFill>
-                <a:latin typeface="Calibri" pitchFamily="34" charset="0"/>
-                <a:ea typeface="Calibri" pitchFamily="34" charset="-122"/>
-                <a:cs typeface="Calibri" pitchFamily="34" charset="-120"/>
-              </a:rPr>
-              <a:t>Кайаал Яхья · Караташоглу Фырат — AI Engineers</a:t>
-            </a:r>
-            <a:endParaRPr lang="en-US" sz="1800" dirty="0"/>
+                  <a:srgbClr val="9FB0C7"/>
+                </a:solidFill>
+                <a:latin typeface="Calibri" pitchFamily="34" charset="0"/>
+                <a:ea typeface="Calibri" pitchFamily="34" charset="-122"/>
+                <a:cs typeface="Calibri" pitchFamily="34" charset="-120"/>
+              </a:rPr>
+              <a:t>   AI Engineer</a:t>
+            </a:r>
+            <a:endParaRPr lang="en-US" sz="2400" dirty="0"/>
           </a:p>
         </p:txBody>
       </p:sp>
@@ -1649,8 +1840,47 @@
         </p:nvSpPr>
         <p:spPr>
           <a:xfrm>
-            <a:off x="566928" y="457200"/>
-            <a:ext cx="11027664" cy="914400"/>
+            <a:off x="658368" y="566928"/>
+            <a:ext cx="10844784" cy="274320"/>
+          </a:xfrm>
+          <a:prstGeom prst="rect">
+            <a:avLst/>
+          </a:prstGeom>
+          <a:noFill/>
+          <a:ln/>
+        </p:spPr>
+        <p:txBody>
+          <a:bodyPr wrap="square" lIns="0" tIns="0" rIns="0" bIns="0" rtlCol="0" anchor="t"/>
+          <a:lstStyle/>
+          <a:p>
+            <a:pPr indent="0" marL="0">
+              <a:buNone/>
+            </a:pPr>
+            <a:r>
+              <a:rPr lang="en-US" sz="1150" b="1" spc="400" kern="0" dirty="0">
+                <a:solidFill>
+                  <a:srgbClr val="E5534B"/>
+                </a:solidFill>
+                <a:latin typeface="Calibri" pitchFamily="34" charset="0"/>
+                <a:ea typeface="Calibri" pitchFamily="34" charset="-122"/>
+                <a:cs typeface="Calibri" pitchFamily="34" charset="-120"/>
+              </a:rPr>
+              <a:t>ПРОБЛЕМА</a:t>
+            </a:r>
+            <a:endParaRPr lang="en-US" sz="1150" dirty="0"/>
+          </a:p>
+        </p:txBody>
+      </p:sp>
+      <p:sp>
+        <p:nvSpPr>
+          <p:cNvPr id="3" name="Text 1"/>
+          <p:cNvSpPr txBox="1"/>
+          <p:nvPr/>
+        </p:nvSpPr>
+        <p:spPr>
+          <a:xfrm>
+            <a:off x="658368" y="914400"/>
+            <a:ext cx="10844784" cy="914400"/>
           </a:xfrm>
           <a:prstGeom prst="rect">
             <a:avLst/>
@@ -1666,47 +1896,47 @@
           <a:p>
             <a:pPr indent="0" marL="0">
               <a:lnSpc>
-                <a:spcPct val="105000"/>
+                <a:spcPct val="106000"/>
               </a:lnSpc>
               <a:buNone/>
             </a:pPr>
             <a:r>
-              <a:rPr lang="en-US" sz="3300" b="1" dirty="0">
-                <a:solidFill>
-                  <a:srgbClr val="13223B"/>
+              <a:rPr lang="en-US" sz="3200" b="1" dirty="0">
+                <a:solidFill>
+                  <a:srgbClr val="0E1B2E"/>
                 </a:solidFill>
                 <a:latin typeface="Cambria" pitchFamily="34" charset="0"/>
                 <a:ea typeface="Cambria" pitchFamily="34" charset="-122"/>
                 <a:cs typeface="Cambria" pitchFamily="34" charset="-120"/>
               </a:rPr>
-              <a:t>Неточность в ТЗ находят уже на разработке — и цикл начинается заново</a:t>
-            </a:r>
-            <a:endParaRPr lang="en-US" sz="3300" dirty="0"/>
-          </a:p>
-        </p:txBody>
-      </p:sp>
-      <p:sp>
-        <p:nvSpPr>
-          <p:cNvPr id="3" name="Shape 1"/>
+              <a:t>Неточность в ТЗ находят уже на разработке</a:t>
+            </a:r>
+            <a:endParaRPr lang="en-US" sz="3200" dirty="0"/>
+          </a:p>
+        </p:txBody>
+      </p:sp>
+      <p:sp>
+        <p:nvSpPr>
+          <p:cNvPr id="4" name="Shape 2"/>
           <p:cNvSpPr/>
           <p:nvPr/>
         </p:nvSpPr>
         <p:spPr>
           <a:xfrm>
-            <a:off x="566928" y="2148840"/>
-            <a:ext cx="2015338" cy="1371600"/>
+            <a:off x="658368" y="2514600"/>
+            <a:ext cx="1964131" cy="1234440"/>
           </a:xfrm>
           <a:prstGeom prst="roundRect">
             <a:avLst>
-              <a:gd name="adj" fmla="val 6667"/>
+              <a:gd name="adj" fmla="val 7407"/>
             </a:avLst>
           </a:prstGeom>
           <a:solidFill>
-            <a:srgbClr val="EEF2F7"/>
+            <a:srgbClr val="F4F7FA"/>
           </a:solidFill>
           <a:ln w="12700">
             <a:solidFill>
-              <a:srgbClr val="D4DCE6"/>
+              <a:srgbClr val="E2E8F0"/>
             </a:solidFill>
             <a:prstDash val="solid"/>
           </a:ln>
@@ -1714,14 +1944,14 @@
       </p:sp>
       <p:sp>
         <p:nvSpPr>
-          <p:cNvPr id="4" name="Text 2"/>
-          <p:cNvSpPr txBox="1"/>
-          <p:nvPr/>
-        </p:nvSpPr>
-        <p:spPr>
-          <a:xfrm>
-            <a:off x="658368" y="2148840"/>
-            <a:ext cx="1832458" cy="1371600"/>
+          <p:cNvPr id="5" name="Text 3"/>
+          <p:cNvSpPr txBox="1"/>
+          <p:nvPr/>
+        </p:nvSpPr>
+        <p:spPr>
+          <a:xfrm>
+            <a:off x="731520" y="2514600"/>
+            <a:ext cx="1817827" cy="1234440"/>
           </a:xfrm>
           <a:prstGeom prst="rect">
             <a:avLst/>
@@ -1736,74 +1966,51 @@
           <a:lstStyle/>
           <a:p>
             <a:pPr algn="ctr" indent="0" marL="0">
-              <a:lnSpc>
-                <a:spcPct val="115000"/>
-              </a:lnSpc>
-              <a:buNone/>
-            </a:pPr>
-            <a:r>
-              <a:rPr lang="en-US" sz="1700" b="1" dirty="0">
-                <a:solidFill>
-                  <a:srgbClr val="1E3252"/>
-                </a:solidFill>
-                <a:latin typeface="Calibri" pitchFamily="34" charset="0"/>
-                <a:ea typeface="Calibri" pitchFamily="34" charset="-122"/>
-                <a:cs typeface="Calibri" pitchFamily="34" charset="-120"/>
-              </a:rPr>
-              <a:t>Аналитик</a:t>
-            </a:r>
-            <a:endParaRPr lang="en-US" sz="1700" dirty="0"/>
-          </a:p>
+              <a:buNone/>
+            </a:pPr>
+            <a:r>
+              <a:rPr lang="en-US" sz="1900" b="1" dirty="0">
+                <a:solidFill>
+                  <a:srgbClr val="1B2E4A"/>
+                </a:solidFill>
+                <a:latin typeface="Calibri" pitchFamily="34" charset="0"/>
+                <a:ea typeface="Calibri" pitchFamily="34" charset="-122"/>
+                <a:cs typeface="Calibri" pitchFamily="34" charset="-120"/>
+              </a:rPr>
+              <a:t>ТЗ готово</a:t>
+            </a:r>
+            <a:endParaRPr lang="en-US" sz="1900" dirty="0"/>
+          </a:p>
+        </p:txBody>
+      </p:sp>
+      <p:sp>
+        <p:nvSpPr>
+          <p:cNvPr id="6" name="Text 4"/>
+          <p:cNvSpPr txBox="1"/>
+          <p:nvPr/>
+        </p:nvSpPr>
+        <p:spPr>
+          <a:xfrm>
+            <a:off x="2622499" y="2514600"/>
+            <a:ext cx="256032" cy="1234440"/>
+          </a:xfrm>
+          <a:prstGeom prst="rect">
+            <a:avLst/>
+          </a:prstGeom>
+          <a:noFill/>
+          <a:ln/>
+        </p:spPr>
+        <p:txBody>
+          <a:bodyPr wrap="square" lIns="0" tIns="0" rIns="0" bIns="0" rtlCol="0" anchor="ctr"/>
+          <a:lstStyle/>
           <a:p>
             <a:pPr algn="ctr" indent="0" marL="0">
-              <a:lnSpc>
-                <a:spcPct val="115000"/>
-              </a:lnSpc>
-              <a:buNone/>
-            </a:pPr>
-            <a:r>
-              <a:rPr lang="en-US" sz="1700" b="1" dirty="0">
-                <a:solidFill>
-                  <a:srgbClr val="1E3252"/>
-                </a:solidFill>
-                <a:latin typeface="Calibri" pitchFamily="34" charset="0"/>
-                <a:ea typeface="Calibri" pitchFamily="34" charset="-122"/>
-                <a:cs typeface="Calibri" pitchFamily="34" charset="-120"/>
-              </a:rPr>
-              <a:t>пишет ТЗ</a:t>
-            </a:r>
-            <a:endParaRPr lang="en-US" sz="1700" dirty="0"/>
-          </a:p>
-        </p:txBody>
-      </p:sp>
-      <p:sp>
-        <p:nvSpPr>
-          <p:cNvPr id="5" name="Text 3"/>
-          <p:cNvSpPr txBox="1"/>
-          <p:nvPr/>
-        </p:nvSpPr>
-        <p:spPr>
-          <a:xfrm>
-            <a:off x="2582266" y="2148840"/>
-            <a:ext cx="237744" cy="1371600"/>
-          </a:xfrm>
-          <a:prstGeom prst="rect">
-            <a:avLst/>
-          </a:prstGeom>
-          <a:noFill/>
-          <a:ln/>
-        </p:spPr>
-        <p:txBody>
-          <a:bodyPr wrap="square" lIns="0" tIns="0" rIns="0" bIns="0" rtlCol="0" anchor="ctr"/>
-          <a:lstStyle/>
-          <a:p>
-            <a:pPr algn="ctr" indent="0" marL="0">
-              <a:buNone/>
-            </a:pPr>
-            <a:r>
-              <a:rPr lang="en-US" sz="2200" b="1" dirty="0">
-                <a:solidFill>
-                  <a:srgbClr val="8A8F98"/>
+              <a:buNone/>
+            </a:pPr>
+            <a:r>
+              <a:rPr lang="en-US" sz="2400" b="1" dirty="0">
+                <a:solidFill>
+                  <a:srgbClr val="C3CDD9"/>
                 </a:solidFill>
                 <a:latin typeface="Calibri" pitchFamily="34" charset="0"/>
                 <a:ea typeface="Calibri" pitchFamily="34" charset="-122"/>
@@ -1811,32 +2018,32 @@
               </a:rPr>
               <a:t>›</a:t>
             </a:r>
-            <a:endParaRPr lang="en-US" sz="2200" dirty="0"/>
-          </a:p>
-        </p:txBody>
-      </p:sp>
-      <p:sp>
-        <p:nvSpPr>
-          <p:cNvPr id="6" name="Shape 4"/>
+            <a:endParaRPr lang="en-US" sz="2400" dirty="0"/>
+          </a:p>
+        </p:txBody>
+      </p:sp>
+      <p:sp>
+        <p:nvSpPr>
+          <p:cNvPr id="7" name="Shape 5"/>
           <p:cNvSpPr/>
           <p:nvPr/>
         </p:nvSpPr>
         <p:spPr>
           <a:xfrm>
-            <a:off x="2820010" y="2148840"/>
-            <a:ext cx="2015338" cy="1371600"/>
+            <a:off x="2878531" y="2514600"/>
+            <a:ext cx="1964131" cy="1234440"/>
           </a:xfrm>
           <a:prstGeom prst="roundRect">
             <a:avLst>
-              <a:gd name="adj" fmla="val 6667"/>
+              <a:gd name="adj" fmla="val 7407"/>
             </a:avLst>
           </a:prstGeom>
           <a:solidFill>
-            <a:srgbClr val="EEF2F7"/>
+            <a:srgbClr val="F4F7FA"/>
           </a:solidFill>
           <a:ln w="12700">
             <a:solidFill>
-              <a:srgbClr val="D4DCE6"/>
+              <a:srgbClr val="E2E8F0"/>
             </a:solidFill>
             <a:prstDash val="solid"/>
           </a:ln>
@@ -1844,14 +2051,14 @@
       </p:sp>
       <p:sp>
         <p:nvSpPr>
-          <p:cNvPr id="7" name="Text 5"/>
-          <p:cNvSpPr txBox="1"/>
-          <p:nvPr/>
-        </p:nvSpPr>
-        <p:spPr>
-          <a:xfrm>
-            <a:off x="2911450" y="2148840"/>
-            <a:ext cx="1832458" cy="1371600"/>
+          <p:cNvPr id="8" name="Text 6"/>
+          <p:cNvSpPr txBox="1"/>
+          <p:nvPr/>
+        </p:nvSpPr>
+        <p:spPr>
+          <a:xfrm>
+            <a:off x="2951683" y="2514600"/>
+            <a:ext cx="1817827" cy="1234440"/>
           </a:xfrm>
           <a:prstGeom prst="rect">
             <a:avLst/>
@@ -1866,74 +2073,51 @@
           <a:lstStyle/>
           <a:p>
             <a:pPr algn="ctr" indent="0" marL="0">
-              <a:lnSpc>
-                <a:spcPct val="115000"/>
-              </a:lnSpc>
-              <a:buNone/>
-            </a:pPr>
-            <a:r>
-              <a:rPr lang="en-US" sz="1700" b="1" dirty="0">
-                <a:solidFill>
-                  <a:srgbClr val="1E3252"/>
-                </a:solidFill>
-                <a:latin typeface="Calibri" pitchFamily="34" charset="0"/>
-                <a:ea typeface="Calibri" pitchFamily="34" charset="-122"/>
-                <a:cs typeface="Calibri" pitchFamily="34" charset="-120"/>
-              </a:rPr>
-              <a:t>Передача</a:t>
-            </a:r>
-            <a:endParaRPr lang="en-US" sz="1700" dirty="0"/>
-          </a:p>
+              <a:buNone/>
+            </a:pPr>
+            <a:r>
+              <a:rPr lang="en-US" sz="1900" b="1" dirty="0">
+                <a:solidFill>
+                  <a:srgbClr val="1B2E4A"/>
+                </a:solidFill>
+                <a:latin typeface="Calibri" pitchFamily="34" charset="0"/>
+                <a:ea typeface="Calibri" pitchFamily="34" charset="-122"/>
+                <a:cs typeface="Calibri" pitchFamily="34" charset="-120"/>
+              </a:rPr>
+              <a:t>Разработка</a:t>
+            </a:r>
+            <a:endParaRPr lang="en-US" sz="1900" dirty="0"/>
+          </a:p>
+        </p:txBody>
+      </p:sp>
+      <p:sp>
+        <p:nvSpPr>
+          <p:cNvPr id="9" name="Text 7"/>
+          <p:cNvSpPr txBox="1"/>
+          <p:nvPr/>
+        </p:nvSpPr>
+        <p:spPr>
+          <a:xfrm>
+            <a:off x="4842662" y="2514600"/>
+            <a:ext cx="256032" cy="1234440"/>
+          </a:xfrm>
+          <a:prstGeom prst="rect">
+            <a:avLst/>
+          </a:prstGeom>
+          <a:noFill/>
+          <a:ln/>
+        </p:spPr>
+        <p:txBody>
+          <a:bodyPr wrap="square" lIns="0" tIns="0" rIns="0" bIns="0" rtlCol="0" anchor="ctr"/>
+          <a:lstStyle/>
           <a:p>
             <a:pPr algn="ctr" indent="0" marL="0">
-              <a:lnSpc>
-                <a:spcPct val="115000"/>
-              </a:lnSpc>
-              <a:buNone/>
-            </a:pPr>
-            <a:r>
-              <a:rPr lang="en-US" sz="1700" b="1" dirty="0">
-                <a:solidFill>
-                  <a:srgbClr val="1E3252"/>
-                </a:solidFill>
-                <a:latin typeface="Calibri" pitchFamily="34" charset="0"/>
-                <a:ea typeface="Calibri" pitchFamily="34" charset="-122"/>
-                <a:cs typeface="Calibri" pitchFamily="34" charset="-120"/>
-              </a:rPr>
-              <a:t>в разработку</a:t>
-            </a:r>
-            <a:endParaRPr lang="en-US" sz="1700" dirty="0"/>
-          </a:p>
-        </p:txBody>
-      </p:sp>
-      <p:sp>
-        <p:nvSpPr>
-          <p:cNvPr id="8" name="Text 6"/>
-          <p:cNvSpPr txBox="1"/>
-          <p:nvPr/>
-        </p:nvSpPr>
-        <p:spPr>
-          <a:xfrm>
-            <a:off x="4835347" y="2148840"/>
-            <a:ext cx="237744" cy="1371600"/>
-          </a:xfrm>
-          <a:prstGeom prst="rect">
-            <a:avLst/>
-          </a:prstGeom>
-          <a:noFill/>
-          <a:ln/>
-        </p:spPr>
-        <p:txBody>
-          <a:bodyPr wrap="square" lIns="0" tIns="0" rIns="0" bIns="0" rtlCol="0" anchor="ctr"/>
-          <a:lstStyle/>
-          <a:p>
-            <a:pPr algn="ctr" indent="0" marL="0">
-              <a:buNone/>
-            </a:pPr>
-            <a:r>
-              <a:rPr lang="en-US" sz="2200" b="1" dirty="0">
-                <a:solidFill>
-                  <a:srgbClr val="8A8F98"/>
+              <a:buNone/>
+            </a:pPr>
+            <a:r>
+              <a:rPr lang="en-US" sz="2400" b="1" dirty="0">
+                <a:solidFill>
+                  <a:srgbClr val="C3CDD9"/>
                 </a:solidFill>
                 <a:latin typeface="Calibri" pitchFamily="34" charset="0"/>
                 <a:ea typeface="Calibri" pitchFamily="34" charset="-122"/>
@@ -1941,28 +2125,28 @@
               </a:rPr>
               <a:t>›</a:t>
             </a:r>
-            <a:endParaRPr lang="en-US" sz="2200" dirty="0"/>
-          </a:p>
-        </p:txBody>
-      </p:sp>
-      <p:sp>
-        <p:nvSpPr>
-          <p:cNvPr id="9" name="Shape 7"/>
+            <a:endParaRPr lang="en-US" sz="2400" dirty="0"/>
+          </a:p>
+        </p:txBody>
+      </p:sp>
+      <p:sp>
+        <p:nvSpPr>
+          <p:cNvPr id="10" name="Shape 8"/>
           <p:cNvSpPr/>
           <p:nvPr/>
         </p:nvSpPr>
         <p:spPr>
           <a:xfrm>
-            <a:off x="5073091" y="2148840"/>
-            <a:ext cx="2015338" cy="1371600"/>
+            <a:off x="5098694" y="2514600"/>
+            <a:ext cx="1964131" cy="1234440"/>
           </a:xfrm>
           <a:prstGeom prst="roundRect">
             <a:avLst>
-              <a:gd name="adj" fmla="val 6667"/>
+              <a:gd name="adj" fmla="val 7407"/>
             </a:avLst>
           </a:prstGeom>
           <a:solidFill>
-            <a:srgbClr val="FBE9E7"/>
+            <a:srgbClr val="FCEDEB"/>
           </a:solidFill>
           <a:ln w="19050">
             <a:solidFill>
@@ -1974,14 +2158,14 @@
       </p:sp>
       <p:sp>
         <p:nvSpPr>
-          <p:cNvPr id="10" name="Text 8"/>
-          <p:cNvSpPr txBox="1"/>
-          <p:nvPr/>
-        </p:nvSpPr>
-        <p:spPr>
-          <a:xfrm>
-            <a:off x="5164531" y="2148840"/>
-            <a:ext cx="1832458" cy="1371600"/>
+          <p:cNvPr id="11" name="Text 9"/>
+          <p:cNvSpPr txBox="1"/>
+          <p:nvPr/>
+        </p:nvSpPr>
+        <p:spPr>
+          <a:xfrm>
+            <a:off x="5171846" y="2514600"/>
+            <a:ext cx="1817827" cy="1234440"/>
           </a:xfrm>
           <a:prstGeom prst="rect">
             <a:avLst/>
@@ -1996,13 +2180,10 @@
           <a:lstStyle/>
           <a:p>
             <a:pPr algn="ctr" indent="0" marL="0">
-              <a:lnSpc>
-                <a:spcPct val="115000"/>
-              </a:lnSpc>
-              <a:buNone/>
-            </a:pPr>
-            <a:r>
-              <a:rPr lang="en-US" sz="1700" b="1" dirty="0">
+              <a:buNone/>
+            </a:pPr>
+            <a:r>
+              <a:rPr lang="en-US" sz="1900" b="1" dirty="0">
                 <a:solidFill>
                   <a:srgbClr val="8C2F27"/>
                 </a:solidFill>
@@ -2010,60 +2191,40 @@
                 <a:ea typeface="Calibri" pitchFamily="34" charset="-122"/>
                 <a:cs typeface="Calibri" pitchFamily="34" charset="-120"/>
               </a:rPr>
-              <a:t>Вопрос или</a:t>
-            </a:r>
-            <a:endParaRPr lang="en-US" sz="1700" dirty="0"/>
-          </a:p>
+              <a:t>Неоднозначность</a:t>
+            </a:r>
+            <a:endParaRPr lang="en-US" sz="1900" dirty="0"/>
+          </a:p>
+        </p:txBody>
+      </p:sp>
+      <p:sp>
+        <p:nvSpPr>
+          <p:cNvPr id="12" name="Text 10"/>
+          <p:cNvSpPr txBox="1"/>
+          <p:nvPr/>
+        </p:nvSpPr>
+        <p:spPr>
+          <a:xfrm>
+            <a:off x="7062826" y="2514600"/>
+            <a:ext cx="256032" cy="1234440"/>
+          </a:xfrm>
+          <a:prstGeom prst="rect">
+            <a:avLst/>
+          </a:prstGeom>
+          <a:noFill/>
+          <a:ln/>
+        </p:spPr>
+        <p:txBody>
+          <a:bodyPr wrap="square" lIns="0" tIns="0" rIns="0" bIns="0" rtlCol="0" anchor="ctr"/>
+          <a:lstStyle/>
           <a:p>
             <a:pPr algn="ctr" indent="0" marL="0">
-              <a:lnSpc>
-                <a:spcPct val="115000"/>
-              </a:lnSpc>
-              <a:buNone/>
-            </a:pPr>
-            <a:r>
-              <a:rPr lang="en-US" sz="1700" b="1" dirty="0">
-                <a:solidFill>
-                  <a:srgbClr val="8C2F27"/>
-                </a:solidFill>
-                <a:latin typeface="Calibri" pitchFamily="34" charset="0"/>
-                <a:ea typeface="Calibri" pitchFamily="34" charset="-122"/>
-                <a:cs typeface="Calibri" pitchFamily="34" charset="-120"/>
-              </a:rPr>
-              <a:t>неоднозначность</a:t>
-            </a:r>
-            <a:endParaRPr lang="en-US" sz="1700" dirty="0"/>
-          </a:p>
-        </p:txBody>
-      </p:sp>
-      <p:sp>
-        <p:nvSpPr>
-          <p:cNvPr id="11" name="Text 9"/>
-          <p:cNvSpPr txBox="1"/>
-          <p:nvPr/>
-        </p:nvSpPr>
-        <p:spPr>
-          <a:xfrm>
-            <a:off x="7088429" y="2148840"/>
-            <a:ext cx="237744" cy="1371600"/>
-          </a:xfrm>
-          <a:prstGeom prst="rect">
-            <a:avLst/>
-          </a:prstGeom>
-          <a:noFill/>
-          <a:ln/>
-        </p:spPr>
-        <p:txBody>
-          <a:bodyPr wrap="square" lIns="0" tIns="0" rIns="0" bIns="0" rtlCol="0" anchor="ctr"/>
-          <a:lstStyle/>
-          <a:p>
-            <a:pPr algn="ctr" indent="0" marL="0">
-              <a:buNone/>
-            </a:pPr>
-            <a:r>
-              <a:rPr lang="en-US" sz="2200" b="1" dirty="0">
-                <a:solidFill>
-                  <a:srgbClr val="8A8F98"/>
+              <a:buNone/>
+            </a:pPr>
+            <a:r>
+              <a:rPr lang="en-US" sz="2400" b="1" dirty="0">
+                <a:solidFill>
+                  <a:srgbClr val="C3CDD9"/>
                 </a:solidFill>
                 <a:latin typeface="Calibri" pitchFamily="34" charset="0"/>
                 <a:ea typeface="Calibri" pitchFamily="34" charset="-122"/>
@@ -2071,28 +2232,28 @@
               </a:rPr>
               <a:t>›</a:t>
             </a:r>
-            <a:endParaRPr lang="en-US" sz="2200" dirty="0"/>
-          </a:p>
-        </p:txBody>
-      </p:sp>
-      <p:sp>
-        <p:nvSpPr>
-          <p:cNvPr id="12" name="Shape 10"/>
+            <a:endParaRPr lang="en-US" sz="2400" dirty="0"/>
+          </a:p>
+        </p:txBody>
+      </p:sp>
+      <p:sp>
+        <p:nvSpPr>
+          <p:cNvPr id="13" name="Shape 11"/>
           <p:cNvSpPr/>
           <p:nvPr/>
         </p:nvSpPr>
         <p:spPr>
           <a:xfrm>
-            <a:off x="7326173" y="2148840"/>
-            <a:ext cx="2015338" cy="1371600"/>
+            <a:off x="7318858" y="2514600"/>
+            <a:ext cx="1964131" cy="1234440"/>
           </a:xfrm>
           <a:prstGeom prst="roundRect">
             <a:avLst>
-              <a:gd name="adj" fmla="val 6667"/>
+              <a:gd name="adj" fmla="val 7407"/>
             </a:avLst>
           </a:prstGeom>
           <a:solidFill>
-            <a:srgbClr val="FBE9E7"/>
+            <a:srgbClr val="FCEDEB"/>
           </a:solidFill>
           <a:ln w="19050">
             <a:solidFill>
@@ -2104,14 +2265,14 @@
       </p:sp>
       <p:sp>
         <p:nvSpPr>
-          <p:cNvPr id="13" name="Text 11"/>
-          <p:cNvSpPr txBox="1"/>
-          <p:nvPr/>
-        </p:nvSpPr>
-        <p:spPr>
-          <a:xfrm>
-            <a:off x="7417613" y="2148840"/>
-            <a:ext cx="1832458" cy="1371600"/>
+          <p:cNvPr id="14" name="Text 12"/>
+          <p:cNvSpPr txBox="1"/>
+          <p:nvPr/>
+        </p:nvSpPr>
+        <p:spPr>
+          <a:xfrm>
+            <a:off x="7392010" y="2514600"/>
+            <a:ext cx="1817827" cy="1234440"/>
           </a:xfrm>
           <a:prstGeom prst="rect">
             <a:avLst/>
@@ -2126,13 +2287,10 @@
           <a:lstStyle/>
           <a:p>
             <a:pPr algn="ctr" indent="0" marL="0">
-              <a:lnSpc>
-                <a:spcPct val="115000"/>
-              </a:lnSpc>
-              <a:buNone/>
-            </a:pPr>
-            <a:r>
-              <a:rPr lang="en-US" sz="1700" b="1" dirty="0">
+              <a:buNone/>
+            </a:pPr>
+            <a:r>
+              <a:rPr lang="en-US" sz="1900" b="1" dirty="0">
                 <a:solidFill>
                   <a:srgbClr val="8C2F27"/>
                 </a:solidFill>
@@ -2142,58 +2300,38 @@
               </a:rPr>
               <a:t>Возврат</a:t>
             </a:r>
-            <a:endParaRPr lang="en-US" sz="1700" dirty="0"/>
-          </a:p>
+            <a:endParaRPr lang="en-US" sz="1900" dirty="0"/>
+          </a:p>
+        </p:txBody>
+      </p:sp>
+      <p:sp>
+        <p:nvSpPr>
+          <p:cNvPr id="15" name="Text 13"/>
+          <p:cNvSpPr txBox="1"/>
+          <p:nvPr/>
+        </p:nvSpPr>
+        <p:spPr>
+          <a:xfrm>
+            <a:off x="9282989" y="2514600"/>
+            <a:ext cx="256032" cy="1234440"/>
+          </a:xfrm>
+          <a:prstGeom prst="rect">
+            <a:avLst/>
+          </a:prstGeom>
+          <a:noFill/>
+          <a:ln/>
+        </p:spPr>
+        <p:txBody>
+          <a:bodyPr wrap="square" lIns="0" tIns="0" rIns="0" bIns="0" rtlCol="0" anchor="ctr"/>
+          <a:lstStyle/>
           <a:p>
             <a:pPr algn="ctr" indent="0" marL="0">
-              <a:lnSpc>
-                <a:spcPct val="115000"/>
-              </a:lnSpc>
-              <a:buNone/>
-            </a:pPr>
-            <a:r>
-              <a:rPr lang="en-US" sz="1700" b="1" dirty="0">
-                <a:solidFill>
-                  <a:srgbClr val="8C2F27"/>
-                </a:solidFill>
-                <a:latin typeface="Calibri" pitchFamily="34" charset="0"/>
-                <a:ea typeface="Calibri" pitchFamily="34" charset="-122"/>
-                <a:cs typeface="Calibri" pitchFamily="34" charset="-120"/>
-              </a:rPr>
-              <a:t>аналитику</a:t>
-            </a:r>
-            <a:endParaRPr lang="en-US" sz="1700" dirty="0"/>
-          </a:p>
-        </p:txBody>
-      </p:sp>
-      <p:sp>
-        <p:nvSpPr>
-          <p:cNvPr id="14" name="Text 12"/>
-          <p:cNvSpPr txBox="1"/>
-          <p:nvPr/>
-        </p:nvSpPr>
-        <p:spPr>
-          <a:xfrm>
-            <a:off x="9341510" y="2148840"/>
-            <a:ext cx="237744" cy="1371600"/>
-          </a:xfrm>
-          <a:prstGeom prst="rect">
-            <a:avLst/>
-          </a:prstGeom>
-          <a:noFill/>
-          <a:ln/>
-        </p:spPr>
-        <p:txBody>
-          <a:bodyPr wrap="square" lIns="0" tIns="0" rIns="0" bIns="0" rtlCol="0" anchor="ctr"/>
-          <a:lstStyle/>
-          <a:p>
-            <a:pPr algn="ctr" indent="0" marL="0">
-              <a:buNone/>
-            </a:pPr>
-            <a:r>
-              <a:rPr lang="en-US" sz="2200" b="1" dirty="0">
-                <a:solidFill>
-                  <a:srgbClr val="8A8F98"/>
+              <a:buNone/>
+            </a:pPr>
+            <a:r>
+              <a:rPr lang="en-US" sz="2400" b="1" dirty="0">
+                <a:solidFill>
+                  <a:srgbClr val="C3CDD9"/>
                 </a:solidFill>
                 <a:latin typeface="Calibri" pitchFamily="34" charset="0"/>
                 <a:ea typeface="Calibri" pitchFamily="34" charset="-122"/>
@@ -2201,28 +2339,28 @@
               </a:rPr>
               <a:t>›</a:t>
             </a:r>
-            <a:endParaRPr lang="en-US" sz="2200" dirty="0"/>
-          </a:p>
-        </p:txBody>
-      </p:sp>
-      <p:sp>
-        <p:nvSpPr>
-          <p:cNvPr id="15" name="Shape 13"/>
+            <a:endParaRPr lang="en-US" sz="2400" dirty="0"/>
+          </a:p>
+        </p:txBody>
+      </p:sp>
+      <p:sp>
+        <p:nvSpPr>
+          <p:cNvPr id="16" name="Shape 14"/>
           <p:cNvSpPr/>
           <p:nvPr/>
         </p:nvSpPr>
         <p:spPr>
           <a:xfrm>
-            <a:off x="9579254" y="2148840"/>
-            <a:ext cx="2015338" cy="1371600"/>
+            <a:off x="9539021" y="2514600"/>
+            <a:ext cx="1964131" cy="1234440"/>
           </a:xfrm>
           <a:prstGeom prst="roundRect">
             <a:avLst>
-              <a:gd name="adj" fmla="val 6667"/>
+              <a:gd name="adj" fmla="val 7407"/>
             </a:avLst>
           </a:prstGeom>
           <a:solidFill>
-            <a:srgbClr val="FBE9E7"/>
+            <a:srgbClr val="FCEDEB"/>
           </a:solidFill>
           <a:ln w="19050">
             <a:solidFill>
@@ -2234,14 +2372,14 @@
       </p:sp>
       <p:sp>
         <p:nvSpPr>
-          <p:cNvPr id="16" name="Text 14"/>
-          <p:cNvSpPr txBox="1"/>
-          <p:nvPr/>
-        </p:nvSpPr>
-        <p:spPr>
-          <a:xfrm>
-            <a:off x="9670694" y="2148840"/>
-            <a:ext cx="1832458" cy="1371600"/>
+          <p:cNvPr id="17" name="Text 15"/>
+          <p:cNvSpPr txBox="1"/>
+          <p:nvPr/>
+        </p:nvSpPr>
+        <p:spPr>
+          <a:xfrm>
+            <a:off x="9612173" y="2514600"/>
+            <a:ext cx="1817827" cy="1234440"/>
           </a:xfrm>
           <a:prstGeom prst="rect">
             <a:avLst/>
@@ -2256,13 +2394,10 @@
           <a:lstStyle/>
           <a:p>
             <a:pPr algn="ctr" indent="0" marL="0">
-              <a:lnSpc>
-                <a:spcPct val="115000"/>
-              </a:lnSpc>
-              <a:buNone/>
-            </a:pPr>
-            <a:r>
-              <a:rPr lang="en-US" sz="1700" b="1" dirty="0">
+              <a:buNone/>
+            </a:pPr>
+            <a:r>
+              <a:rPr lang="en-US" sz="1900" b="1" dirty="0">
                 <a:solidFill>
                   <a:srgbClr val="8C2F27"/>
                 </a:solidFill>
@@ -2270,114 +2405,90 @@
                 <a:ea typeface="Calibri" pitchFamily="34" charset="-122"/>
                 <a:cs typeface="Calibri" pitchFamily="34" charset="-120"/>
               </a:rPr>
-              <a:t>Пересогласование</a:t>
-            </a:r>
-            <a:endParaRPr lang="en-US" sz="1700" dirty="0"/>
-          </a:p>
-          <a:p>
-            <a:pPr algn="ctr" indent="0" marL="0">
-              <a:lnSpc>
-                <a:spcPct val="115000"/>
-              </a:lnSpc>
-              <a:buNone/>
-            </a:pPr>
-            <a:r>
-              <a:rPr lang="en-US" sz="1700" b="1" dirty="0">
-                <a:solidFill>
-                  <a:srgbClr val="8C2F27"/>
-                </a:solidFill>
-                <a:latin typeface="Calibri" pitchFamily="34" charset="0"/>
-                <a:ea typeface="Calibri" pitchFamily="34" charset="-122"/>
-                <a:cs typeface="Calibri" pitchFamily="34" charset="-120"/>
-              </a:rPr>
-              <a:t>и переделка</a:t>
-            </a:r>
-            <a:endParaRPr lang="en-US" sz="1700" dirty="0"/>
-          </a:p>
-        </p:txBody>
-      </p:sp>
-      <p:sp>
-        <p:nvSpPr>
-          <p:cNvPr id="17" name="Text 15"/>
-          <p:cNvSpPr txBox="1"/>
-          <p:nvPr/>
-        </p:nvSpPr>
-        <p:spPr>
-          <a:xfrm>
-            <a:off x="566928" y="3977640"/>
-            <a:ext cx="11027664" cy="822960"/>
-          </a:xfrm>
-          <a:prstGeom prst="rect">
-            <a:avLst/>
-          </a:prstGeom>
-          <a:noFill/>
-          <a:ln/>
-        </p:spPr>
-        <p:txBody>
-          <a:bodyPr wrap="square" lIns="0" tIns="0" rIns="0" bIns="0" rtlCol="0" anchor="t">
-            <a:normAutofit/>
-          </a:bodyPr>
+              <a:t>Переделка</a:t>
+            </a:r>
+            <a:endParaRPr lang="en-US" sz="1900" dirty="0"/>
+          </a:p>
+        </p:txBody>
+      </p:sp>
+      <p:sp>
+        <p:nvSpPr>
+          <p:cNvPr id="18" name="Text 16"/>
+          <p:cNvSpPr txBox="1"/>
+          <p:nvPr/>
+        </p:nvSpPr>
+        <p:spPr>
+          <a:xfrm>
+            <a:off x="658368" y="4343400"/>
+            <a:ext cx="10844784" cy="731520"/>
+          </a:xfrm>
+          <a:prstGeom prst="rect">
+            <a:avLst/>
+          </a:prstGeom>
+          <a:noFill/>
+          <a:ln/>
+        </p:spPr>
+        <p:txBody>
+          <a:bodyPr wrap="square" lIns="0" tIns="0" rIns="0" bIns="0" rtlCol="0" anchor="t"/>
           <a:lstStyle/>
           <a:p>
             <a:pPr indent="0" marL="0">
               <a:lnSpc>
-                <a:spcPct val="125000"/>
+                <a:spcPct val="120000"/>
               </a:lnSpc>
               <a:buNone/>
             </a:pPr>
             <a:r>
-              <a:rPr lang="en-US" sz="2800" dirty="0">
-                <a:solidFill>
-                  <a:srgbClr val="1E3252"/>
-                </a:solidFill>
-                <a:latin typeface="Calibri" pitchFamily="34" charset="0"/>
-                <a:ea typeface="Calibri" pitchFamily="34" charset="-122"/>
-                <a:cs typeface="Calibri" pitchFamily="34" charset="-120"/>
-              </a:rPr>
-              <a:t>Каждое такое возвращение — это пересогласование требований, переделка реализации и повторное тестирование.</a:t>
-            </a:r>
-            <a:endParaRPr lang="en-US" sz="2800" dirty="0"/>
-          </a:p>
-        </p:txBody>
-      </p:sp>
-      <p:sp>
-        <p:nvSpPr>
-          <p:cNvPr id="18" name="Text 16"/>
-          <p:cNvSpPr txBox="1"/>
-          <p:nvPr/>
-        </p:nvSpPr>
-        <p:spPr>
-          <a:xfrm>
-            <a:off x="566928" y="4983480"/>
-            <a:ext cx="11027664" cy="640080"/>
-          </a:xfrm>
-          <a:prstGeom prst="rect">
-            <a:avLst/>
-          </a:prstGeom>
-          <a:noFill/>
-          <a:ln/>
-        </p:spPr>
-        <p:txBody>
-          <a:bodyPr wrap="square" lIns="0" tIns="0" rIns="0" bIns="0" rtlCol="0" anchor="t">
-            <a:normAutofit/>
-          </a:bodyPr>
-          <a:lstStyle/>
-          <a:p>
-            <a:pPr indent="0" marL="0">
-              <a:buNone/>
-            </a:pPr>
-            <a:r>
-              <a:rPr lang="en-US" sz="2400" i="1" dirty="0">
-                <a:solidFill>
-                  <a:srgbClr val="566173"/>
-                </a:solidFill>
-                <a:latin typeface="Calibri" pitchFamily="34" charset="0"/>
-                <a:ea typeface="Calibri" pitchFamily="34" charset="-122"/>
-                <a:cs typeface="Calibri" pitchFamily="34" charset="-120"/>
-              </a:rPr>
-              <a:t>Ручное ревью помогает, но зависит от опыта и загрузки конкретного человека.</a:t>
-            </a:r>
-            <a:endParaRPr lang="en-US" sz="2400" dirty="0"/>
+              <a:rPr lang="en-US" sz="2600" dirty="0">
+                <a:solidFill>
+                  <a:srgbClr val="5A6678"/>
+                </a:solidFill>
+                <a:latin typeface="Calibri" pitchFamily="34" charset="0"/>
+                <a:ea typeface="Calibri" pitchFamily="34" charset="-122"/>
+                <a:cs typeface="Calibri" pitchFamily="34" charset="-120"/>
+              </a:rPr>
+              <a:t>Каждый возврат — это пересогласование, переделка и повторное тестирование.</a:t>
+            </a:r>
+            <a:endParaRPr lang="en-US" sz="2600" dirty="0"/>
+          </a:p>
+        </p:txBody>
+      </p:sp>
+      <p:sp>
+        <p:nvSpPr>
+          <p:cNvPr id="19" name="Text 17"/>
+          <p:cNvSpPr txBox="1"/>
+          <p:nvPr/>
+        </p:nvSpPr>
+        <p:spPr>
+          <a:xfrm>
+            <a:off x="10954512" y="548640"/>
+            <a:ext cx="548640" cy="292608"/>
+          </a:xfrm>
+          <a:prstGeom prst="rect">
+            <a:avLst/>
+          </a:prstGeom>
+          <a:noFill/>
+          <a:ln/>
+        </p:spPr>
+        <p:txBody>
+          <a:bodyPr wrap="square" lIns="0" tIns="0" rIns="0" bIns="0" rtlCol="0" anchor="t"/>
+          <a:lstStyle/>
+          <a:p>
+            <a:pPr algn="r" indent="0" marL="0">
+              <a:buNone/>
+            </a:pPr>
+            <a:r>
+              <a:rPr lang="en-US" sz="1200" spc="100" kern="0" dirty="0">
+                <a:solidFill>
+                  <a:srgbClr val="C3CDD9"/>
+                </a:solidFill>
+                <a:latin typeface="Calibri" pitchFamily="34" charset="0"/>
+                <a:ea typeface="Calibri" pitchFamily="34" charset="-122"/>
+                <a:cs typeface="Calibri" pitchFamily="34" charset="-120"/>
+              </a:rPr>
+              <a:t>02</a:t>
+            </a:r>
+            <a:endParaRPr lang="en-US" sz="1200" dirty="0"/>
           </a:p>
         </p:txBody>
       </p:sp>
@@ -2421,8 +2532,47 @@
         </p:nvSpPr>
         <p:spPr>
           <a:xfrm>
-            <a:off x="566928" y="457200"/>
-            <a:ext cx="11027664" cy="914400"/>
+            <a:off x="658368" y="566928"/>
+            <a:ext cx="10844784" cy="274320"/>
+          </a:xfrm>
+          <a:prstGeom prst="rect">
+            <a:avLst/>
+          </a:prstGeom>
+          <a:noFill/>
+          <a:ln/>
+        </p:spPr>
+        <p:txBody>
+          <a:bodyPr wrap="square" lIns="0" tIns="0" rIns="0" bIns="0" rtlCol="0" anchor="t"/>
+          <a:lstStyle/>
+          <a:p>
+            <a:pPr indent="0" marL="0">
+              <a:buNone/>
+            </a:pPr>
+            <a:r>
+              <a:rPr lang="en-US" sz="1150" b="1" spc="400" kern="0" dirty="0">
+                <a:solidFill>
+                  <a:srgbClr val="E5534B"/>
+                </a:solidFill>
+                <a:latin typeface="Calibri" pitchFamily="34" charset="0"/>
+                <a:ea typeface="Calibri" pitchFamily="34" charset="-122"/>
+                <a:cs typeface="Calibri" pitchFamily="34" charset="-120"/>
+              </a:rPr>
+              <a:t>ДЕМО</a:t>
+            </a:r>
+            <a:endParaRPr lang="en-US" sz="1150" dirty="0"/>
+          </a:p>
+        </p:txBody>
+      </p:sp>
+      <p:sp>
+        <p:nvSpPr>
+          <p:cNvPr id="3" name="Text 1"/>
+          <p:cNvSpPr txBox="1"/>
+          <p:nvPr/>
+        </p:nvSpPr>
+        <p:spPr>
+          <a:xfrm>
+            <a:off x="658368" y="914400"/>
+            <a:ext cx="10844784" cy="914400"/>
           </a:xfrm>
           <a:prstGeom prst="rect">
             <a:avLst/>
@@ -2438,47 +2588,47 @@
           <a:p>
             <a:pPr indent="0" marL="0">
               <a:lnSpc>
-                <a:spcPct val="105000"/>
+                <a:spcPct val="106000"/>
               </a:lnSpc>
               <a:buNone/>
             </a:pPr>
             <a:r>
-              <a:rPr lang="en-US" sz="3300" b="1" dirty="0">
-                <a:solidFill>
-                  <a:srgbClr val="13223B"/>
+              <a:rPr lang="en-US" sz="3200" b="1" dirty="0">
+                <a:solidFill>
+                  <a:srgbClr val="0E1B2E"/>
                 </a:solidFill>
                 <a:latin typeface="Cambria" pitchFamily="34" charset="0"/>
                 <a:ea typeface="Cambria" pitchFamily="34" charset="-122"/>
                 <a:cs typeface="Cambria" pitchFamily="34" charset="-120"/>
               </a:rPr>
-              <a:t>Один сценарий: от документа до конкретного замечания</a:t>
-            </a:r>
-            <a:endParaRPr lang="en-US" sz="3300" dirty="0"/>
-          </a:p>
-        </p:txBody>
-      </p:sp>
-      <p:sp>
-        <p:nvSpPr>
-          <p:cNvPr id="3" name="Shape 1"/>
+              <a:t>Загрузил ТЗ — получил замечания с цитатами</a:t>
+            </a:r>
+            <a:endParaRPr lang="en-US" sz="3200" dirty="0"/>
+          </a:p>
+        </p:txBody>
+      </p:sp>
+      <p:sp>
+        <p:nvSpPr>
+          <p:cNvPr id="4" name="Shape 2"/>
           <p:cNvSpPr/>
           <p:nvPr/>
         </p:nvSpPr>
         <p:spPr>
           <a:xfrm>
-            <a:off x="566928" y="2103120"/>
-            <a:ext cx="2551176" cy="1828800"/>
+            <a:off x="658368" y="2057400"/>
+            <a:ext cx="2505456" cy="1234440"/>
           </a:xfrm>
           <a:prstGeom prst="roundRect">
             <a:avLst>
-              <a:gd name="adj" fmla="val 6000"/>
+              <a:gd name="adj" fmla="val 7407"/>
             </a:avLst>
           </a:prstGeom>
           <a:solidFill>
-            <a:srgbClr val="EEF2F7"/>
+            <a:srgbClr val="F4F7FA"/>
           </a:solidFill>
           <a:ln w="12700">
             <a:solidFill>
-              <a:srgbClr val="D4DCE6"/>
+              <a:srgbClr val="E2E8F0"/>
             </a:solidFill>
             <a:prstDash val="solid"/>
           </a:ln>
@@ -2486,104 +2636,65 @@
       </p:sp>
       <p:sp>
         <p:nvSpPr>
-          <p:cNvPr id="4" name="Text 2"/>
-          <p:cNvSpPr txBox="1"/>
-          <p:nvPr/>
-        </p:nvSpPr>
-        <p:spPr>
-          <a:xfrm>
-            <a:off x="731520" y="2286000"/>
-            <a:ext cx="2221992" cy="320040"/>
-          </a:xfrm>
-          <a:prstGeom prst="rect">
-            <a:avLst/>
-          </a:prstGeom>
-          <a:noFill/>
-          <a:ln/>
-        </p:spPr>
-        <p:txBody>
-          <a:bodyPr wrap="square" lIns="0" tIns="0" rIns="0" bIns="0" rtlCol="0" anchor="t"/>
-          <a:lstStyle/>
-          <a:p>
-            <a:pPr indent="0" marL="0">
-              <a:buNone/>
-            </a:pPr>
-            <a:r>
-              <a:rPr lang="en-US" sz="1400" b="1" spc="200" kern="0" dirty="0">
-                <a:solidFill>
-                  <a:srgbClr val="E5534B"/>
-                </a:solidFill>
-                <a:latin typeface="Calibri" pitchFamily="34" charset="0"/>
-                <a:ea typeface="Calibri" pitchFamily="34" charset="-122"/>
-                <a:cs typeface="Calibri" pitchFamily="34" charset="-120"/>
-              </a:rPr>
-              <a:t>ВХОД</a:t>
-            </a:r>
-            <a:endParaRPr lang="en-US" sz="1400" dirty="0"/>
-          </a:p>
-        </p:txBody>
-      </p:sp>
-      <p:sp>
-        <p:nvSpPr>
           <p:cNvPr id="5" name="Text 3"/>
           <p:cNvSpPr txBox="1"/>
           <p:nvPr/>
         </p:nvSpPr>
         <p:spPr>
           <a:xfrm>
-            <a:off x="731520" y="2697480"/>
-            <a:ext cx="2221992" cy="1097280"/>
-          </a:xfrm>
-          <a:prstGeom prst="rect">
-            <a:avLst/>
-          </a:prstGeom>
-          <a:noFill/>
-          <a:ln/>
-        </p:spPr>
-        <p:txBody>
-          <a:bodyPr wrap="square" lIns="0" tIns="0" rIns="0" bIns="0" rtlCol="0" anchor="t">
+            <a:off x="749808" y="2057400"/>
+            <a:ext cx="2322576" cy="1234440"/>
+          </a:xfrm>
+          <a:prstGeom prst="rect">
+            <a:avLst/>
+          </a:prstGeom>
+          <a:noFill/>
+          <a:ln/>
+        </p:spPr>
+        <p:txBody>
+          <a:bodyPr wrap="square" lIns="0" tIns="0" rIns="0" bIns="0" rtlCol="0" anchor="ctr">
             <a:normAutofit/>
           </a:bodyPr>
           <a:lstStyle/>
           <a:p>
-            <a:pPr indent="0" marL="0">
+            <a:pPr algn="ctr" indent="0" marL="0">
               <a:lnSpc>
-                <a:spcPct val="120000"/>
+                <a:spcPct val="115000"/>
               </a:lnSpc>
               <a:buNone/>
             </a:pPr>
             <a:r>
-              <a:rPr lang="en-US" sz="2000" b="1" dirty="0">
-                <a:solidFill>
-                  <a:srgbClr val="1E3252"/>
-                </a:solidFill>
-                <a:latin typeface="Calibri" pitchFamily="34" charset="0"/>
-                <a:ea typeface="Calibri" pitchFamily="34" charset="-122"/>
-                <a:cs typeface="Calibri" pitchFamily="34" charset="-120"/>
-              </a:rPr>
-              <a:t>Аналитик открывает</a:t>
-            </a:r>
-            <a:endParaRPr lang="en-US" sz="2000" dirty="0"/>
-          </a:p>
-          <a:p>
-            <a:pPr indent="0" marL="0">
+              <a:rPr lang="en-US" sz="1800" b="1" dirty="0">
+                <a:solidFill>
+                  <a:srgbClr val="1B2E4A"/>
+                </a:solidFill>
+                <a:latin typeface="Calibri" pitchFamily="34" charset="0"/>
+                <a:ea typeface="Calibri" pitchFamily="34" charset="-122"/>
+                <a:cs typeface="Calibri" pitchFamily="34" charset="-120"/>
+              </a:rPr>
+              <a:t>Аналитик</a:t>
+            </a:r>
+            <a:endParaRPr lang="en-US" sz="1800" dirty="0"/>
+          </a:p>
+          <a:p>
+            <a:pPr algn="ctr" indent="0" marL="0">
               <a:lnSpc>
-                <a:spcPct val="120000"/>
+                <a:spcPct val="115000"/>
               </a:lnSpc>
               <a:buNone/>
             </a:pPr>
             <a:r>
-              <a:rPr lang="en-US" sz="2000" b="1" dirty="0">
-                <a:solidFill>
-                  <a:srgbClr val="1E3252"/>
-                </a:solidFill>
-                <a:latin typeface="Calibri" pitchFamily="34" charset="0"/>
-                <a:ea typeface="Calibri" pitchFamily="34" charset="-122"/>
-                <a:cs typeface="Calibri" pitchFamily="34" charset="-120"/>
-              </a:rPr>
-              <a:t>готовое ТЗ</a:t>
-            </a:r>
-            <a:endParaRPr lang="en-US" sz="2000" dirty="0"/>
+              <a:rPr lang="en-US" sz="1800" b="1" dirty="0">
+                <a:solidFill>
+                  <a:srgbClr val="1B2E4A"/>
+                </a:solidFill>
+                <a:latin typeface="Calibri" pitchFamily="34" charset="0"/>
+                <a:ea typeface="Calibri" pitchFamily="34" charset="-122"/>
+                <a:cs typeface="Calibri" pitchFamily="34" charset="-120"/>
+              </a:rPr>
+              <a:t>загружает ТЗ</a:t>
+            </a:r>
+            <a:endParaRPr lang="en-US" sz="1800" dirty="0"/>
           </a:p>
         </p:txBody>
       </p:sp>
@@ -2595,8 +2706,8 @@
         </p:nvSpPr>
         <p:spPr>
           <a:xfrm>
-            <a:off x="3118104" y="2103120"/>
-            <a:ext cx="274320" cy="1828800"/>
+            <a:off x="3163824" y="2057400"/>
+            <a:ext cx="274320" cy="1234440"/>
           </a:xfrm>
           <a:prstGeom prst="rect">
             <a:avLst/>
@@ -2614,7 +2725,7 @@
             <a:r>
               <a:rPr lang="en-US" sz="2400" b="1" dirty="0">
                 <a:solidFill>
-                  <a:srgbClr val="8A8F98"/>
+                  <a:srgbClr val="C3CDD9"/>
                 </a:solidFill>
                 <a:latin typeface="Calibri" pitchFamily="34" charset="0"/>
                 <a:ea typeface="Calibri" pitchFamily="34" charset="-122"/>
@@ -2634,20 +2745,20 @@
         </p:nvSpPr>
         <p:spPr>
           <a:xfrm>
-            <a:off x="3392424" y="2103120"/>
-            <a:ext cx="2551176" cy="1828800"/>
+            <a:off x="3438144" y="2057400"/>
+            <a:ext cx="2505456" cy="1234440"/>
           </a:xfrm>
           <a:prstGeom prst="roundRect">
             <a:avLst>
-              <a:gd name="adj" fmla="val 6000"/>
+              <a:gd name="adj" fmla="val 7407"/>
             </a:avLst>
           </a:prstGeom>
           <a:solidFill>
-            <a:srgbClr val="EEF2F7"/>
+            <a:srgbClr val="F4F7FA"/>
           </a:solidFill>
           <a:ln w="12700">
             <a:solidFill>
-              <a:srgbClr val="D4DCE6"/>
+              <a:srgbClr val="E2E8F0"/>
             </a:solidFill>
             <a:prstDash val="solid"/>
           </a:ln>
@@ -2661,111 +2772,72 @@
         </p:nvSpPr>
         <p:spPr>
           <a:xfrm>
-            <a:off x="3557016" y="2286000"/>
-            <a:ext cx="2221992" cy="320040"/>
-          </a:xfrm>
-          <a:prstGeom prst="rect">
-            <a:avLst/>
-          </a:prstGeom>
-          <a:noFill/>
-          <a:ln/>
-        </p:spPr>
-        <p:txBody>
-          <a:bodyPr wrap="square" lIns="0" tIns="0" rIns="0" bIns="0" rtlCol="0" anchor="t"/>
-          <a:lstStyle/>
-          <a:p>
-            <a:pPr indent="0" marL="0">
-              <a:buNone/>
-            </a:pPr>
-            <a:r>
-              <a:rPr lang="en-US" sz="1400" b="1" spc="200" kern="0" dirty="0">
-                <a:solidFill>
-                  <a:srgbClr val="E5534B"/>
-                </a:solidFill>
-                <a:latin typeface="Calibri" pitchFamily="34" charset="0"/>
-                <a:ea typeface="Calibri" pitchFamily="34" charset="-122"/>
-                <a:cs typeface="Calibri" pitchFamily="34" charset="-120"/>
-              </a:rPr>
-              <a:t>ДЕЙСТВИЕ</a:t>
-            </a:r>
-            <a:endParaRPr lang="en-US" sz="1400" dirty="0"/>
-          </a:p>
-        </p:txBody>
-      </p:sp>
-      <p:sp>
-        <p:nvSpPr>
-          <p:cNvPr id="9" name="Text 7"/>
-          <p:cNvSpPr txBox="1"/>
-          <p:nvPr/>
-        </p:nvSpPr>
-        <p:spPr>
-          <a:xfrm>
-            <a:off x="3557016" y="2697480"/>
-            <a:ext cx="2221992" cy="1097280"/>
-          </a:xfrm>
-          <a:prstGeom prst="rect">
-            <a:avLst/>
-          </a:prstGeom>
-          <a:noFill/>
-          <a:ln/>
-        </p:spPr>
-        <p:txBody>
-          <a:bodyPr wrap="square" lIns="0" tIns="0" rIns="0" bIns="0" rtlCol="0" anchor="t">
+            <a:off x="3529584" y="2057400"/>
+            <a:ext cx="2322576" cy="1234440"/>
+          </a:xfrm>
+          <a:prstGeom prst="rect">
+            <a:avLst/>
+          </a:prstGeom>
+          <a:noFill/>
+          <a:ln/>
+        </p:spPr>
+        <p:txBody>
+          <a:bodyPr wrap="square" lIns="0" tIns="0" rIns="0" bIns="0" rtlCol="0" anchor="ctr">
             <a:normAutofit/>
           </a:bodyPr>
           <a:lstStyle/>
           <a:p>
-            <a:pPr indent="0" marL="0">
+            <a:pPr algn="ctr" indent="0" marL="0">
               <a:lnSpc>
-                <a:spcPct val="120000"/>
+                <a:spcPct val="115000"/>
               </a:lnSpc>
               <a:buNone/>
             </a:pPr>
             <a:r>
-              <a:rPr lang="en-US" sz="2000" b="1" dirty="0">
-                <a:solidFill>
-                  <a:srgbClr val="1E3252"/>
-                </a:solidFill>
-                <a:latin typeface="Calibri" pitchFamily="34" charset="0"/>
-                <a:ea typeface="Calibri" pitchFamily="34" charset="-122"/>
-                <a:cs typeface="Calibri" pitchFamily="34" charset="-120"/>
-              </a:rPr>
-              <a:t>Загружает файл</a:t>
-            </a:r>
-            <a:endParaRPr lang="en-US" sz="2000" dirty="0"/>
-          </a:p>
-          <a:p>
-            <a:pPr indent="0" marL="0">
+              <a:rPr lang="en-US" sz="1800" b="1" dirty="0">
+                <a:solidFill>
+                  <a:srgbClr val="1B2E4A"/>
+                </a:solidFill>
+                <a:latin typeface="Calibri" pitchFamily="34" charset="0"/>
+                <a:ea typeface="Calibri" pitchFamily="34" charset="-122"/>
+                <a:cs typeface="Calibri" pitchFamily="34" charset="-120"/>
+              </a:rPr>
+              <a:t>Нажимает</a:t>
+            </a:r>
+            <a:endParaRPr lang="en-US" sz="1800" dirty="0"/>
+          </a:p>
+          <a:p>
+            <a:pPr algn="ctr" indent="0" marL="0">
               <a:lnSpc>
-                <a:spcPct val="120000"/>
+                <a:spcPct val="115000"/>
               </a:lnSpc>
               <a:buNone/>
             </a:pPr>
             <a:r>
-              <a:rPr lang="en-US" sz="2000" b="1" dirty="0">
-                <a:solidFill>
-                  <a:srgbClr val="1E3252"/>
-                </a:solidFill>
-                <a:latin typeface="Calibri" pitchFamily="34" charset="0"/>
-                <a:ea typeface="Calibri" pitchFamily="34" charset="-122"/>
-                <a:cs typeface="Calibri" pitchFamily="34" charset="-120"/>
-              </a:rPr>
-              <a:t>и нажимает «Проверить»</a:t>
-            </a:r>
-            <a:endParaRPr lang="en-US" sz="2000" dirty="0"/>
-          </a:p>
-        </p:txBody>
-      </p:sp>
-      <p:sp>
-        <p:nvSpPr>
-          <p:cNvPr id="10" name="Text 8"/>
-          <p:cNvSpPr txBox="1"/>
-          <p:nvPr/>
-        </p:nvSpPr>
-        <p:spPr>
-          <a:xfrm>
-            <a:off x="5943600" y="2103120"/>
-            <a:ext cx="274320" cy="1828800"/>
+              <a:rPr lang="en-US" sz="1800" b="1" dirty="0">
+                <a:solidFill>
+                  <a:srgbClr val="1B2E4A"/>
+                </a:solidFill>
+                <a:latin typeface="Calibri" pitchFamily="34" charset="0"/>
+                <a:ea typeface="Calibri" pitchFamily="34" charset="-122"/>
+                <a:cs typeface="Calibri" pitchFamily="34" charset="-120"/>
+              </a:rPr>
+              <a:t>«Проверить»</a:t>
+            </a:r>
+            <a:endParaRPr lang="en-US" sz="1800" dirty="0"/>
+          </a:p>
+        </p:txBody>
+      </p:sp>
+      <p:sp>
+        <p:nvSpPr>
+          <p:cNvPr id="9" name="Text 7"/>
+          <p:cNvSpPr txBox="1"/>
+          <p:nvPr/>
+        </p:nvSpPr>
+        <p:spPr>
+          <a:xfrm>
+            <a:off x="5943600" y="2057400"/>
+            <a:ext cx="274320" cy="1234440"/>
           </a:xfrm>
           <a:prstGeom prst="rect">
             <a:avLst/>
@@ -2783,7 +2855,7 @@
             <a:r>
               <a:rPr lang="en-US" sz="2400" b="1" dirty="0">
                 <a:solidFill>
-                  <a:srgbClr val="8A8F98"/>
+                  <a:srgbClr val="C3CDD9"/>
                 </a:solidFill>
                 <a:latin typeface="Calibri" pitchFamily="34" charset="0"/>
                 <a:ea typeface="Calibri" pitchFamily="34" charset="-122"/>
@@ -2797,26 +2869,26 @@
       </p:sp>
       <p:sp>
         <p:nvSpPr>
-          <p:cNvPr id="11" name="Shape 9"/>
+          <p:cNvPr id="10" name="Shape 8"/>
           <p:cNvSpPr/>
           <p:nvPr/>
         </p:nvSpPr>
         <p:spPr>
           <a:xfrm>
-            <a:off x="6217920" y="2103120"/>
-            <a:ext cx="2551176" cy="1828800"/>
+            <a:off x="6217920" y="2057400"/>
+            <a:ext cx="2505456" cy="1234440"/>
           </a:xfrm>
           <a:prstGeom prst="roundRect">
             <a:avLst>
-              <a:gd name="adj" fmla="val 6000"/>
+              <a:gd name="adj" fmla="val 7407"/>
             </a:avLst>
           </a:prstGeom>
           <a:solidFill>
-            <a:srgbClr val="EEF2F7"/>
+            <a:srgbClr val="F4F7FA"/>
           </a:solidFill>
           <a:ln w="12700">
             <a:solidFill>
-              <a:srgbClr val="D4DCE6"/>
+              <a:srgbClr val="E2E8F0"/>
             </a:solidFill>
             <a:prstDash val="solid"/>
           </a:ln>
@@ -2824,117 +2896,78 @@
       </p:sp>
       <p:sp>
         <p:nvSpPr>
-          <p:cNvPr id="12" name="Text 10"/>
-          <p:cNvSpPr txBox="1"/>
-          <p:nvPr/>
-        </p:nvSpPr>
-        <p:spPr>
-          <a:xfrm>
-            <a:off x="6382512" y="2286000"/>
-            <a:ext cx="2221992" cy="320040"/>
-          </a:xfrm>
-          <a:prstGeom prst="rect">
-            <a:avLst/>
-          </a:prstGeom>
-          <a:noFill/>
-          <a:ln/>
-        </p:spPr>
-        <p:txBody>
-          <a:bodyPr wrap="square" lIns="0" tIns="0" rIns="0" bIns="0" rtlCol="0" anchor="t"/>
-          <a:lstStyle/>
-          <a:p>
-            <a:pPr indent="0" marL="0">
-              <a:buNone/>
-            </a:pPr>
-            <a:r>
-              <a:rPr lang="en-US" sz="1400" b="1" spc="200" kern="0" dirty="0">
-                <a:solidFill>
-                  <a:srgbClr val="E5534B"/>
-                </a:solidFill>
-                <a:latin typeface="Calibri" pitchFamily="34" charset="0"/>
-                <a:ea typeface="Calibri" pitchFamily="34" charset="-122"/>
-                <a:cs typeface="Calibri" pitchFamily="34" charset="-120"/>
-              </a:rPr>
-              <a:t>СИСТЕМА</a:t>
-            </a:r>
-            <a:endParaRPr lang="en-US" sz="1400" dirty="0"/>
-          </a:p>
-        </p:txBody>
-      </p:sp>
-      <p:sp>
-        <p:nvSpPr>
-          <p:cNvPr id="13" name="Text 11"/>
-          <p:cNvSpPr txBox="1"/>
-          <p:nvPr/>
-        </p:nvSpPr>
-        <p:spPr>
-          <a:xfrm>
-            <a:off x="6382512" y="2697480"/>
-            <a:ext cx="2221992" cy="1097280"/>
-          </a:xfrm>
-          <a:prstGeom prst="rect">
-            <a:avLst/>
-          </a:prstGeom>
-          <a:noFill/>
-          <a:ln/>
-        </p:spPr>
-        <p:txBody>
-          <a:bodyPr wrap="square" lIns="0" tIns="0" rIns="0" bIns="0" rtlCol="0" anchor="t">
+          <p:cNvPr id="11" name="Text 9"/>
+          <p:cNvSpPr txBox="1"/>
+          <p:nvPr/>
+        </p:nvSpPr>
+        <p:spPr>
+          <a:xfrm>
+            <a:off x="6309360" y="2057400"/>
+            <a:ext cx="2322576" cy="1234440"/>
+          </a:xfrm>
+          <a:prstGeom prst="rect">
+            <a:avLst/>
+          </a:prstGeom>
+          <a:noFill/>
+          <a:ln/>
+        </p:spPr>
+        <p:txBody>
+          <a:bodyPr wrap="square" lIns="0" tIns="0" rIns="0" bIns="0" rtlCol="0" anchor="ctr">
             <a:normAutofit/>
           </a:bodyPr>
           <a:lstStyle/>
           <a:p>
-            <a:pPr indent="0" marL="0">
+            <a:pPr algn="ctr" indent="0" marL="0">
               <a:lnSpc>
-                <a:spcPct val="120000"/>
+                <a:spcPct val="115000"/>
               </a:lnSpc>
               <a:buNone/>
             </a:pPr>
             <a:r>
-              <a:rPr lang="en-US" sz="2000" b="1" dirty="0">
-                <a:solidFill>
-                  <a:srgbClr val="1E3252"/>
-                </a:solidFill>
-                <a:latin typeface="Calibri" pitchFamily="34" charset="0"/>
-                <a:ea typeface="Calibri" pitchFamily="34" charset="-122"/>
-                <a:cs typeface="Calibri" pitchFamily="34" charset="-120"/>
-              </a:rPr>
-              <a:t>Разбор → шаблон МТС</a:t>
-            </a:r>
-            <a:endParaRPr lang="en-US" sz="2000" dirty="0"/>
-          </a:p>
-          <a:p>
-            <a:pPr indent="0" marL="0">
+              <a:rPr lang="en-US" sz="1800" b="1" dirty="0">
+                <a:solidFill>
+                  <a:srgbClr val="1B2E4A"/>
+                </a:solidFill>
+                <a:latin typeface="Calibri" pitchFamily="34" charset="0"/>
+                <a:ea typeface="Calibri" pitchFamily="34" charset="-122"/>
+                <a:cs typeface="Calibri" pitchFamily="34" charset="-120"/>
+              </a:rPr>
+              <a:t>Разбор → шаблон</a:t>
+            </a:r>
+            <a:endParaRPr lang="en-US" sz="1800" dirty="0"/>
+          </a:p>
+          <a:p>
+            <a:pPr algn="ctr" indent="0" marL="0">
               <a:lnSpc>
-                <a:spcPct val="120000"/>
+                <a:spcPct val="115000"/>
               </a:lnSpc>
               <a:buNone/>
             </a:pPr>
             <a:r>
-              <a:rPr lang="en-US" sz="2000" b="1" dirty="0">
-                <a:solidFill>
-                  <a:srgbClr val="1E3252"/>
-                </a:solidFill>
-                <a:latin typeface="Calibri" pitchFamily="34" charset="0"/>
-                <a:ea typeface="Calibri" pitchFamily="34" charset="-122"/>
-                <a:cs typeface="Calibri" pitchFamily="34" charset="-120"/>
-              </a:rPr>
-              <a:t>→ LLM-ревью</a:t>
-            </a:r>
-            <a:endParaRPr lang="en-US" sz="2000" dirty="0"/>
-          </a:p>
-        </p:txBody>
-      </p:sp>
-      <p:sp>
-        <p:nvSpPr>
-          <p:cNvPr id="14" name="Text 12"/>
-          <p:cNvSpPr txBox="1"/>
-          <p:nvPr/>
-        </p:nvSpPr>
-        <p:spPr>
-          <a:xfrm>
-            <a:off x="8769096" y="2103120"/>
-            <a:ext cx="274320" cy="1828800"/>
+              <a:rPr lang="en-US" sz="1800" b="1" dirty="0">
+                <a:solidFill>
+                  <a:srgbClr val="1B2E4A"/>
+                </a:solidFill>
+                <a:latin typeface="Calibri" pitchFamily="34" charset="0"/>
+                <a:ea typeface="Calibri" pitchFamily="34" charset="-122"/>
+                <a:cs typeface="Calibri" pitchFamily="34" charset="-120"/>
+              </a:rPr>
+              <a:t>→ LLM</a:t>
+            </a:r>
+            <a:endParaRPr lang="en-US" sz="1800" dirty="0"/>
+          </a:p>
+        </p:txBody>
+      </p:sp>
+      <p:sp>
+        <p:nvSpPr>
+          <p:cNvPr id="12" name="Text 10"/>
+          <p:cNvSpPr txBox="1"/>
+          <p:nvPr/>
+        </p:nvSpPr>
+        <p:spPr>
+          <a:xfrm>
+            <a:off x="8723376" y="2057400"/>
+            <a:ext cx="274320" cy="1234440"/>
           </a:xfrm>
           <a:prstGeom prst="rect">
             <a:avLst/>
@@ -2952,7 +2985,7 @@
             <a:r>
               <a:rPr lang="en-US" sz="2400" b="1" dirty="0">
                 <a:solidFill>
-                  <a:srgbClr val="8A8F98"/>
+                  <a:srgbClr val="C3CDD9"/>
                 </a:solidFill>
                 <a:latin typeface="Calibri" pitchFamily="34" charset="0"/>
                 <a:ea typeface="Calibri" pitchFamily="34" charset="-122"/>
@@ -2966,22 +2999,22 @@
       </p:sp>
       <p:sp>
         <p:nvSpPr>
-          <p:cNvPr id="15" name="Shape 13"/>
+          <p:cNvPr id="13" name="Shape 11"/>
           <p:cNvSpPr/>
           <p:nvPr/>
         </p:nvSpPr>
         <p:spPr>
           <a:xfrm>
-            <a:off x="9043416" y="2103120"/>
-            <a:ext cx="2551176" cy="1828800"/>
+            <a:off x="8997696" y="2057400"/>
+            <a:ext cx="2505456" cy="1234440"/>
           </a:xfrm>
           <a:prstGeom prst="roundRect">
             <a:avLst>
-              <a:gd name="adj" fmla="val 6000"/>
+              <a:gd name="adj" fmla="val 7407"/>
             </a:avLst>
           </a:prstGeom>
           <a:solidFill>
-            <a:srgbClr val="E8F3EE"/>
+            <a:srgbClr val="E9F4EF"/>
           </a:solidFill>
           <a:ln w="19050">
             <a:solidFill>
@@ -2993,139 +3026,14 @@
       </p:sp>
       <p:sp>
         <p:nvSpPr>
-          <p:cNvPr id="16" name="Text 14"/>
-          <p:cNvSpPr txBox="1"/>
-          <p:nvPr/>
-        </p:nvSpPr>
-        <p:spPr>
-          <a:xfrm>
-            <a:off x="9208008" y="2286000"/>
-            <a:ext cx="2221992" cy="320040"/>
-          </a:xfrm>
-          <a:prstGeom prst="rect">
-            <a:avLst/>
-          </a:prstGeom>
-          <a:noFill/>
-          <a:ln/>
-        </p:spPr>
-        <p:txBody>
-          <a:bodyPr wrap="square" lIns="0" tIns="0" rIns="0" bIns="0" rtlCol="0" anchor="t"/>
-          <a:lstStyle/>
-          <a:p>
-            <a:pPr indent="0" marL="0">
-              <a:buNone/>
-            </a:pPr>
-            <a:r>
-              <a:rPr lang="en-US" sz="1400" b="1" spc="200" kern="0" dirty="0">
-                <a:solidFill>
-                  <a:srgbClr val="2E7D5B"/>
-                </a:solidFill>
-                <a:latin typeface="Calibri" pitchFamily="34" charset="0"/>
-                <a:ea typeface="Calibri" pitchFamily="34" charset="-122"/>
-                <a:cs typeface="Calibri" pitchFamily="34" charset="-120"/>
-              </a:rPr>
-              <a:t>РЕЗУЛЬТАТ</a:t>
-            </a:r>
-            <a:endParaRPr lang="en-US" sz="1400" dirty="0"/>
-          </a:p>
-        </p:txBody>
-      </p:sp>
-      <p:sp>
-        <p:nvSpPr>
-          <p:cNvPr id="17" name="Text 15"/>
-          <p:cNvSpPr txBox="1"/>
-          <p:nvPr/>
-        </p:nvSpPr>
-        <p:spPr>
-          <a:xfrm>
-            <a:off x="9208008" y="2697480"/>
-            <a:ext cx="2221992" cy="1097280"/>
-          </a:xfrm>
-          <a:prstGeom prst="rect">
-            <a:avLst/>
-          </a:prstGeom>
-          <a:noFill/>
-          <a:ln/>
-        </p:spPr>
-        <p:txBody>
-          <a:bodyPr wrap="square" lIns="0" tIns="0" rIns="0" bIns="0" rtlCol="0" anchor="t">
-            <a:normAutofit/>
-          </a:bodyPr>
-          <a:lstStyle/>
-          <a:p>
-            <a:pPr indent="0" marL="0">
-              <a:lnSpc>
-                <a:spcPct val="120000"/>
-              </a:lnSpc>
-              <a:buNone/>
-            </a:pPr>
-            <a:r>
-              <a:rPr lang="en-US" sz="2000" b="1" dirty="0">
-                <a:solidFill>
-                  <a:srgbClr val="1E3252"/>
-                </a:solidFill>
-                <a:latin typeface="Calibri" pitchFamily="34" charset="0"/>
-                <a:ea typeface="Calibri" pitchFamily="34" charset="-122"/>
-                <a:cs typeface="Calibri" pitchFamily="34" charset="-120"/>
-              </a:rPr>
-              <a:t>Список замечаний</a:t>
-            </a:r>
-            <a:endParaRPr lang="en-US" sz="2000" dirty="0"/>
-          </a:p>
-          <a:p>
-            <a:pPr indent="0" marL="0">
-              <a:lnSpc>
-                <a:spcPct val="120000"/>
-              </a:lnSpc>
-              <a:buNone/>
-            </a:pPr>
-            <a:r>
-              <a:rPr lang="en-US" sz="2000" b="1" dirty="0">
-                <a:solidFill>
-                  <a:srgbClr val="1E3252"/>
-                </a:solidFill>
-                <a:latin typeface="Calibri" pitchFamily="34" charset="0"/>
-                <a:ea typeface="Calibri" pitchFamily="34" charset="-122"/>
-                <a:cs typeface="Calibri" pitchFamily="34" charset="-120"/>
-              </a:rPr>
-              <a:t>с цитатами из текста</a:t>
-            </a:r>
-            <a:endParaRPr lang="en-US" sz="2000" dirty="0"/>
-          </a:p>
-        </p:txBody>
-      </p:sp>
-      <p:sp>
-        <p:nvSpPr>
-          <p:cNvPr id="18" name="Shape 16"/>
-          <p:cNvSpPr/>
-          <p:nvPr/>
-        </p:nvSpPr>
-        <p:spPr>
-          <a:xfrm>
-            <a:off x="566928" y="4297680"/>
-            <a:ext cx="11027664" cy="1371600"/>
-          </a:xfrm>
-          <a:prstGeom prst="roundRect">
-            <a:avLst>
-              <a:gd name="adj" fmla="val 8000"/>
-            </a:avLst>
-          </a:prstGeom>
-          <a:solidFill>
-            <a:srgbClr val="13223B"/>
-          </a:solidFill>
-          <a:ln/>
-        </p:spPr>
-      </p:sp>
-      <p:sp>
-        <p:nvSpPr>
-          <p:cNvPr id="19" name="Text 17"/>
-          <p:cNvSpPr txBox="1"/>
-          <p:nvPr/>
-        </p:nvSpPr>
-        <p:spPr>
-          <a:xfrm>
-            <a:off x="932688" y="4297680"/>
-            <a:ext cx="10296144" cy="1371600"/>
+          <p:cNvPr id="14" name="Text 12"/>
+          <p:cNvSpPr txBox="1"/>
+          <p:nvPr/>
+        </p:nvSpPr>
+        <p:spPr>
+          <a:xfrm>
+            <a:off x="9089136" y="2057400"/>
+            <a:ext cx="2322576" cy="1234440"/>
           </a:xfrm>
           <a:prstGeom prst="rect">
             <a:avLst/>
@@ -3139,24 +3047,141 @@
           </a:bodyPr>
           <a:lstStyle/>
           <a:p>
-            <a:pPr indent="0" marL="0">
+            <a:pPr algn="ctr" indent="0" marL="0">
               <a:lnSpc>
-                <a:spcPct val="120000"/>
+                <a:spcPct val="115000"/>
               </a:lnSpc>
               <a:buNone/>
             </a:pPr>
             <a:r>
-              <a:rPr lang="en-US" sz="2800" dirty="0">
-                <a:solidFill>
-                  <a:srgbClr val="FFFFFF"/>
-                </a:solidFill>
-                <a:latin typeface="Calibri" pitchFamily="34" charset="0"/>
-                <a:ea typeface="Calibri" pitchFamily="34" charset="-122"/>
-                <a:cs typeface="Calibri" pitchFamily="34" charset="-120"/>
-              </a:rPr>
-              <a:t>Каждое замечание: дословная цитата → что неясно → почему важно для разработки → вопрос аналитику</a:t>
-            </a:r>
-            <a:endParaRPr lang="en-US" sz="2800" dirty="0"/>
+              <a:rPr lang="en-US" sz="1800" b="1" dirty="0">
+                <a:solidFill>
+                  <a:srgbClr val="1F5C44"/>
+                </a:solidFill>
+                <a:latin typeface="Calibri" pitchFamily="34" charset="0"/>
+                <a:ea typeface="Calibri" pitchFamily="34" charset="-122"/>
+                <a:cs typeface="Calibri" pitchFamily="34" charset="-120"/>
+              </a:rPr>
+              <a:t>Замечания</a:t>
+            </a:r>
+            <a:endParaRPr lang="en-US" sz="1800" dirty="0"/>
+          </a:p>
+          <a:p>
+            <a:pPr algn="ctr" indent="0" marL="0">
+              <a:lnSpc>
+                <a:spcPct val="115000"/>
+              </a:lnSpc>
+              <a:buNone/>
+            </a:pPr>
+            <a:r>
+              <a:rPr lang="en-US" sz="1800" b="1" dirty="0">
+                <a:solidFill>
+                  <a:srgbClr val="1F5C44"/>
+                </a:solidFill>
+                <a:latin typeface="Calibri" pitchFamily="34" charset="0"/>
+                <a:ea typeface="Calibri" pitchFamily="34" charset="-122"/>
+                <a:cs typeface="Calibri" pitchFamily="34" charset="-120"/>
+              </a:rPr>
+              <a:t>с цитатами</a:t>
+            </a:r>
+            <a:endParaRPr lang="en-US" sz="1800" dirty="0"/>
+          </a:p>
+        </p:txBody>
+      </p:sp>
+      <p:sp>
+        <p:nvSpPr>
+          <p:cNvPr id="15" name="Shape 13"/>
+          <p:cNvSpPr/>
+          <p:nvPr/>
+        </p:nvSpPr>
+        <p:spPr>
+          <a:xfrm>
+            <a:off x="822960" y="3703320"/>
+            <a:ext cx="10515600" cy="3083560"/>
+          </a:xfrm>
+          <a:prstGeom prst="roundRect">
+            <a:avLst>
+              <a:gd name="adj" fmla="val 1483"/>
+            </a:avLst>
+          </a:prstGeom>
+          <a:solidFill>
+            <a:srgbClr val="FFFFFF"/>
+          </a:solidFill>
+          <a:ln w="12700">
+            <a:solidFill>
+              <a:srgbClr val="E2E8F0"/>
+            </a:solidFill>
+            <a:prstDash val="solid"/>
+          </a:ln>
+          <a:effectLst>
+            <a:outerShdw sx="100000" sy="100000" kx="0" ky="0" algn="bl" rotWithShape="0" blurRad="177800" dist="50800" dir="5400000">
+              <a:srgbClr val="8FA0B5">
+                <a:alpha val="28000"/>
+              </a:srgbClr>
+            </a:outerShdw>
+          </a:effectLst>
+        </p:spPr>
+      </p:sp>
+      <p:pic>
+        <p:nvPicPr>
+          <p:cNvPr id="16" name="Image 0" descr="C:\Masaüstü\tz-reviewer\presentation\assets\ui-result.png">    </p:cNvPr>
+          <p:cNvPicPr>
+            <a:picLocks noChangeAspect="1"/>
+          </p:cNvPicPr>
+          <p:nvPr/>
+        </p:nvPicPr>
+        <p:blipFill>
+          <a:blip r:embed="rId1"/>
+          <a:stretch>
+            <a:fillRect/>
+          </a:stretch>
+        </p:blipFill>
+        <p:spPr>
+          <a:xfrm>
+            <a:off x="868680" y="3749040"/>
+            <a:ext cx="10424160" cy="2992120"/>
+          </a:xfrm>
+          <a:prstGeom prst="rect">
+            <a:avLst/>
+          </a:prstGeom>
+        </p:spPr>
+      </p:pic>
+      <p:sp>
+        <p:nvSpPr>
+          <p:cNvPr id="17" name="Text 14"/>
+          <p:cNvSpPr txBox="1"/>
+          <p:nvPr/>
+        </p:nvSpPr>
+        <p:spPr>
+          <a:xfrm>
+            <a:off x="10954512" y="548640"/>
+            <a:ext cx="548640" cy="292608"/>
+          </a:xfrm>
+          <a:prstGeom prst="rect">
+            <a:avLst/>
+          </a:prstGeom>
+          <a:noFill/>
+          <a:ln/>
+        </p:spPr>
+        <p:txBody>
+          <a:bodyPr wrap="square" lIns="0" tIns="0" rIns="0" bIns="0" rtlCol="0" anchor="t"/>
+          <a:lstStyle/>
+          <a:p>
+            <a:pPr algn="r" indent="0" marL="0">
+              <a:buNone/>
+            </a:pPr>
+            <a:r>
+              <a:rPr lang="en-US" sz="1200" spc="100" kern="0" dirty="0">
+                <a:solidFill>
+                  <a:srgbClr val="C3CDD9"/>
+                </a:solidFill>
+                <a:latin typeface="Calibri" pitchFamily="34" charset="0"/>
+                <a:ea typeface="Calibri" pitchFamily="34" charset="-122"/>
+                <a:cs typeface="Calibri" pitchFamily="34" charset="-120"/>
+              </a:rPr>
+              <a:t>03</a:t>
+            </a:r>
+            <a:endParaRPr lang="en-US" sz="1200" dirty="0"/>
           </a:p>
         </p:txBody>
       </p:sp>
@@ -3200,8 +3225,47 @@
         </p:nvSpPr>
         <p:spPr>
           <a:xfrm>
-            <a:off x="566928" y="457200"/>
-            <a:ext cx="11027664" cy="914400"/>
+            <a:off x="658368" y="566928"/>
+            <a:ext cx="10844784" cy="274320"/>
+          </a:xfrm>
+          <a:prstGeom prst="rect">
+            <a:avLst/>
+          </a:prstGeom>
+          <a:noFill/>
+          <a:ln/>
+        </p:spPr>
+        <p:txBody>
+          <a:bodyPr wrap="square" lIns="0" tIns="0" rIns="0" bIns="0" rtlCol="0" anchor="t"/>
+          <a:lstStyle/>
+          <a:p>
+            <a:pPr indent="0" marL="0">
+              <a:buNone/>
+            </a:pPr>
+            <a:r>
+              <a:rPr lang="en-US" sz="1150" b="1" spc="400" kern="0" dirty="0">
+                <a:solidFill>
+                  <a:srgbClr val="E5534B"/>
+                </a:solidFill>
+                <a:latin typeface="Calibri" pitchFamily="34" charset="0"/>
+                <a:ea typeface="Calibri" pitchFamily="34" charset="-122"/>
+                <a:cs typeface="Calibri" pitchFamily="34" charset="-120"/>
+              </a:rPr>
+              <a:t>ЧТО НАХОДИТ · 1</a:t>
+            </a:r>
+            <a:endParaRPr lang="en-US" sz="1150" dirty="0"/>
+          </a:p>
+        </p:txBody>
+      </p:sp>
+      <p:sp>
+        <p:nvSpPr>
+          <p:cNvPr id="3" name="Text 1"/>
+          <p:cNvSpPr txBox="1"/>
+          <p:nvPr/>
+        </p:nvSpPr>
+        <p:spPr>
+          <a:xfrm>
+            <a:off x="658368" y="914400"/>
+            <a:ext cx="10844784" cy="914400"/>
           </a:xfrm>
           <a:prstGeom prst="rect">
             <a:avLst/>
@@ -3217,39 +3281,39 @@
           <a:p>
             <a:pPr indent="0" marL="0">
               <a:lnSpc>
-                <a:spcPct val="105000"/>
+                <a:spcPct val="106000"/>
               </a:lnSpc>
               <a:buNone/>
             </a:pPr>
             <a:r>
-              <a:rPr lang="en-US" sz="3300" b="1" dirty="0">
-                <a:solidFill>
-                  <a:srgbClr val="13223B"/>
+              <a:rPr lang="en-US" sz="3200" b="1" dirty="0">
+                <a:solidFill>
+                  <a:srgbClr val="0E1B2E"/>
                 </a:solidFill>
                 <a:latin typeface="Cambria" pitchFamily="34" charset="0"/>
                 <a:ea typeface="Cambria" pitchFamily="34" charset="-122"/>
                 <a:cs typeface="Cambria" pitchFamily="34" charset="-120"/>
               </a:rPr>
-              <a:t>Нашёл противоречие внутри одного документа</a:t>
-            </a:r>
-            <a:endParaRPr lang="en-US" sz="3300" dirty="0"/>
-          </a:p>
-        </p:txBody>
-      </p:sp>
-      <p:sp>
-        <p:nvSpPr>
-          <p:cNvPr id="3" name="Shape 1"/>
+              <a:t>Противоречие внутри одного документа</a:t>
+            </a:r>
+            <a:endParaRPr lang="en-US" sz="3200" dirty="0"/>
+          </a:p>
+        </p:txBody>
+      </p:sp>
+      <p:sp>
+        <p:nvSpPr>
+          <p:cNvPr id="4" name="Shape 2"/>
           <p:cNvSpPr/>
           <p:nvPr/>
         </p:nvSpPr>
         <p:spPr>
           <a:xfrm>
-            <a:off x="987552" y="1581912"/>
-            <a:ext cx="10186416" cy="3926667"/>
+            <a:off x="822960" y="1965960"/>
+            <a:ext cx="10515600" cy="4028224"/>
           </a:xfrm>
           <a:prstGeom prst="roundRect">
             <a:avLst>
-              <a:gd name="adj" fmla="val 1863"/>
+              <a:gd name="adj" fmla="val 1135"/>
             </a:avLst>
           </a:prstGeom>
           <a:solidFill>
@@ -3257,14 +3321,14 @@
           </a:solidFill>
           <a:ln w="12700">
             <a:solidFill>
-              <a:srgbClr val="D4DCE6"/>
+              <a:srgbClr val="E2E8F0"/>
             </a:solidFill>
             <a:prstDash val="solid"/>
           </a:ln>
           <a:effectLst>
-            <a:outerShdw sx="100000" sy="100000" kx="0" ky="0" algn="bl" rotWithShape="0" blurRad="127000" dist="38100" dir="5400000">
-              <a:srgbClr val="AAB4C0">
-                <a:alpha val="30000"/>
+            <a:outerShdw sx="100000" sy="100000" kx="0" ky="0" algn="bl" rotWithShape="0" blurRad="177800" dist="50800" dir="5400000">
+              <a:srgbClr val="8FA0B5">
+                <a:alpha val="28000"/>
               </a:srgbClr>
             </a:outerShdw>
           </a:effectLst>
@@ -3272,7 +3336,7 @@
       </p:sp>
       <p:pic>
         <p:nvPicPr>
-          <p:cNvPr id="4" name="Image 0" descr="C:\Masaüstü\tz-reviewer\presentation\assets\llm-output.png">    </p:cNvPr>
+          <p:cNvPr id="5" name="Image 0" descr="C:\Masaüstü\tz-reviewer\presentation\assets\llm-output.png">    </p:cNvPr>
           <p:cNvPicPr>
             <a:picLocks noChangeAspect="1"/>
           </p:cNvPicPr>
@@ -3286,8 +3350,8 @@
         </p:blipFill>
         <p:spPr>
           <a:xfrm>
-            <a:off x="1051560" y="1645920"/>
-            <a:ext cx="10058400" cy="3798651"/>
+            <a:off x="868680" y="2011680"/>
+            <a:ext cx="10424160" cy="3936784"/>
           </a:xfrm>
           <a:prstGeom prst="rect">
             <a:avLst/>
@@ -3296,14 +3360,14 @@
       </p:pic>
       <p:sp>
         <p:nvSpPr>
-          <p:cNvPr id="5" name="Text 2"/>
-          <p:cNvSpPr txBox="1"/>
-          <p:nvPr/>
-        </p:nvSpPr>
-        <p:spPr>
-          <a:xfrm>
-            <a:off x="566928" y="5623560"/>
-            <a:ext cx="11027664" cy="914400"/>
+          <p:cNvPr id="6" name="Text 3"/>
+          <p:cNvSpPr txBox="1"/>
+          <p:nvPr/>
+        </p:nvSpPr>
+        <p:spPr>
+          <a:xfrm>
+            <a:off x="10954512" y="548640"/>
+            <a:ext cx="548640" cy="292608"/>
           </a:xfrm>
           <a:prstGeom prst="rect">
             <a:avLst/>
@@ -3315,24 +3379,21 @@
           <a:bodyPr wrap="square" lIns="0" tIns="0" rIns="0" bIns="0" rtlCol="0" anchor="t"/>
           <a:lstStyle/>
           <a:p>
-            <a:pPr indent="0" marL="0">
-              <a:lnSpc>
-                <a:spcPct val="125000"/>
-              </a:lnSpc>
-              <a:buNone/>
-            </a:pPr>
-            <a:r>
-              <a:rPr lang="en-US" sz="2200" dirty="0">
-                <a:solidFill>
-                  <a:srgbClr val="1E3252"/>
-                </a:solidFill>
-                <a:latin typeface="Calibri" pitchFamily="34" charset="0"/>
-                <a:ea typeface="Calibri" pitchFamily="34" charset="-122"/>
-                <a:cs typeface="Calibri" pitchFamily="34" charset="-120"/>
-              </a:rPr>
-              <a:t>Настоящий вывод на документе кейсодателя, режим LLM. Два раздела одного ТЗ требуют разной задержки — при чтении это легко пропустить.</a:t>
-            </a:r>
-            <a:endParaRPr lang="en-US" sz="2200" dirty="0"/>
+            <a:pPr algn="r" indent="0" marL="0">
+              <a:buNone/>
+            </a:pPr>
+            <a:r>
+              <a:rPr lang="en-US" sz="1200" spc="100" kern="0" dirty="0">
+                <a:solidFill>
+                  <a:srgbClr val="C3CDD9"/>
+                </a:solidFill>
+                <a:latin typeface="Calibri" pitchFamily="34" charset="0"/>
+                <a:ea typeface="Calibri" pitchFamily="34" charset="-122"/>
+                <a:cs typeface="Calibri" pitchFamily="34" charset="-120"/>
+              </a:rPr>
+              <a:t>04</a:t>
+            </a:r>
+            <a:endParaRPr lang="en-US" sz="1200" dirty="0"/>
           </a:p>
         </p:txBody>
       </p:sp>
@@ -3376,8 +3437,47 @@
         </p:nvSpPr>
         <p:spPr>
           <a:xfrm>
-            <a:off x="566928" y="457200"/>
-            <a:ext cx="11027664" cy="914400"/>
+            <a:off x="658368" y="566928"/>
+            <a:ext cx="10844784" cy="274320"/>
+          </a:xfrm>
+          <a:prstGeom prst="rect">
+            <a:avLst/>
+          </a:prstGeom>
+          <a:noFill/>
+          <a:ln/>
+        </p:spPr>
+        <p:txBody>
+          <a:bodyPr wrap="square" lIns="0" tIns="0" rIns="0" bIns="0" rtlCol="0" anchor="t"/>
+          <a:lstStyle/>
+          <a:p>
+            <a:pPr indent="0" marL="0">
+              <a:buNone/>
+            </a:pPr>
+            <a:r>
+              <a:rPr lang="en-US" sz="1150" b="1" spc="400" kern="0" dirty="0">
+                <a:solidFill>
+                  <a:srgbClr val="E5534B"/>
+                </a:solidFill>
+                <a:latin typeface="Calibri" pitchFamily="34" charset="0"/>
+                <a:ea typeface="Calibri" pitchFamily="34" charset="-122"/>
+                <a:cs typeface="Calibri" pitchFamily="34" charset="-120"/>
+              </a:rPr>
+              <a:t>ИНТЕРФЕЙС</a:t>
+            </a:r>
+            <a:endParaRPr lang="en-US" sz="1150" dirty="0"/>
+          </a:p>
+        </p:txBody>
+      </p:sp>
+      <p:sp>
+        <p:nvSpPr>
+          <p:cNvPr id="3" name="Text 1"/>
+          <p:cNvSpPr txBox="1"/>
+          <p:nvPr/>
+        </p:nvSpPr>
+        <p:spPr>
+          <a:xfrm>
+            <a:off x="658368" y="914400"/>
+            <a:ext cx="10844784" cy="914400"/>
           </a:xfrm>
           <a:prstGeom prst="rect">
             <a:avLst/>
@@ -3393,62 +3493,93 @@
           <a:p>
             <a:pPr indent="0" marL="0">
               <a:lnSpc>
-                <a:spcPct val="105000"/>
+                <a:spcPct val="106000"/>
               </a:lnSpc>
               <a:buNone/>
             </a:pPr>
             <a:r>
-              <a:rPr lang="en-US" sz="3300" b="1" dirty="0">
-                <a:solidFill>
-                  <a:srgbClr val="13223B"/>
+              <a:rPr lang="en-US" sz="3200" b="1" dirty="0">
+                <a:solidFill>
+                  <a:srgbClr val="0E1B2E"/>
                 </a:solidFill>
                 <a:latin typeface="Cambria" pitchFamily="34" charset="0"/>
                 <a:ea typeface="Cambria" pitchFamily="34" charset="-122"/>
                 <a:cs typeface="Cambria" pitchFamily="34" charset="-120"/>
               </a:rPr>
-              <a:t>Три слоя — и LLM только один из них</a:t>
-            </a:r>
-            <a:endParaRPr lang="en-US" sz="3300" dirty="0"/>
-          </a:p>
-        </p:txBody>
-      </p:sp>
-      <p:sp>
-        <p:nvSpPr>
-          <p:cNvPr id="3" name="Shape 1"/>
+              <a:t>Каждое замечание раскрывается до цитаты и вопроса</a:t>
+            </a:r>
+            <a:endParaRPr lang="en-US" sz="3200" dirty="0"/>
+          </a:p>
+        </p:txBody>
+      </p:sp>
+      <p:sp>
+        <p:nvSpPr>
+          <p:cNvPr id="4" name="Shape 2"/>
           <p:cNvSpPr/>
           <p:nvPr/>
         </p:nvSpPr>
         <p:spPr>
           <a:xfrm>
-            <a:off x="566928" y="1920240"/>
-            <a:ext cx="3493008" cy="2286000"/>
+            <a:off x="1188720" y="1965960"/>
+            <a:ext cx="9784080" cy="4617720"/>
           </a:xfrm>
           <a:prstGeom prst="roundRect">
             <a:avLst>
-              <a:gd name="adj" fmla="val 4800"/>
+              <a:gd name="adj" fmla="val 990"/>
             </a:avLst>
           </a:prstGeom>
           <a:solidFill>
-            <a:srgbClr val="EEF2F7"/>
+            <a:srgbClr val="FFFFFF"/>
           </a:solidFill>
           <a:ln w="12700">
             <a:solidFill>
-              <a:srgbClr val="D4DCE6"/>
+              <a:srgbClr val="E2E8F0"/>
             </a:solidFill>
             <a:prstDash val="solid"/>
           </a:ln>
-        </p:spPr>
-      </p:sp>
-      <p:sp>
-        <p:nvSpPr>
-          <p:cNvPr id="4" name="Text 2"/>
-          <p:cNvSpPr txBox="1"/>
-          <p:nvPr/>
-        </p:nvSpPr>
-        <p:spPr>
-          <a:xfrm>
-            <a:off x="768096" y="2121408"/>
-            <a:ext cx="3090672" cy="365760"/>
+          <a:effectLst>
+            <a:outerShdw sx="100000" sy="100000" kx="0" ky="0" algn="bl" rotWithShape="0" blurRad="177800" dist="50800" dir="5400000">
+              <a:srgbClr val="8FA0B5">
+                <a:alpha val="28000"/>
+              </a:srgbClr>
+            </a:outerShdw>
+          </a:effectLst>
+        </p:spPr>
+      </p:sp>
+      <p:pic>
+        <p:nvPicPr>
+          <p:cNvPr id="5" name="Image 0" descr="C:\Masaüstü\tz-reviewer\presentation\assets\ui-findings.png">    </p:cNvPr>
+          <p:cNvPicPr>
+            <a:picLocks noChangeAspect="1"/>
+          </p:cNvPicPr>
+          <p:nvPr/>
+        </p:nvPicPr>
+        <p:blipFill>
+          <a:blip r:embed="rId1"/>
+          <a:stretch>
+            <a:fillRect/>
+          </a:stretch>
+        </p:blipFill>
+        <p:spPr>
+          <a:xfrm>
+            <a:off x="1234440" y="2011680"/>
+            <a:ext cx="9692640" cy="4526280"/>
+          </a:xfrm>
+          <a:prstGeom prst="rect">
+            <a:avLst/>
+          </a:prstGeom>
+        </p:spPr>
+      </p:pic>
+      <p:sp>
+        <p:nvSpPr>
+          <p:cNvPr id="6" name="Text 3"/>
+          <p:cNvSpPr txBox="1"/>
+          <p:nvPr/>
+        </p:nvSpPr>
+        <p:spPr>
+          <a:xfrm>
+            <a:off x="10954512" y="548640"/>
+            <a:ext cx="548640" cy="292608"/>
           </a:xfrm>
           <a:prstGeom prst="rect">
             <a:avLst/>
@@ -3460,537 +3591,21 @@
           <a:bodyPr wrap="square" lIns="0" tIns="0" rIns="0" bIns="0" rtlCol="0" anchor="t"/>
           <a:lstStyle/>
           <a:p>
-            <a:pPr indent="0" marL="0">
-              <a:buNone/>
-            </a:pPr>
-            <a:r>
-              <a:rPr lang="en-US" sz="1400" b="1" spc="150" kern="0" dirty="0">
-                <a:solidFill>
-                  <a:srgbClr val="E5534B"/>
-                </a:solidFill>
-                <a:latin typeface="Calibri" pitchFamily="34" charset="0"/>
-                <a:ea typeface="Calibri" pitchFamily="34" charset="-122"/>
-                <a:cs typeface="Calibri" pitchFamily="34" charset="-120"/>
-              </a:rPr>
-              <a:t>1 · РАЗБОР ДОКУМЕНТА</a:t>
-            </a:r>
-            <a:endParaRPr lang="en-US" sz="1400" dirty="0"/>
-          </a:p>
-        </p:txBody>
-      </p:sp>
-      <p:sp>
-        <p:nvSpPr>
-          <p:cNvPr id="5" name="Text 3"/>
-          <p:cNvSpPr txBox="1"/>
-          <p:nvPr/>
-        </p:nvSpPr>
-        <p:spPr>
-          <a:xfrm>
-            <a:off x="768096" y="2560320"/>
-            <a:ext cx="3090672" cy="960120"/>
-          </a:xfrm>
-          <a:prstGeom prst="rect">
-            <a:avLst/>
-          </a:prstGeom>
-          <a:noFill/>
-          <a:ln/>
-        </p:spPr>
-        <p:txBody>
-          <a:bodyPr wrap="square" lIns="0" tIns="0" rIns="0" bIns="0" rtlCol="0" anchor="t"/>
-          <a:lstStyle/>
-          <a:p>
-            <a:pPr indent="0" marL="0">
-              <a:lnSpc>
-                <a:spcPct val="118000"/>
-              </a:lnSpc>
-              <a:buNone/>
-            </a:pPr>
-            <a:r>
-              <a:rPr lang="en-US" sz="2100" b="1" dirty="0">
-                <a:solidFill>
-                  <a:srgbClr val="1E3252"/>
-                </a:solidFill>
-                <a:latin typeface="Calibri" pitchFamily="34" charset="0"/>
-                <a:ea typeface="Calibri" pitchFamily="34" charset="-122"/>
-                <a:cs typeface="Calibri" pitchFamily="34" charset="-120"/>
-              </a:rPr>
-              <a:t>Word и Markdown →</a:t>
-            </a:r>
-            <a:endParaRPr lang="en-US" sz="2100" dirty="0"/>
-          </a:p>
-          <a:p>
-            <a:pPr indent="0" marL="0">
-              <a:lnSpc>
-                <a:spcPct val="118000"/>
-              </a:lnSpc>
-              <a:buNone/>
-            </a:pPr>
-            <a:r>
-              <a:rPr lang="en-US" sz="2100" b="1" dirty="0">
-                <a:solidFill>
-                  <a:srgbClr val="1E3252"/>
-                </a:solidFill>
-                <a:latin typeface="Calibri" pitchFamily="34" charset="0"/>
-                <a:ea typeface="Calibri" pitchFamily="34" charset="-122"/>
-                <a:cs typeface="Calibri" pitchFamily="34" charset="-120"/>
-              </a:rPr>
-              <a:t>разделы и таблицы</a:t>
-            </a:r>
-            <a:endParaRPr lang="en-US" sz="2100" dirty="0"/>
-          </a:p>
-        </p:txBody>
-      </p:sp>
-      <p:sp>
-        <p:nvSpPr>
-          <p:cNvPr id="6" name="Text 4"/>
-          <p:cNvSpPr txBox="1"/>
-          <p:nvPr/>
-        </p:nvSpPr>
-        <p:spPr>
-          <a:xfrm>
-            <a:off x="768096" y="3675888"/>
-            <a:ext cx="3090672" cy="320040"/>
-          </a:xfrm>
-          <a:prstGeom prst="rect">
-            <a:avLst/>
-          </a:prstGeom>
-          <a:noFill/>
-          <a:ln/>
-        </p:spPr>
-        <p:txBody>
-          <a:bodyPr wrap="square" lIns="0" tIns="0" rIns="0" bIns="0" rtlCol="0" anchor="t"/>
-          <a:lstStyle/>
-          <a:p>
-            <a:pPr indent="0" marL="0">
-              <a:buNone/>
-            </a:pPr>
-            <a:r>
-              <a:rPr lang="en-US" sz="1500" i="1" dirty="0">
-                <a:solidFill>
-                  <a:srgbClr val="566173"/>
-                </a:solidFill>
-                <a:latin typeface="Calibri" pitchFamily="34" charset="0"/>
-                <a:ea typeface="Calibri" pitchFamily="34" charset="-122"/>
-                <a:cs typeface="Calibri" pitchFamily="34" charset="-120"/>
-              </a:rPr>
-              <a:t>детерминированно</a:t>
-            </a:r>
-            <a:endParaRPr lang="en-US" sz="1500" dirty="0"/>
-          </a:p>
-        </p:txBody>
-      </p:sp>
-      <p:sp>
-        <p:nvSpPr>
-          <p:cNvPr id="7" name="Shape 5"/>
-          <p:cNvSpPr/>
-          <p:nvPr/>
-        </p:nvSpPr>
-        <p:spPr>
-          <a:xfrm>
-            <a:off x="4334256" y="1920240"/>
-            <a:ext cx="3493008" cy="2286000"/>
-          </a:xfrm>
-          <a:prstGeom prst="roundRect">
-            <a:avLst>
-              <a:gd name="adj" fmla="val 4800"/>
-            </a:avLst>
-          </a:prstGeom>
-          <a:solidFill>
-            <a:srgbClr val="EEF2F7"/>
-          </a:solidFill>
-          <a:ln w="12700">
-            <a:solidFill>
-              <a:srgbClr val="D4DCE6"/>
-            </a:solidFill>
-            <a:prstDash val="solid"/>
-          </a:ln>
-        </p:spPr>
-      </p:sp>
-      <p:sp>
-        <p:nvSpPr>
-          <p:cNvPr id="8" name="Text 6"/>
-          <p:cNvSpPr txBox="1"/>
-          <p:nvPr/>
-        </p:nvSpPr>
-        <p:spPr>
-          <a:xfrm>
-            <a:off x="4535424" y="2121408"/>
-            <a:ext cx="3090672" cy="365760"/>
-          </a:xfrm>
-          <a:prstGeom prst="rect">
-            <a:avLst/>
-          </a:prstGeom>
-          <a:noFill/>
-          <a:ln/>
-        </p:spPr>
-        <p:txBody>
-          <a:bodyPr wrap="square" lIns="0" tIns="0" rIns="0" bIns="0" rtlCol="0" anchor="t"/>
-          <a:lstStyle/>
-          <a:p>
-            <a:pPr indent="0" marL="0">
-              <a:buNone/>
-            </a:pPr>
-            <a:r>
-              <a:rPr lang="en-US" sz="1400" b="1" spc="150" kern="0" dirty="0">
-                <a:solidFill>
-                  <a:srgbClr val="E5534B"/>
-                </a:solidFill>
-                <a:latin typeface="Calibri" pitchFamily="34" charset="0"/>
-                <a:ea typeface="Calibri" pitchFamily="34" charset="-122"/>
-                <a:cs typeface="Calibri" pitchFamily="34" charset="-120"/>
-              </a:rPr>
-              <a:t>2 · КРИТЕРИИ МТС</a:t>
-            </a:r>
-            <a:endParaRPr lang="en-US" sz="1400" dirty="0"/>
-          </a:p>
-        </p:txBody>
-      </p:sp>
-      <p:sp>
-        <p:nvSpPr>
-          <p:cNvPr id="9" name="Text 7"/>
-          <p:cNvSpPr txBox="1"/>
-          <p:nvPr/>
-        </p:nvSpPr>
-        <p:spPr>
-          <a:xfrm>
-            <a:off x="4535424" y="2560320"/>
-            <a:ext cx="3090672" cy="960120"/>
-          </a:xfrm>
-          <a:prstGeom prst="rect">
-            <a:avLst/>
-          </a:prstGeom>
-          <a:noFill/>
-          <a:ln/>
-        </p:spPr>
-        <p:txBody>
-          <a:bodyPr wrap="square" lIns="0" tIns="0" rIns="0" bIns="0" rtlCol="0" anchor="t"/>
-          <a:lstStyle/>
-          <a:p>
-            <a:pPr indent="0" marL="0">
-              <a:lnSpc>
-                <a:spcPct val="118000"/>
-              </a:lnSpc>
-              <a:buNone/>
-            </a:pPr>
-            <a:r>
-              <a:rPr lang="en-US" sz="2100" b="1" dirty="0">
-                <a:solidFill>
-                  <a:srgbClr val="1E3252"/>
-                </a:solidFill>
-                <a:latin typeface="Calibri" pitchFamily="34" charset="0"/>
-                <a:ea typeface="Calibri" pitchFamily="34" charset="-122"/>
-                <a:cs typeface="Calibri" pitchFamily="34" charset="-120"/>
-              </a:rPr>
-              <a:t>21 раздел шаблона +</a:t>
-            </a:r>
-            <a:endParaRPr lang="en-US" sz="2100" dirty="0"/>
-          </a:p>
-          <a:p>
-            <a:pPr indent="0" marL="0">
-              <a:lnSpc>
-                <a:spcPct val="118000"/>
-              </a:lnSpc>
-              <a:buNone/>
-            </a:pPr>
-            <a:r>
-              <a:rPr lang="en-US" sz="2100" b="1" dirty="0">
-                <a:solidFill>
-                  <a:srgbClr val="1E3252"/>
-                </a:solidFill>
-                <a:latin typeface="Calibri" pitchFamily="34" charset="0"/>
-                <a:ea typeface="Calibri" pitchFamily="34" charset="-122"/>
-                <a:cs typeface="Calibri" pitchFamily="34" charset="-120"/>
-              </a:rPr>
-              <a:t>8 требований кейсодателя</a:t>
-            </a:r>
-            <a:endParaRPr lang="en-US" sz="2100" dirty="0"/>
-          </a:p>
-        </p:txBody>
-      </p:sp>
-      <p:sp>
-        <p:nvSpPr>
-          <p:cNvPr id="10" name="Text 8"/>
-          <p:cNvSpPr txBox="1"/>
-          <p:nvPr/>
-        </p:nvSpPr>
-        <p:spPr>
-          <a:xfrm>
-            <a:off x="4535424" y="3675888"/>
-            <a:ext cx="3090672" cy="320040"/>
-          </a:xfrm>
-          <a:prstGeom prst="rect">
-            <a:avLst/>
-          </a:prstGeom>
-          <a:noFill/>
-          <a:ln/>
-        </p:spPr>
-        <p:txBody>
-          <a:bodyPr wrap="square" lIns="0" tIns="0" rIns="0" bIns="0" rtlCol="0" anchor="t"/>
-          <a:lstStyle/>
-          <a:p>
-            <a:pPr indent="0" marL="0">
-              <a:buNone/>
-            </a:pPr>
-            <a:r>
-              <a:rPr lang="en-US" sz="1500" i="1" dirty="0">
-                <a:solidFill>
-                  <a:srgbClr val="566173"/>
-                </a:solidFill>
-                <a:latin typeface="Calibri" pitchFamily="34" charset="0"/>
-                <a:ea typeface="Calibri" pitchFamily="34" charset="-122"/>
-                <a:cs typeface="Calibri" pitchFamily="34" charset="-120"/>
-              </a:rPr>
-              <a:t>детерминированно</a:t>
-            </a:r>
-            <a:endParaRPr lang="en-US" sz="1500" dirty="0"/>
-          </a:p>
-        </p:txBody>
-      </p:sp>
-      <p:sp>
-        <p:nvSpPr>
-          <p:cNvPr id="11" name="Shape 9"/>
-          <p:cNvSpPr/>
-          <p:nvPr/>
-        </p:nvSpPr>
-        <p:spPr>
-          <a:xfrm>
-            <a:off x="8101584" y="1920240"/>
-            <a:ext cx="3493008" cy="2286000"/>
-          </a:xfrm>
-          <a:prstGeom prst="roundRect">
-            <a:avLst>
-              <a:gd name="adj" fmla="val 4800"/>
-            </a:avLst>
-          </a:prstGeom>
-          <a:solidFill>
-            <a:srgbClr val="FDF3E3"/>
-          </a:solidFill>
-          <a:ln w="19050">
-            <a:solidFill>
-              <a:srgbClr val="D98324"/>
-            </a:solidFill>
-            <a:prstDash val="solid"/>
-          </a:ln>
-        </p:spPr>
-      </p:sp>
-      <p:sp>
-        <p:nvSpPr>
-          <p:cNvPr id="12" name="Text 10"/>
-          <p:cNvSpPr txBox="1"/>
-          <p:nvPr/>
-        </p:nvSpPr>
-        <p:spPr>
-          <a:xfrm>
-            <a:off x="8302752" y="2121408"/>
-            <a:ext cx="3090672" cy="365760"/>
-          </a:xfrm>
-          <a:prstGeom prst="rect">
-            <a:avLst/>
-          </a:prstGeom>
-          <a:noFill/>
-          <a:ln/>
-        </p:spPr>
-        <p:txBody>
-          <a:bodyPr wrap="square" lIns="0" tIns="0" rIns="0" bIns="0" rtlCol="0" anchor="t"/>
-          <a:lstStyle/>
-          <a:p>
-            <a:pPr indent="0" marL="0">
-              <a:buNone/>
-            </a:pPr>
-            <a:r>
-              <a:rPr lang="en-US" sz="1400" b="1" spc="150" kern="0" dirty="0">
-                <a:solidFill>
-                  <a:srgbClr val="7A4B00"/>
-                </a:solidFill>
-                <a:latin typeface="Calibri" pitchFamily="34" charset="0"/>
-                <a:ea typeface="Calibri" pitchFamily="34" charset="-122"/>
-                <a:cs typeface="Calibri" pitchFamily="34" charset="-120"/>
-              </a:rPr>
-              <a:t>3 · LLM-РЕВЬЮ</a:t>
-            </a:r>
-            <a:endParaRPr lang="en-US" sz="1400" dirty="0"/>
-          </a:p>
-        </p:txBody>
-      </p:sp>
-      <p:sp>
-        <p:nvSpPr>
-          <p:cNvPr id="13" name="Text 11"/>
-          <p:cNvSpPr txBox="1"/>
-          <p:nvPr/>
-        </p:nvSpPr>
-        <p:spPr>
-          <a:xfrm>
-            <a:off x="8302752" y="2560320"/>
-            <a:ext cx="3090672" cy="960120"/>
-          </a:xfrm>
-          <a:prstGeom prst="rect">
-            <a:avLst/>
-          </a:prstGeom>
-          <a:noFill/>
-          <a:ln/>
-        </p:spPr>
-        <p:txBody>
-          <a:bodyPr wrap="square" lIns="0" tIns="0" rIns="0" bIns="0" rtlCol="0" anchor="t"/>
-          <a:lstStyle/>
-          <a:p>
-            <a:pPr indent="0" marL="0">
-              <a:lnSpc>
-                <a:spcPct val="118000"/>
-              </a:lnSpc>
-              <a:buNone/>
-            </a:pPr>
-            <a:r>
-              <a:rPr lang="en-US" sz="2100" b="1" dirty="0">
-                <a:solidFill>
-                  <a:srgbClr val="1E3252"/>
-                </a:solidFill>
-                <a:latin typeface="Calibri" pitchFamily="34" charset="0"/>
-                <a:ea typeface="Calibri" pitchFamily="34" charset="-122"/>
-                <a:cs typeface="Calibri" pitchFamily="34" charset="-120"/>
-              </a:rPr>
-              <a:t>23 категории,</a:t>
-            </a:r>
-            <a:endParaRPr lang="en-US" sz="2100" dirty="0"/>
-          </a:p>
-          <a:p>
-            <a:pPr indent="0" marL="0">
-              <a:lnSpc>
-                <a:spcPct val="118000"/>
-              </a:lnSpc>
-              <a:buNone/>
-            </a:pPr>
-            <a:r>
-              <a:rPr lang="en-US" sz="2100" b="1" dirty="0">
-                <a:solidFill>
-                  <a:srgbClr val="1E3252"/>
-                </a:solidFill>
-                <a:latin typeface="Calibri" pitchFamily="34" charset="0"/>
-                <a:ea typeface="Calibri" pitchFamily="34" charset="-122"/>
-                <a:cs typeface="Calibri" pitchFamily="34" charset="-120"/>
-              </a:rPr>
-              <a:t>обязательная цитата</a:t>
-            </a:r>
-            <a:endParaRPr lang="en-US" sz="2100" dirty="0"/>
-          </a:p>
-        </p:txBody>
-      </p:sp>
-      <p:sp>
-        <p:nvSpPr>
-          <p:cNvPr id="14" name="Text 12"/>
-          <p:cNvSpPr txBox="1"/>
-          <p:nvPr/>
-        </p:nvSpPr>
-        <p:spPr>
-          <a:xfrm>
-            <a:off x="8302752" y="3675888"/>
-            <a:ext cx="3090672" cy="320040"/>
-          </a:xfrm>
-          <a:prstGeom prst="rect">
-            <a:avLst/>
-          </a:prstGeom>
-          <a:noFill/>
-          <a:ln/>
-        </p:spPr>
-        <p:txBody>
-          <a:bodyPr wrap="square" lIns="0" tIns="0" rIns="0" bIns="0" rtlCol="0" anchor="t"/>
-          <a:lstStyle/>
-          <a:p>
-            <a:pPr indent="0" marL="0">
-              <a:buNone/>
-            </a:pPr>
-            <a:r>
-              <a:rPr lang="en-US" sz="1500" i="1" dirty="0">
-                <a:solidFill>
-                  <a:srgbClr val="566173"/>
-                </a:solidFill>
-                <a:latin typeface="Calibri" pitchFamily="34" charset="0"/>
-                <a:ea typeface="Calibri" pitchFamily="34" charset="-122"/>
-                <a:cs typeface="Calibri" pitchFamily="34" charset="-120"/>
-              </a:rPr>
-              <a:t>смысл и формулировки</a:t>
-            </a:r>
-            <a:endParaRPr lang="en-US" sz="1500" dirty="0"/>
-          </a:p>
-        </p:txBody>
-      </p:sp>
-      <p:sp>
-        <p:nvSpPr>
-          <p:cNvPr id="15" name="Shape 13"/>
-          <p:cNvSpPr/>
-          <p:nvPr/>
-        </p:nvSpPr>
-        <p:spPr>
-          <a:xfrm>
-            <a:off x="566928" y="4526280"/>
-            <a:ext cx="11027664" cy="1554480"/>
-          </a:xfrm>
-          <a:prstGeom prst="roundRect">
-            <a:avLst>
-              <a:gd name="adj" fmla="val 7059"/>
-            </a:avLst>
-          </a:prstGeom>
-          <a:solidFill>
-            <a:srgbClr val="13223B"/>
-          </a:solidFill>
-          <a:ln/>
-        </p:spPr>
-      </p:sp>
-      <p:sp>
-        <p:nvSpPr>
-          <p:cNvPr id="16" name="Text 14"/>
-          <p:cNvSpPr txBox="1"/>
-          <p:nvPr/>
-        </p:nvSpPr>
-        <p:spPr>
-          <a:xfrm>
-            <a:off x="932688" y="4526280"/>
-            <a:ext cx="10296144" cy="1554480"/>
-          </a:xfrm>
-          <a:prstGeom prst="rect">
-            <a:avLst/>
-          </a:prstGeom>
-          <a:noFill/>
-          <a:ln/>
-        </p:spPr>
-        <p:txBody>
-          <a:bodyPr wrap="square" lIns="0" tIns="0" rIns="0" bIns="0" rtlCol="0" anchor="ctr"/>
-          <a:lstStyle/>
-          <a:p>
-            <a:pPr indent="0" marL="0">
-              <a:lnSpc>
-                <a:spcPct val="122000"/>
-              </a:lnSpc>
-              <a:buNone/>
-            </a:pPr>
-            <a:r>
-              <a:rPr lang="en-US" sz="2300" b="1" dirty="0">
-                <a:solidFill>
-                  <a:srgbClr val="D98324"/>
-                </a:solidFill>
-                <a:latin typeface="Calibri" pitchFamily="34" charset="0"/>
-                <a:ea typeface="Calibri" pitchFamily="34" charset="-122"/>
-                <a:cs typeface="Calibri" pitchFamily="34" charset="-120"/>
-              </a:rPr>
-              <a:t>Почему так: </a:t>
-            </a:r>
-            <a:pPr indent="0" marL="0">
-              <a:lnSpc>
-                <a:spcPct val="122000"/>
-              </a:lnSpc>
-              <a:buNone/>
-            </a:pPr>
-            <a:r>
-              <a:rPr lang="en-US" sz="2300" dirty="0">
-                <a:solidFill>
-                  <a:srgbClr val="D6DFEC"/>
-                </a:solidFill>
-                <a:latin typeface="Calibri" pitchFamily="34" charset="0"/>
-                <a:ea typeface="Calibri" pitchFamily="34" charset="-122"/>
-                <a:cs typeface="Calibri" pitchFamily="34" charset="-120"/>
-              </a:rPr>
-              <a:t>структуру и критерии проверяет код, LLM отвечает только за смысл. Без доступа к модели инструмент продолжает работать. Ограничение: текст, не сканы.</a:t>
-            </a:r>
-            <a:endParaRPr lang="en-US" sz="2300" dirty="0"/>
+            <a:pPr algn="r" indent="0" marL="0">
+              <a:buNone/>
+            </a:pPr>
+            <a:r>
+              <a:rPr lang="en-US" sz="1200" spc="100" kern="0" dirty="0">
+                <a:solidFill>
+                  <a:srgbClr val="C3CDD9"/>
+                </a:solidFill>
+                <a:latin typeface="Calibri" pitchFamily="34" charset="0"/>
+                <a:ea typeface="Calibri" pitchFamily="34" charset="-122"/>
+                <a:cs typeface="Calibri" pitchFamily="34" charset="-120"/>
+              </a:rPr>
+              <a:t>05</a:t>
+            </a:r>
+            <a:endParaRPr lang="en-US" sz="1200" dirty="0"/>
           </a:p>
         </p:txBody>
       </p:sp>
@@ -4034,8 +3649,47 @@
         </p:nvSpPr>
         <p:spPr>
           <a:xfrm>
-            <a:off x="566928" y="457200"/>
-            <a:ext cx="11027664" cy="914400"/>
+            <a:off x="658368" y="566928"/>
+            <a:ext cx="10844784" cy="274320"/>
+          </a:xfrm>
+          <a:prstGeom prst="rect">
+            <a:avLst/>
+          </a:prstGeom>
+          <a:noFill/>
+          <a:ln/>
+        </p:spPr>
+        <p:txBody>
+          <a:bodyPr wrap="square" lIns="0" tIns="0" rIns="0" bIns="0" rtlCol="0" anchor="t"/>
+          <a:lstStyle/>
+          <a:p>
+            <a:pPr indent="0" marL="0">
+              <a:buNone/>
+            </a:pPr>
+            <a:r>
+              <a:rPr lang="en-US" sz="1150" b="1" spc="400" kern="0" dirty="0">
+                <a:solidFill>
+                  <a:srgbClr val="E5534B"/>
+                </a:solidFill>
+                <a:latin typeface="Calibri" pitchFamily="34" charset="0"/>
+                <a:ea typeface="Calibri" pitchFamily="34" charset="-122"/>
+                <a:cs typeface="Calibri" pitchFamily="34" charset="-120"/>
+              </a:rPr>
+              <a:t>ВТОРОЙ РЕЗУЛЬТАТ</a:t>
+            </a:r>
+            <a:endParaRPr lang="en-US" sz="1150" dirty="0"/>
+          </a:p>
+        </p:txBody>
+      </p:sp>
+      <p:sp>
+        <p:nvSpPr>
+          <p:cNvPr id="3" name="Text 1"/>
+          <p:cNvSpPr txBox="1"/>
+          <p:nvPr/>
+        </p:nvSpPr>
+        <p:spPr>
+          <a:xfrm>
+            <a:off x="658368" y="914400"/>
+            <a:ext cx="10844784" cy="914400"/>
           </a:xfrm>
           <a:prstGeom prst="rect">
             <a:avLst/>
@@ -4051,62 +3705,93 @@
           <a:p>
             <a:pPr indent="0" marL="0">
               <a:lnSpc>
-                <a:spcPct val="105000"/>
+                <a:spcPct val="106000"/>
               </a:lnSpc>
               <a:buNone/>
             </a:pPr>
             <a:r>
-              <a:rPr lang="en-US" sz="3300" b="1" dirty="0">
-                <a:solidFill>
-                  <a:srgbClr val="13223B"/>
+              <a:rPr lang="en-US" sz="3200" b="1" dirty="0">
+                <a:solidFill>
+                  <a:srgbClr val="0E1B2E"/>
                 </a:solidFill>
                 <a:latin typeface="Cambria" pitchFamily="34" charset="0"/>
                 <a:ea typeface="Cambria" pitchFamily="34" charset="-122"/>
                 <a:cs typeface="Cambria" pitchFamily="34" charset="-120"/>
               </a:rPr>
-              <a:t>Что измерено, а что пока гипотеза</a:t>
-            </a:r>
-            <a:endParaRPr lang="en-US" sz="3300" dirty="0"/>
-          </a:p>
-        </p:txBody>
-      </p:sp>
-      <p:sp>
-        <p:nvSpPr>
-          <p:cNvPr id="3" name="Shape 1"/>
+              <a:t>Проверка структуры по официальному шаблону МТС</a:t>
+            </a:r>
+            <a:endParaRPr lang="en-US" sz="3200" dirty="0"/>
+          </a:p>
+        </p:txBody>
+      </p:sp>
+      <p:sp>
+        <p:nvSpPr>
+          <p:cNvPr id="4" name="Shape 2"/>
           <p:cNvSpPr/>
           <p:nvPr/>
         </p:nvSpPr>
         <p:spPr>
           <a:xfrm>
-            <a:off x="566928" y="1874520"/>
-            <a:ext cx="5330952" cy="3429000"/>
+            <a:off x="1005840" y="2148840"/>
+            <a:ext cx="10149840" cy="3792172"/>
           </a:xfrm>
           <a:prstGeom prst="roundRect">
             <a:avLst>
-              <a:gd name="adj" fmla="val 3200"/>
+              <a:gd name="adj" fmla="val 1206"/>
             </a:avLst>
           </a:prstGeom>
           <a:solidFill>
-            <a:srgbClr val="E8F3EE"/>
+            <a:srgbClr val="FFFFFF"/>
           </a:solidFill>
-          <a:ln w="19050">
+          <a:ln w="12700">
             <a:solidFill>
-              <a:srgbClr val="2E7D5B"/>
+              <a:srgbClr val="E2E8F0"/>
             </a:solidFill>
             <a:prstDash val="solid"/>
           </a:ln>
-        </p:spPr>
-      </p:sp>
-      <p:sp>
-        <p:nvSpPr>
-          <p:cNvPr id="4" name="Text 2"/>
-          <p:cNvSpPr txBox="1"/>
-          <p:nvPr/>
-        </p:nvSpPr>
-        <p:spPr>
-          <a:xfrm>
-            <a:off x="886968" y="2103120"/>
-            <a:ext cx="4690872" cy="365760"/>
+          <a:effectLst>
+            <a:outerShdw sx="100000" sy="100000" kx="0" ky="0" algn="bl" rotWithShape="0" blurRad="177800" dist="50800" dir="5400000">
+              <a:srgbClr val="8FA0B5">
+                <a:alpha val="28000"/>
+              </a:srgbClr>
+            </a:outerShdw>
+          </a:effectLst>
+        </p:spPr>
+      </p:sp>
+      <p:pic>
+        <p:nvPicPr>
+          <p:cNvPr id="5" name="Image 0" descr="C:\Masaüstü\tz-reviewer\presentation\assets\ui-coverage.png">    </p:cNvPr>
+          <p:cNvPicPr>
+            <a:picLocks noChangeAspect="1"/>
+          </p:cNvPicPr>
+          <p:nvPr/>
+        </p:nvPicPr>
+        <p:blipFill>
+          <a:blip r:embed="rId1"/>
+          <a:stretch>
+            <a:fillRect/>
+          </a:stretch>
+        </p:blipFill>
+        <p:spPr>
+          <a:xfrm>
+            <a:off x="1051560" y="2194560"/>
+            <a:ext cx="10058400" cy="3700732"/>
+          </a:xfrm>
+          <a:prstGeom prst="rect">
+            <a:avLst/>
+          </a:prstGeom>
+        </p:spPr>
+      </p:pic>
+      <p:sp>
+        <p:nvSpPr>
+          <p:cNvPr id="6" name="Text 3"/>
+          <p:cNvSpPr txBox="1"/>
+          <p:nvPr/>
+        </p:nvSpPr>
+        <p:spPr>
+          <a:xfrm>
+            <a:off x="10954512" y="548640"/>
+            <a:ext cx="548640" cy="292608"/>
           </a:xfrm>
           <a:prstGeom prst="rect">
             <a:avLst/>
@@ -4118,338 +3803,21 @@
           <a:bodyPr wrap="square" lIns="0" tIns="0" rIns="0" bIns="0" rtlCol="0" anchor="t"/>
           <a:lstStyle/>
           <a:p>
-            <a:pPr indent="0" marL="0">
-              <a:buNone/>
-            </a:pPr>
-            <a:r>
-              <a:rPr lang="en-US" sz="1600" b="1" spc="200" kern="0" dirty="0">
-                <a:solidFill>
-                  <a:srgbClr val="2E7D5B"/>
-                </a:solidFill>
-                <a:latin typeface="Calibri" pitchFamily="34" charset="0"/>
-                <a:ea typeface="Calibri" pitchFamily="34" charset="-122"/>
-                <a:cs typeface="Calibri" pitchFamily="34" charset="-120"/>
-              </a:rPr>
-              <a:t>ИЗМЕРЕНО</a:t>
-            </a:r>
-            <a:endParaRPr lang="en-US" sz="1600" dirty="0"/>
-          </a:p>
-        </p:txBody>
-      </p:sp>
-      <p:sp>
-        <p:nvSpPr>
-          <p:cNvPr id="5" name="Text 3"/>
-          <p:cNvSpPr txBox="1"/>
-          <p:nvPr/>
-        </p:nvSpPr>
-        <p:spPr>
-          <a:xfrm>
-            <a:off x="886968" y="2606040"/>
-            <a:ext cx="4690872" cy="2514600"/>
-          </a:xfrm>
-          <a:prstGeom prst="rect">
-            <a:avLst/>
-          </a:prstGeom>
-          <a:noFill/>
-          <a:ln/>
-        </p:spPr>
-        <p:txBody>
-          <a:bodyPr wrap="square" lIns="0" tIns="0" rIns="0" bIns="0" rtlCol="0" anchor="t"/>
-          <a:lstStyle/>
-          <a:p>
-            <a:pPr marL="342900" indent="-342900">
-              <a:lnSpc>
-                <a:spcPct val="115000"/>
-              </a:lnSpc>
-              <a:spcAft>
-                <a:spcPts val="900"/>
-              </a:spcAft>
-              <a:buSzPct val="100000"/>
-              <a:buChar char="•"/>
-            </a:pPr>
-            <a:r>
-              <a:rPr lang="en-US" sz="2100" dirty="0">
-                <a:solidFill>
-                  <a:srgbClr val="1E3252"/>
-                </a:solidFill>
-                <a:latin typeface="Calibri" pitchFamily="34" charset="0"/>
-                <a:ea typeface="Calibri" pitchFamily="34" charset="-122"/>
-                <a:cs typeface="Calibri" pitchFamily="34" charset="-120"/>
-              </a:rPr>
-              <a:t>3 реальных ТЗ — без сбоев</a:t>
-            </a:r>
-            <a:endParaRPr lang="en-US" sz="2100" dirty="0"/>
-          </a:p>
-          <a:p>
-            <a:pPr marL="342900" indent="-342900">
-              <a:lnSpc>
-                <a:spcPct val="115000"/>
-              </a:lnSpc>
-              <a:spcAft>
-                <a:spcPts val="900"/>
-              </a:spcAft>
-              <a:buSzPct val="100000"/>
-              <a:buChar char="•"/>
-            </a:pPr>
-            <a:r>
-              <a:rPr lang="en-US" sz="2100" dirty="0">
-                <a:solidFill>
-                  <a:srgbClr val="1E3252"/>
-                </a:solidFill>
-                <a:latin typeface="Calibri" pitchFamily="34" charset="0"/>
-                <a:ea typeface="Calibri" pitchFamily="34" charset="-122"/>
-                <a:cs typeface="Calibri" pitchFamily="34" charset="-120"/>
-              </a:rPr>
-              <a:t>20 замечаний, все с цитатой</a:t>
-            </a:r>
-            <a:endParaRPr lang="en-US" sz="2100" dirty="0"/>
-          </a:p>
-          <a:p>
-            <a:pPr marL="342900" indent="-342900">
-              <a:lnSpc>
-                <a:spcPct val="115000"/>
-              </a:lnSpc>
-              <a:spcAft>
-                <a:spcPts val="900"/>
-              </a:spcAft>
-              <a:buSzPct val="100000"/>
-              <a:buChar char="•"/>
-            </a:pPr>
-            <a:r>
-              <a:rPr lang="en-US" sz="2100" dirty="0">
-                <a:solidFill>
-                  <a:srgbClr val="1E3252"/>
-                </a:solidFill>
-                <a:latin typeface="Calibri" pitchFamily="34" charset="0"/>
-                <a:ea typeface="Calibri" pitchFamily="34" charset="-122"/>
-                <a:cs typeface="Calibri" pitchFamily="34" charset="-120"/>
-              </a:rPr>
-              <a:t>смена провайдера без правок кода</a:t>
-            </a:r>
-            <a:endParaRPr lang="en-US" sz="2100" dirty="0"/>
-          </a:p>
-          <a:p>
-            <a:pPr marL="342900" indent="-342900">
-              <a:lnSpc>
-                <a:spcPct val="115000"/>
-              </a:lnSpc>
-              <a:spcAft>
-                <a:spcPts val="900"/>
-              </a:spcAft>
-              <a:buSzPct val="100000"/>
-              <a:buChar char="•"/>
-            </a:pPr>
-            <a:r>
-              <a:rPr lang="en-US" sz="2100" dirty="0">
-                <a:solidFill>
-                  <a:srgbClr val="1E3252"/>
-                </a:solidFill>
-                <a:latin typeface="Calibri" pitchFamily="34" charset="0"/>
-                <a:ea typeface="Calibri" pitchFamily="34" charset="-122"/>
-                <a:cs typeface="Calibri" pitchFamily="34" charset="-120"/>
-              </a:rPr>
-              <a:t>73 автотеста проходят</a:t>
-            </a:r>
-            <a:endParaRPr lang="en-US" sz="2100" dirty="0"/>
-          </a:p>
-        </p:txBody>
-      </p:sp>
-      <p:sp>
-        <p:nvSpPr>
-          <p:cNvPr id="6" name="Shape 4"/>
-          <p:cNvSpPr/>
-          <p:nvPr/>
-        </p:nvSpPr>
-        <p:spPr>
-          <a:xfrm>
-            <a:off x="6263640" y="1874520"/>
-            <a:ext cx="5330952" cy="3429000"/>
-          </a:xfrm>
-          <a:prstGeom prst="roundRect">
-            <a:avLst>
-              <a:gd name="adj" fmla="val 3200"/>
-            </a:avLst>
-          </a:prstGeom>
-          <a:solidFill>
-            <a:srgbClr val="FDF3E3"/>
-          </a:solidFill>
-          <a:ln w="19050">
-            <a:solidFill>
-              <a:srgbClr val="D98324"/>
-            </a:solidFill>
-            <a:prstDash val="solid"/>
-          </a:ln>
-        </p:spPr>
-      </p:sp>
-      <p:sp>
-        <p:nvSpPr>
-          <p:cNvPr id="7" name="Text 5"/>
-          <p:cNvSpPr txBox="1"/>
-          <p:nvPr/>
-        </p:nvSpPr>
-        <p:spPr>
-          <a:xfrm>
-            <a:off x="6583680" y="2103120"/>
-            <a:ext cx="4690872" cy="365760"/>
-          </a:xfrm>
-          <a:prstGeom prst="rect">
-            <a:avLst/>
-          </a:prstGeom>
-          <a:noFill/>
-          <a:ln/>
-        </p:spPr>
-        <p:txBody>
-          <a:bodyPr wrap="square" lIns="0" tIns="0" rIns="0" bIns="0" rtlCol="0" anchor="t"/>
-          <a:lstStyle/>
-          <a:p>
-            <a:pPr indent="0" marL="0">
-              <a:buNone/>
-            </a:pPr>
-            <a:r>
-              <a:rPr lang="en-US" sz="1600" b="1" spc="200" kern="0" dirty="0">
-                <a:solidFill>
-                  <a:srgbClr val="7A4B00"/>
-                </a:solidFill>
-                <a:latin typeface="Calibri" pitchFamily="34" charset="0"/>
-                <a:ea typeface="Calibri" pitchFamily="34" charset="-122"/>
-                <a:cs typeface="Calibri" pitchFamily="34" charset="-120"/>
-              </a:rPr>
-              <a:t>ПОКА ГИПОТЕЗА</a:t>
-            </a:r>
-            <a:endParaRPr lang="en-US" sz="1600" dirty="0"/>
-          </a:p>
-        </p:txBody>
-      </p:sp>
-      <p:sp>
-        <p:nvSpPr>
-          <p:cNvPr id="8" name="Text 6"/>
-          <p:cNvSpPr txBox="1"/>
-          <p:nvPr/>
-        </p:nvSpPr>
-        <p:spPr>
-          <a:xfrm>
-            <a:off x="6583680" y="2606040"/>
-            <a:ext cx="4690872" cy="2514600"/>
-          </a:xfrm>
-          <a:prstGeom prst="rect">
-            <a:avLst/>
-          </a:prstGeom>
-          <a:noFill/>
-          <a:ln/>
-        </p:spPr>
-        <p:txBody>
-          <a:bodyPr wrap="square" lIns="0" tIns="0" rIns="0" bIns="0" rtlCol="0" anchor="t"/>
-          <a:lstStyle/>
-          <a:p>
-            <a:pPr marL="342900" indent="-342900">
-              <a:lnSpc>
-                <a:spcPct val="115000"/>
-              </a:lnSpc>
-              <a:spcAft>
-                <a:spcPts val="900"/>
-              </a:spcAft>
-              <a:buSzPct val="100000"/>
-              <a:buChar char="•"/>
-            </a:pPr>
-            <a:r>
-              <a:rPr lang="en-US" sz="2100" dirty="0">
-                <a:solidFill>
-                  <a:srgbClr val="1E3252"/>
-                </a:solidFill>
-                <a:latin typeface="Calibri" pitchFamily="34" charset="0"/>
-                <a:ea typeface="Calibri" pitchFamily="34" charset="-122"/>
-                <a:cs typeface="Calibri" pitchFamily="34" charset="-120"/>
-              </a:rPr>
-              <a:t>precision / recall — нужна разметка</a:t>
-            </a:r>
-            <a:endParaRPr lang="en-US" sz="2100" dirty="0"/>
-          </a:p>
-          <a:p>
-            <a:pPr marL="342900" indent="-342900">
-              <a:lnSpc>
-                <a:spcPct val="115000"/>
-              </a:lnSpc>
-              <a:spcAft>
-                <a:spcPts val="900"/>
-              </a:spcAft>
-              <a:buSzPct val="100000"/>
-              <a:buChar char="•"/>
-            </a:pPr>
-            <a:r>
-              <a:rPr lang="en-US" sz="2100" dirty="0">
-                <a:solidFill>
-                  <a:srgbClr val="1E3252"/>
-                </a:solidFill>
-                <a:latin typeface="Calibri" pitchFamily="34" charset="0"/>
-                <a:ea typeface="Calibri" pitchFamily="34" charset="-122"/>
-                <a:cs typeface="Calibri" pitchFamily="34" charset="-120"/>
-              </a:rPr>
-              <a:t>снижение поздних уточнений — нужен пилот</a:t>
-            </a:r>
-            <a:endParaRPr lang="en-US" sz="2100" dirty="0"/>
-          </a:p>
-          <a:p>
-            <a:pPr marL="342900" indent="-342900">
-              <a:lnSpc>
-                <a:spcPct val="115000"/>
-              </a:lnSpc>
-              <a:spcAft>
-                <a:spcPts val="900"/>
-              </a:spcAft>
-              <a:buSzPct val="100000"/>
-              <a:buChar char="•"/>
-            </a:pPr>
-            <a:r>
-              <a:rPr lang="en-US" sz="2100" dirty="0">
-                <a:solidFill>
-                  <a:srgbClr val="1E3252"/>
-                </a:solidFill>
-                <a:latin typeface="Calibri" pitchFamily="34" charset="0"/>
-                <a:ea typeface="Calibri" pitchFamily="34" charset="-122"/>
-                <a:cs typeface="Calibri" pitchFamily="34" charset="-120"/>
-              </a:rPr>
-              <a:t>качество проверено вручную, не в цифрах</a:t>
-            </a:r>
-            <a:endParaRPr lang="en-US" sz="2100" dirty="0"/>
-          </a:p>
-        </p:txBody>
-      </p:sp>
-      <p:sp>
-        <p:nvSpPr>
-          <p:cNvPr id="9" name="Text 7"/>
-          <p:cNvSpPr txBox="1"/>
-          <p:nvPr/>
-        </p:nvSpPr>
-        <p:spPr>
-          <a:xfrm>
-            <a:off x="566928" y="5577840"/>
-            <a:ext cx="11027664" cy="640080"/>
-          </a:xfrm>
-          <a:prstGeom prst="rect">
-            <a:avLst/>
-          </a:prstGeom>
-          <a:noFill/>
-          <a:ln/>
-        </p:spPr>
-        <p:txBody>
-          <a:bodyPr wrap="square" lIns="0" tIns="0" rIns="0" bIns="0" rtlCol="0" anchor="t"/>
-          <a:lstStyle/>
-          <a:p>
-            <a:pPr indent="0" marL="0">
-              <a:buNone/>
-            </a:pPr>
-            <a:r>
-              <a:rPr lang="en-US" sz="2200" i="1" dirty="0">
-                <a:solidFill>
-                  <a:srgbClr val="566173"/>
-                </a:solidFill>
-                <a:latin typeface="Calibri" pitchFamily="34" charset="0"/>
-                <a:ea typeface="Calibri" pitchFamily="34" charset="-122"/>
-                <a:cs typeface="Calibri" pitchFamily="34" charset="-120"/>
-              </a:rPr>
-              <a:t>Мы честно разделяем проверенное и непроверенное — и знаем, чем закрыть вторую колонку.</a:t>
-            </a:r>
-            <a:endParaRPr lang="en-US" sz="2200" dirty="0"/>
+            <a:pPr algn="r" indent="0" marL="0">
+              <a:buNone/>
+            </a:pPr>
+            <a:r>
+              <a:rPr lang="en-US" sz="1200" spc="100" kern="0" dirty="0">
+                <a:solidFill>
+                  <a:srgbClr val="C3CDD9"/>
+                </a:solidFill>
+                <a:latin typeface="Calibri" pitchFamily="34" charset="0"/>
+                <a:ea typeface="Calibri" pitchFamily="34" charset="-122"/>
+                <a:cs typeface="Calibri" pitchFamily="34" charset="-120"/>
+              </a:rPr>
+              <a:t>06</a:t>
+            </a:r>
+            <a:endParaRPr lang="en-US" sz="1200" dirty="0"/>
           </a:p>
         </p:txBody>
       </p:sp>
@@ -4467,7 +3835,7 @@
     <p:bg>
       <p:bgPr>
         <a:solidFill>
-          <a:srgbClr val="13223B"/>
+          <a:srgbClr val="FFFFFF"/>
         </a:solidFill>
       </p:bgPr>
     </p:bg>
@@ -4493,8 +3861,47 @@
         </p:nvSpPr>
         <p:spPr>
           <a:xfrm>
-            <a:off x="566928" y="457200"/>
-            <a:ext cx="11027664" cy="914400"/>
+            <a:off x="658368" y="566928"/>
+            <a:ext cx="10844784" cy="274320"/>
+          </a:xfrm>
+          <a:prstGeom prst="rect">
+            <a:avLst/>
+          </a:prstGeom>
+          <a:noFill/>
+          <a:ln/>
+        </p:spPr>
+        <p:txBody>
+          <a:bodyPr wrap="square" lIns="0" tIns="0" rIns="0" bIns="0" rtlCol="0" anchor="t"/>
+          <a:lstStyle/>
+          <a:p>
+            <a:pPr indent="0" marL="0">
+              <a:buNone/>
+            </a:pPr>
+            <a:r>
+              <a:rPr lang="en-US" sz="1150" b="1" spc="400" kern="0" dirty="0">
+                <a:solidFill>
+                  <a:srgbClr val="E5534B"/>
+                </a:solidFill>
+                <a:latin typeface="Calibri" pitchFamily="34" charset="0"/>
+                <a:ea typeface="Calibri" pitchFamily="34" charset="-122"/>
+                <a:cs typeface="Calibri" pitchFamily="34" charset="-120"/>
+              </a:rPr>
+              <a:t>АРХИТЕКТУРА</a:t>
+            </a:r>
+            <a:endParaRPr lang="en-US" sz="1150" dirty="0"/>
+          </a:p>
+        </p:txBody>
+      </p:sp>
+      <p:sp>
+        <p:nvSpPr>
+          <p:cNvPr id="3" name="Text 1"/>
+          <p:cNvSpPr txBox="1"/>
+          <p:nvPr/>
+        </p:nvSpPr>
+        <p:spPr>
+          <a:xfrm>
+            <a:off x="658368" y="914400"/>
+            <a:ext cx="10844784" cy="914400"/>
           </a:xfrm>
           <a:prstGeom prst="rect">
             <a:avLst/>
@@ -4510,47 +3917,47 @@
           <a:p>
             <a:pPr indent="0" marL="0">
               <a:lnSpc>
-                <a:spcPct val="105000"/>
+                <a:spcPct val="106000"/>
               </a:lnSpc>
               <a:buNone/>
             </a:pPr>
             <a:r>
-              <a:rPr lang="en-US" sz="3300" b="1" dirty="0">
-                <a:solidFill>
-                  <a:srgbClr val="FFFFFF"/>
+              <a:rPr lang="en-US" sz="3200" b="1" dirty="0">
+                <a:solidFill>
+                  <a:srgbClr val="0E1B2E"/>
                 </a:solidFill>
                 <a:latin typeface="Cambria" pitchFamily="34" charset="0"/>
                 <a:ea typeface="Cambria" pitchFamily="34" charset="-122"/>
                 <a:cs typeface="Cambria" pitchFamily="34" charset="-120"/>
               </a:rPr>
-              <a:t>Прототип работает — следующий шаг пилот на реальных правках NET</a:t>
-            </a:r>
-            <a:endParaRPr lang="en-US" sz="3300" dirty="0"/>
-          </a:p>
-        </p:txBody>
-      </p:sp>
-      <p:sp>
-        <p:nvSpPr>
-          <p:cNvPr id="3" name="Shape 1"/>
+              <a:t>Три слоя — и LLM только один из них</a:t>
+            </a:r>
+            <a:endParaRPr lang="en-US" sz="3200" dirty="0"/>
+          </a:p>
+        </p:txBody>
+      </p:sp>
+      <p:sp>
+        <p:nvSpPr>
+          <p:cNvPr id="4" name="Shape 2"/>
           <p:cNvSpPr/>
           <p:nvPr/>
         </p:nvSpPr>
         <p:spPr>
           <a:xfrm>
-            <a:off x="566928" y="1965960"/>
-            <a:ext cx="3493008" cy="2377440"/>
+            <a:off x="658368" y="2103120"/>
+            <a:ext cx="3407664" cy="2148840"/>
           </a:xfrm>
           <a:prstGeom prst="roundRect">
             <a:avLst>
-              <a:gd name="adj" fmla="val 4615"/>
+              <a:gd name="adj" fmla="val 4255"/>
             </a:avLst>
           </a:prstGeom>
           <a:solidFill>
-            <a:srgbClr val="1E3252"/>
+            <a:srgbClr val="F4F7FA"/>
           </a:solidFill>
           <a:ln w="12700">
             <a:solidFill>
-              <a:srgbClr val="2E4767"/>
+              <a:srgbClr val="E2E8F0"/>
             </a:solidFill>
             <a:prstDash val="solid"/>
           </a:ln>
@@ -4558,14 +3965,14 @@
       </p:sp>
       <p:sp>
         <p:nvSpPr>
-          <p:cNvPr id="4" name="Text 2"/>
-          <p:cNvSpPr txBox="1"/>
-          <p:nvPr/>
-        </p:nvSpPr>
-        <p:spPr>
-          <a:xfrm>
-            <a:off x="795528" y="2157984"/>
-            <a:ext cx="3035808" cy="365760"/>
+          <p:cNvPr id="5" name="Text 3"/>
+          <p:cNvSpPr txBox="1"/>
+          <p:nvPr/>
+        </p:nvSpPr>
+        <p:spPr>
+          <a:xfrm>
+            <a:off x="914400" y="2304288"/>
+            <a:ext cx="2895600" cy="384048"/>
           </a:xfrm>
           <a:prstGeom prst="rect">
             <a:avLst/>
@@ -4581,30 +3988,30 @@
               <a:buNone/>
             </a:pPr>
             <a:r>
-              <a:rPr lang="en-US" sz="1500" b="1" spc="200" kern="0" dirty="0">
-                <a:solidFill>
-                  <a:srgbClr val="8FA8C2"/>
-                </a:solidFill>
-                <a:latin typeface="Calibri" pitchFamily="34" charset="0"/>
-                <a:ea typeface="Calibri" pitchFamily="34" charset="-122"/>
-                <a:cs typeface="Calibri" pitchFamily="34" charset="-120"/>
-              </a:rPr>
-              <a:t>СДЕЛАНО</a:t>
-            </a:r>
-            <a:endParaRPr lang="en-US" sz="1500" dirty="0"/>
-          </a:p>
-        </p:txBody>
-      </p:sp>
-      <p:sp>
-        <p:nvSpPr>
-          <p:cNvPr id="5" name="Text 3"/>
-          <p:cNvSpPr txBox="1"/>
-          <p:nvPr/>
-        </p:nvSpPr>
-        <p:spPr>
-          <a:xfrm>
-            <a:off x="795528" y="2596896"/>
-            <a:ext cx="3035808" cy="1600200"/>
+              <a:rPr lang="en-US" sz="2200" b="1" dirty="0">
+                <a:solidFill>
+                  <a:srgbClr val="B9C4D2"/>
+                </a:solidFill>
+                <a:latin typeface="Cambria" pitchFamily="34" charset="0"/>
+                <a:ea typeface="Cambria" pitchFamily="34" charset="-122"/>
+                <a:cs typeface="Cambria" pitchFamily="34" charset="-120"/>
+              </a:rPr>
+              <a:t>01</a:t>
+            </a:r>
+            <a:endParaRPr lang="en-US" sz="2200" dirty="0"/>
+          </a:p>
+        </p:txBody>
+      </p:sp>
+      <p:sp>
+        <p:nvSpPr>
+          <p:cNvPr id="6" name="Text 4"/>
+          <p:cNvSpPr txBox="1"/>
+          <p:nvPr/>
+        </p:nvSpPr>
+        <p:spPr>
+          <a:xfrm>
+            <a:off x="914400" y="2743200"/>
+            <a:ext cx="2895600" cy="365760"/>
           </a:xfrm>
           <a:prstGeom prst="rect">
             <a:avLst/>
@@ -4616,105 +4023,23 @@
           <a:bodyPr wrap="square" lIns="0" tIns="0" rIns="0" bIns="0" rtlCol="0" anchor="t"/>
           <a:lstStyle/>
           <a:p>
-            <a:pPr marL="342900" indent="-342900">
-              <a:lnSpc>
-                <a:spcPct val="115000"/>
-              </a:lnSpc>
-              <a:spcAft>
-                <a:spcPts val="700"/>
-              </a:spcAft>
-              <a:buSzPct val="100000"/>
-              <a:buChar char="•"/>
-            </a:pPr>
-            <a:r>
-              <a:rPr lang="en-US" sz="1800" dirty="0">
-                <a:solidFill>
-                  <a:srgbClr val="D6DFEC"/>
-                </a:solidFill>
-                <a:latin typeface="Calibri" pitchFamily="34" charset="0"/>
-                <a:ea typeface="Calibri" pitchFamily="34" charset="-122"/>
-                <a:cs typeface="Calibri" pitchFamily="34" charset="-120"/>
-              </a:rPr>
-              <a:t>инструмент: веб и CLI</a:t>
-            </a:r>
-            <a:endParaRPr lang="en-US" sz="1800" dirty="0"/>
-          </a:p>
-          <a:p>
-            <a:pPr marL="342900" indent="-342900">
-              <a:lnSpc>
-                <a:spcPct val="115000"/>
-              </a:lnSpc>
-              <a:spcAft>
-                <a:spcPts val="700"/>
-              </a:spcAft>
-              <a:buSzPct val="100000"/>
-              <a:buChar char="•"/>
-            </a:pPr>
-            <a:r>
-              <a:rPr lang="en-US" sz="1800" dirty="0">
-                <a:solidFill>
-                  <a:srgbClr val="D6DFEC"/>
-                </a:solidFill>
-                <a:latin typeface="Calibri" pitchFamily="34" charset="0"/>
-                <a:ea typeface="Calibri" pitchFamily="34" charset="-122"/>
-                <a:cs typeface="Calibri" pitchFamily="34" charset="-120"/>
-              </a:rPr>
-              <a:t>3 документа кейсодателя</a:t>
-            </a:r>
-            <a:endParaRPr lang="en-US" sz="1800" dirty="0"/>
-          </a:p>
-          <a:p>
-            <a:pPr marL="342900" indent="-342900">
-              <a:lnSpc>
-                <a:spcPct val="115000"/>
-              </a:lnSpc>
-              <a:spcAft>
-                <a:spcPts val="700"/>
-              </a:spcAft>
-              <a:buSzPct val="100000"/>
-              <a:buChar char="•"/>
-            </a:pPr>
-            <a:r>
-              <a:rPr lang="en-US" sz="1800" dirty="0">
-                <a:solidFill>
-                  <a:srgbClr val="D6DFEC"/>
-                </a:solidFill>
-                <a:latin typeface="Calibri" pitchFamily="34" charset="0"/>
-                <a:ea typeface="Calibri" pitchFamily="34" charset="-122"/>
-                <a:cs typeface="Calibri" pitchFamily="34" charset="-120"/>
-              </a:rPr>
-              <a:t>код открыт, тесты зелёные</a:t>
-            </a:r>
-            <a:endParaRPr lang="en-US" sz="1800" dirty="0"/>
-          </a:p>
-        </p:txBody>
-      </p:sp>
-      <p:sp>
-        <p:nvSpPr>
-          <p:cNvPr id="6" name="Shape 4"/>
-          <p:cNvSpPr/>
-          <p:nvPr/>
-        </p:nvSpPr>
-        <p:spPr>
-          <a:xfrm>
-            <a:off x="4334256" y="1965960"/>
-            <a:ext cx="3493008" cy="2377440"/>
-          </a:xfrm>
-          <a:prstGeom prst="roundRect">
-            <a:avLst>
-              <a:gd name="adj" fmla="val 4615"/>
-            </a:avLst>
-          </a:prstGeom>
-          <a:solidFill>
-            <a:srgbClr val="1E3252"/>
-          </a:solidFill>
-          <a:ln w="12700">
-            <a:solidFill>
-              <a:srgbClr val="2E4767"/>
-            </a:solidFill>
-            <a:prstDash val="solid"/>
-          </a:ln>
-        </p:spPr>
+            <a:pPr indent="0" marL="0">
+              <a:buNone/>
+            </a:pPr>
+            <a:r>
+              <a:rPr lang="en-US" sz="2100" b="1" dirty="0">
+                <a:solidFill>
+                  <a:srgbClr val="0E1B2E"/>
+                </a:solidFill>
+                <a:latin typeface="Calibri" pitchFamily="34" charset="0"/>
+                <a:ea typeface="Calibri" pitchFamily="34" charset="-122"/>
+                <a:cs typeface="Calibri" pitchFamily="34" charset="-120"/>
+              </a:rPr>
+              <a:t>Разбор документа</a:t>
+            </a:r>
+            <a:endParaRPr lang="en-US" sz="2100" dirty="0"/>
+          </a:p>
+        </p:txBody>
       </p:sp>
       <p:sp>
         <p:nvSpPr>
@@ -4724,8 +4049,8 @@
         </p:nvSpPr>
         <p:spPr>
           <a:xfrm>
-            <a:off x="4562856" y="2157984"/>
-            <a:ext cx="3035808" cy="365760"/>
+            <a:off x="914400" y="3182112"/>
+            <a:ext cx="2895600" cy="868680"/>
           </a:xfrm>
           <a:prstGeom prst="rect">
             <a:avLst/>
@@ -4735,326 +4060,6 @@
         </p:spPr>
         <p:txBody>
           <a:bodyPr wrap="square" lIns="0" tIns="0" rIns="0" bIns="0" rtlCol="0" anchor="t"/>
-          <a:lstStyle/>
-          <a:p>
-            <a:pPr indent="0" marL="0">
-              <a:buNone/>
-            </a:pPr>
-            <a:r>
-              <a:rPr lang="en-US" sz="1500" b="1" spc="200" kern="0" dirty="0">
-                <a:solidFill>
-                  <a:srgbClr val="8FA8C2"/>
-                </a:solidFill>
-                <a:latin typeface="Calibri" pitchFamily="34" charset="0"/>
-                <a:ea typeface="Calibri" pitchFamily="34" charset="-122"/>
-                <a:cs typeface="Calibri" pitchFamily="34" charset="-120"/>
-              </a:rPr>
-              <a:t>ПРОВЕРЕНО</a:t>
-            </a:r>
-            <a:endParaRPr lang="en-US" sz="1500" dirty="0"/>
-          </a:p>
-        </p:txBody>
-      </p:sp>
-      <p:sp>
-        <p:nvSpPr>
-          <p:cNvPr id="8" name="Text 6"/>
-          <p:cNvSpPr txBox="1"/>
-          <p:nvPr/>
-        </p:nvSpPr>
-        <p:spPr>
-          <a:xfrm>
-            <a:off x="4562856" y="2596896"/>
-            <a:ext cx="3035808" cy="1600200"/>
-          </a:xfrm>
-          <a:prstGeom prst="rect">
-            <a:avLst/>
-          </a:prstGeom>
-          <a:noFill/>
-          <a:ln/>
-        </p:spPr>
-        <p:txBody>
-          <a:bodyPr wrap="square" lIns="0" tIns="0" rIns="0" bIns="0" rtlCol="0" anchor="t"/>
-          <a:lstStyle/>
-          <a:p>
-            <a:pPr marL="342900" indent="-342900">
-              <a:lnSpc>
-                <a:spcPct val="115000"/>
-              </a:lnSpc>
-              <a:spcAft>
-                <a:spcPts val="700"/>
-              </a:spcAft>
-              <a:buSzPct val="100000"/>
-              <a:buChar char="•"/>
-            </a:pPr>
-            <a:r>
-              <a:rPr lang="en-US" sz="1800" dirty="0">
-                <a:solidFill>
-                  <a:srgbClr val="D6DFEC"/>
-                </a:solidFill>
-                <a:latin typeface="Calibri" pitchFamily="34" charset="0"/>
-                <a:ea typeface="Calibri" pitchFamily="34" charset="-122"/>
-                <a:cs typeface="Calibri" pitchFamily="34" charset="-120"/>
-              </a:rPr>
-              <a:t>все замечания с цитатой</a:t>
-            </a:r>
-            <a:endParaRPr lang="en-US" sz="1800" dirty="0"/>
-          </a:p>
-          <a:p>
-            <a:pPr marL="342900" indent="-342900">
-              <a:lnSpc>
-                <a:spcPct val="115000"/>
-              </a:lnSpc>
-              <a:spcAft>
-                <a:spcPts val="700"/>
-              </a:spcAft>
-              <a:buSzPct val="100000"/>
-              <a:buChar char="•"/>
-            </a:pPr>
-            <a:r>
-              <a:rPr lang="en-US" sz="1800" dirty="0">
-                <a:solidFill>
-                  <a:srgbClr val="D6DFEC"/>
-                </a:solidFill>
-                <a:latin typeface="Calibri" pitchFamily="34" charset="0"/>
-                <a:ea typeface="Calibri" pitchFamily="34" charset="-122"/>
-                <a:cs typeface="Calibri" pitchFamily="34" charset="-120"/>
-              </a:rPr>
-              <a:t>смена провайдера без правок</a:t>
-            </a:r>
-            <a:endParaRPr lang="en-US" sz="1800" dirty="0"/>
-          </a:p>
-          <a:p>
-            <a:pPr marL="342900" indent="-342900">
-              <a:lnSpc>
-                <a:spcPct val="115000"/>
-              </a:lnSpc>
-              <a:spcAft>
-                <a:spcPts val="700"/>
-              </a:spcAft>
-              <a:buSzPct val="100000"/>
-              <a:buChar char="•"/>
-            </a:pPr>
-            <a:r>
-              <a:rPr lang="en-US" sz="1800" dirty="0">
-                <a:solidFill>
-                  <a:srgbClr val="D6DFEC"/>
-                </a:solidFill>
-                <a:latin typeface="Calibri" pitchFamily="34" charset="0"/>
-                <a:ea typeface="Calibri" pitchFamily="34" charset="-122"/>
-                <a:cs typeface="Calibri" pitchFamily="34" charset="-120"/>
-              </a:rPr>
-              <a:t>офлайн-режим как страховка</a:t>
-            </a:r>
-            <a:endParaRPr lang="en-US" sz="1800" dirty="0"/>
-          </a:p>
-        </p:txBody>
-      </p:sp>
-      <p:sp>
-        <p:nvSpPr>
-          <p:cNvPr id="9" name="Shape 7"/>
-          <p:cNvSpPr/>
-          <p:nvPr/>
-        </p:nvSpPr>
-        <p:spPr>
-          <a:xfrm>
-            <a:off x="8101584" y="1965960"/>
-            <a:ext cx="3493008" cy="2377440"/>
-          </a:xfrm>
-          <a:prstGeom prst="roundRect">
-            <a:avLst>
-              <a:gd name="adj" fmla="val 4615"/>
-            </a:avLst>
-          </a:prstGeom>
-          <a:solidFill>
-            <a:srgbClr val="1E3252"/>
-          </a:solidFill>
-          <a:ln w="12700">
-            <a:solidFill>
-              <a:srgbClr val="D98324"/>
-            </a:solidFill>
-            <a:prstDash val="solid"/>
-          </a:ln>
-        </p:spPr>
-      </p:sp>
-      <p:sp>
-        <p:nvSpPr>
-          <p:cNvPr id="10" name="Text 8"/>
-          <p:cNvSpPr txBox="1"/>
-          <p:nvPr/>
-        </p:nvSpPr>
-        <p:spPr>
-          <a:xfrm>
-            <a:off x="8330184" y="2157984"/>
-            <a:ext cx="3035808" cy="365760"/>
-          </a:xfrm>
-          <a:prstGeom prst="rect">
-            <a:avLst/>
-          </a:prstGeom>
-          <a:noFill/>
-          <a:ln/>
-        </p:spPr>
-        <p:txBody>
-          <a:bodyPr wrap="square" lIns="0" tIns="0" rIns="0" bIns="0" rtlCol="0" anchor="t"/>
-          <a:lstStyle/>
-          <a:p>
-            <a:pPr indent="0" marL="0">
-              <a:buNone/>
-            </a:pPr>
-            <a:r>
-              <a:rPr lang="en-US" sz="1500" b="1" spc="200" kern="0" dirty="0">
-                <a:solidFill>
-                  <a:srgbClr val="D98324"/>
-                </a:solidFill>
-                <a:latin typeface="Calibri" pitchFamily="34" charset="0"/>
-                <a:ea typeface="Calibri" pitchFamily="34" charset="-122"/>
-                <a:cs typeface="Calibri" pitchFamily="34" charset="-120"/>
-              </a:rPr>
-              <a:t>СЛЕДУЮЩИЙ ШАГ</a:t>
-            </a:r>
-            <a:endParaRPr lang="en-US" sz="1500" dirty="0"/>
-          </a:p>
-        </p:txBody>
-      </p:sp>
-      <p:sp>
-        <p:nvSpPr>
-          <p:cNvPr id="11" name="Text 9"/>
-          <p:cNvSpPr txBox="1"/>
-          <p:nvPr/>
-        </p:nvSpPr>
-        <p:spPr>
-          <a:xfrm>
-            <a:off x="8330184" y="2596896"/>
-            <a:ext cx="3035808" cy="1600200"/>
-          </a:xfrm>
-          <a:prstGeom prst="rect">
-            <a:avLst/>
-          </a:prstGeom>
-          <a:noFill/>
-          <a:ln/>
-        </p:spPr>
-        <p:txBody>
-          <a:bodyPr wrap="square" lIns="0" tIns="0" rIns="0" bIns="0" rtlCol="0" anchor="t"/>
-          <a:lstStyle/>
-          <a:p>
-            <a:pPr marL="342900" indent="-342900">
-              <a:lnSpc>
-                <a:spcPct val="115000"/>
-              </a:lnSpc>
-              <a:spcAft>
-                <a:spcPts val="700"/>
-              </a:spcAft>
-              <a:buSzPct val="100000"/>
-              <a:buChar char="•"/>
-            </a:pPr>
-            <a:r>
-              <a:rPr lang="en-US" sz="1800" dirty="0">
-                <a:solidFill>
-                  <a:srgbClr val="D6DFEC"/>
-                </a:solidFill>
-                <a:latin typeface="Calibri" pitchFamily="34" charset="0"/>
-                <a:ea typeface="Calibri" pitchFamily="34" charset="-122"/>
-                <a:cs typeface="Calibri" pitchFamily="34" charset="-120"/>
-              </a:rPr>
-              <a:t>10–15 реальных ТЗ от NET</a:t>
-            </a:r>
-            <a:endParaRPr lang="en-US" sz="1800" dirty="0"/>
-          </a:p>
-          <a:p>
-            <a:pPr marL="342900" indent="-342900">
-              <a:lnSpc>
-                <a:spcPct val="115000"/>
-              </a:lnSpc>
-              <a:spcAft>
-                <a:spcPts val="700"/>
-              </a:spcAft>
-              <a:buSzPct val="100000"/>
-              <a:buChar char="•"/>
-            </a:pPr>
-            <a:r>
-              <a:rPr lang="en-US" sz="1800" dirty="0">
-                <a:solidFill>
-                  <a:srgbClr val="D6DFEC"/>
-                </a:solidFill>
-                <a:latin typeface="Calibri" pitchFamily="34" charset="0"/>
-                <a:ea typeface="Calibri" pitchFamily="34" charset="-122"/>
-                <a:cs typeface="Calibri" pitchFamily="34" charset="-120"/>
-              </a:rPr>
-              <a:t>измерить precision</a:t>
-            </a:r>
-            <a:endParaRPr lang="en-US" sz="1800" dirty="0"/>
-          </a:p>
-          <a:p>
-            <a:pPr marL="342900" indent="-342900">
-              <a:lnSpc>
-                <a:spcPct val="115000"/>
-              </a:lnSpc>
-              <a:spcAft>
-                <a:spcPts val="700"/>
-              </a:spcAft>
-              <a:buSzPct val="100000"/>
-              <a:buChar char="•"/>
-            </a:pPr>
-            <a:r>
-              <a:rPr lang="en-US" sz="1800" dirty="0">
-                <a:solidFill>
-                  <a:srgbClr val="D6DFEC"/>
-                </a:solidFill>
-                <a:latin typeface="Calibri" pitchFamily="34" charset="0"/>
-                <a:ea typeface="Calibri" pitchFamily="34" charset="-122"/>
-                <a:cs typeface="Calibri" pitchFamily="34" charset="-120"/>
-              </a:rPr>
-              <a:t>тест с 2–3 аналитиками</a:t>
-            </a:r>
-            <a:endParaRPr lang="en-US" sz="1800" dirty="0"/>
-          </a:p>
-        </p:txBody>
-      </p:sp>
-      <p:sp>
-        <p:nvSpPr>
-          <p:cNvPr id="12" name="Shape 10"/>
-          <p:cNvSpPr/>
-          <p:nvPr/>
-        </p:nvSpPr>
-        <p:spPr>
-          <a:xfrm>
-            <a:off x="566928" y="4617720"/>
-            <a:ext cx="11027664" cy="1463040"/>
-          </a:xfrm>
-          <a:prstGeom prst="roundRect">
-            <a:avLst>
-              <a:gd name="adj" fmla="val 7500"/>
-            </a:avLst>
-          </a:prstGeom>
-          <a:solidFill>
-            <a:srgbClr val="20385C"/>
-          </a:solidFill>
-          <a:ln w="19050">
-            <a:solidFill>
-              <a:srgbClr val="D98324"/>
-            </a:solidFill>
-            <a:prstDash val="solid"/>
-          </a:ln>
-        </p:spPr>
-      </p:sp>
-      <p:sp>
-        <p:nvSpPr>
-          <p:cNvPr id="13" name="Text 11"/>
-          <p:cNvSpPr txBox="1"/>
-          <p:nvPr/>
-        </p:nvSpPr>
-        <p:spPr>
-          <a:xfrm>
-            <a:off x="932688" y="4617720"/>
-            <a:ext cx="10296144" cy="1463040"/>
-          </a:xfrm>
-          <a:prstGeom prst="rect">
-            <a:avLst/>
-          </a:prstGeom>
-          <a:noFill/>
-          <a:ln/>
-        </p:spPr>
-        <p:txBody>
-          <a:bodyPr wrap="square" lIns="0" tIns="0" rIns="0" bIns="0" rtlCol="0" anchor="ctr"/>
           <a:lstStyle/>
           <a:p>
             <a:pPr indent="0" marL="0">
@@ -5064,17 +4069,1107 @@
               <a:buNone/>
             </a:pPr>
             <a:r>
+              <a:rPr lang="en-US" sz="1700" dirty="0">
+                <a:solidFill>
+                  <a:srgbClr val="5A6678"/>
+                </a:solidFill>
+                <a:latin typeface="Calibri" pitchFamily="34" charset="0"/>
+                <a:ea typeface="Calibri" pitchFamily="34" charset="-122"/>
+                <a:cs typeface="Calibri" pitchFamily="34" charset="-120"/>
+              </a:rPr>
+              <a:t>Word и Markdown →</a:t>
+            </a:r>
+            <a:endParaRPr lang="en-US" sz="1700" dirty="0"/>
+          </a:p>
+          <a:p>
+            <a:pPr indent="0" marL="0">
+              <a:lnSpc>
+                <a:spcPct val="120000"/>
+              </a:lnSpc>
+              <a:buNone/>
+            </a:pPr>
+            <a:r>
+              <a:rPr lang="en-US" sz="1700" dirty="0">
+                <a:solidFill>
+                  <a:srgbClr val="5A6678"/>
+                </a:solidFill>
+                <a:latin typeface="Calibri" pitchFamily="34" charset="0"/>
+                <a:ea typeface="Calibri" pitchFamily="34" charset="-122"/>
+                <a:cs typeface="Calibri" pitchFamily="34" charset="-120"/>
+              </a:rPr>
+              <a:t>разделы и таблицы</a:t>
+            </a:r>
+            <a:endParaRPr lang="en-US" sz="1700" dirty="0"/>
+          </a:p>
+        </p:txBody>
+      </p:sp>
+      <p:sp>
+        <p:nvSpPr>
+          <p:cNvPr id="8" name="Shape 6"/>
+          <p:cNvSpPr/>
+          <p:nvPr/>
+        </p:nvSpPr>
+        <p:spPr>
+          <a:xfrm>
+            <a:off x="4376928" y="2103120"/>
+            <a:ext cx="3407664" cy="2148840"/>
+          </a:xfrm>
+          <a:prstGeom prst="roundRect">
+            <a:avLst>
+              <a:gd name="adj" fmla="val 4255"/>
+            </a:avLst>
+          </a:prstGeom>
+          <a:solidFill>
+            <a:srgbClr val="F4F7FA"/>
+          </a:solidFill>
+          <a:ln w="12700">
+            <a:solidFill>
+              <a:srgbClr val="E2E8F0"/>
+            </a:solidFill>
+            <a:prstDash val="solid"/>
+          </a:ln>
+        </p:spPr>
+      </p:sp>
+      <p:sp>
+        <p:nvSpPr>
+          <p:cNvPr id="9" name="Text 7"/>
+          <p:cNvSpPr txBox="1"/>
+          <p:nvPr/>
+        </p:nvSpPr>
+        <p:spPr>
+          <a:xfrm>
+            <a:off x="4632960" y="2304288"/>
+            <a:ext cx="2895600" cy="384048"/>
+          </a:xfrm>
+          <a:prstGeom prst="rect">
+            <a:avLst/>
+          </a:prstGeom>
+          <a:noFill/>
+          <a:ln/>
+        </p:spPr>
+        <p:txBody>
+          <a:bodyPr wrap="square" lIns="0" tIns="0" rIns="0" bIns="0" rtlCol="0" anchor="t"/>
+          <a:lstStyle/>
+          <a:p>
+            <a:pPr indent="0" marL="0">
+              <a:buNone/>
+            </a:pPr>
+            <a:r>
               <a:rPr lang="en-US" sz="2200" b="1" dirty="0">
                 <a:solidFill>
+                  <a:srgbClr val="B9C4D2"/>
+                </a:solidFill>
+                <a:latin typeface="Cambria" pitchFamily="34" charset="0"/>
+                <a:ea typeface="Cambria" pitchFamily="34" charset="-122"/>
+                <a:cs typeface="Cambria" pitchFamily="34" charset="-120"/>
+              </a:rPr>
+              <a:t>02</a:t>
+            </a:r>
+            <a:endParaRPr lang="en-US" sz="2200" dirty="0"/>
+          </a:p>
+        </p:txBody>
+      </p:sp>
+      <p:sp>
+        <p:nvSpPr>
+          <p:cNvPr id="10" name="Text 8"/>
+          <p:cNvSpPr txBox="1"/>
+          <p:nvPr/>
+        </p:nvSpPr>
+        <p:spPr>
+          <a:xfrm>
+            <a:off x="4632960" y="2743200"/>
+            <a:ext cx="2895600" cy="365760"/>
+          </a:xfrm>
+          <a:prstGeom prst="rect">
+            <a:avLst/>
+          </a:prstGeom>
+          <a:noFill/>
+          <a:ln/>
+        </p:spPr>
+        <p:txBody>
+          <a:bodyPr wrap="square" lIns="0" tIns="0" rIns="0" bIns="0" rtlCol="0" anchor="t"/>
+          <a:lstStyle/>
+          <a:p>
+            <a:pPr indent="0" marL="0">
+              <a:buNone/>
+            </a:pPr>
+            <a:r>
+              <a:rPr lang="en-US" sz="2100" b="1" dirty="0">
+                <a:solidFill>
+                  <a:srgbClr val="0E1B2E"/>
+                </a:solidFill>
+                <a:latin typeface="Calibri" pitchFamily="34" charset="0"/>
+                <a:ea typeface="Calibri" pitchFamily="34" charset="-122"/>
+                <a:cs typeface="Calibri" pitchFamily="34" charset="-120"/>
+              </a:rPr>
+              <a:t>Критерии МТС</a:t>
+            </a:r>
+            <a:endParaRPr lang="en-US" sz="2100" dirty="0"/>
+          </a:p>
+        </p:txBody>
+      </p:sp>
+      <p:sp>
+        <p:nvSpPr>
+          <p:cNvPr id="11" name="Text 9"/>
+          <p:cNvSpPr txBox="1"/>
+          <p:nvPr/>
+        </p:nvSpPr>
+        <p:spPr>
+          <a:xfrm>
+            <a:off x="4632960" y="3182112"/>
+            <a:ext cx="2895600" cy="868680"/>
+          </a:xfrm>
+          <a:prstGeom prst="rect">
+            <a:avLst/>
+          </a:prstGeom>
+          <a:noFill/>
+          <a:ln/>
+        </p:spPr>
+        <p:txBody>
+          <a:bodyPr wrap="square" lIns="0" tIns="0" rIns="0" bIns="0" rtlCol="0" anchor="t"/>
+          <a:lstStyle/>
+          <a:p>
+            <a:pPr indent="0" marL="0">
+              <a:lnSpc>
+                <a:spcPct val="120000"/>
+              </a:lnSpc>
+              <a:buNone/>
+            </a:pPr>
+            <a:r>
+              <a:rPr lang="en-US" sz="1700" dirty="0">
+                <a:solidFill>
+                  <a:srgbClr val="5A6678"/>
+                </a:solidFill>
+                <a:latin typeface="Calibri" pitchFamily="34" charset="0"/>
+                <a:ea typeface="Calibri" pitchFamily="34" charset="-122"/>
+                <a:cs typeface="Calibri" pitchFamily="34" charset="-120"/>
+              </a:rPr>
+              <a:t>21 раздел шаблона +</a:t>
+            </a:r>
+            <a:endParaRPr lang="en-US" sz="1700" dirty="0"/>
+          </a:p>
+          <a:p>
+            <a:pPr indent="0" marL="0">
+              <a:lnSpc>
+                <a:spcPct val="120000"/>
+              </a:lnSpc>
+              <a:buNone/>
+            </a:pPr>
+            <a:r>
+              <a:rPr lang="en-US" sz="1700" dirty="0">
+                <a:solidFill>
+                  <a:srgbClr val="5A6678"/>
+                </a:solidFill>
+                <a:latin typeface="Calibri" pitchFamily="34" charset="0"/>
+                <a:ea typeface="Calibri" pitchFamily="34" charset="-122"/>
+                <a:cs typeface="Calibri" pitchFamily="34" charset="-120"/>
+              </a:rPr>
+              <a:t>8 требований кейса</a:t>
+            </a:r>
+            <a:endParaRPr lang="en-US" sz="1700" dirty="0"/>
+          </a:p>
+        </p:txBody>
+      </p:sp>
+      <p:sp>
+        <p:nvSpPr>
+          <p:cNvPr id="12" name="Shape 10"/>
+          <p:cNvSpPr/>
+          <p:nvPr/>
+        </p:nvSpPr>
+        <p:spPr>
+          <a:xfrm>
+            <a:off x="8095488" y="2103120"/>
+            <a:ext cx="3407664" cy="2148840"/>
+          </a:xfrm>
+          <a:prstGeom prst="roundRect">
+            <a:avLst>
+              <a:gd name="adj" fmla="val 4255"/>
+            </a:avLst>
+          </a:prstGeom>
+          <a:solidFill>
+            <a:srgbClr val="FBF3E4"/>
+          </a:solidFill>
+          <a:ln w="19050">
+            <a:solidFill>
+              <a:srgbClr val="C8791A"/>
+            </a:solidFill>
+            <a:prstDash val="solid"/>
+          </a:ln>
+        </p:spPr>
+      </p:sp>
+      <p:sp>
+        <p:nvSpPr>
+          <p:cNvPr id="13" name="Text 11"/>
+          <p:cNvSpPr txBox="1"/>
+          <p:nvPr/>
+        </p:nvSpPr>
+        <p:spPr>
+          <a:xfrm>
+            <a:off x="8351520" y="2304288"/>
+            <a:ext cx="2895600" cy="384048"/>
+          </a:xfrm>
+          <a:prstGeom prst="rect">
+            <a:avLst/>
+          </a:prstGeom>
+          <a:noFill/>
+          <a:ln/>
+        </p:spPr>
+        <p:txBody>
+          <a:bodyPr wrap="square" lIns="0" tIns="0" rIns="0" bIns="0" rtlCol="0" anchor="t"/>
+          <a:lstStyle/>
+          <a:p>
+            <a:pPr indent="0" marL="0">
+              <a:buNone/>
+            </a:pPr>
+            <a:r>
+              <a:rPr lang="en-US" sz="2200" b="1" dirty="0">
+                <a:solidFill>
+                  <a:srgbClr val="C8791A"/>
+                </a:solidFill>
+                <a:latin typeface="Cambria" pitchFamily="34" charset="0"/>
+                <a:ea typeface="Cambria" pitchFamily="34" charset="-122"/>
+                <a:cs typeface="Cambria" pitchFamily="34" charset="-120"/>
+              </a:rPr>
+              <a:t>03</a:t>
+            </a:r>
+            <a:endParaRPr lang="en-US" sz="2200" dirty="0"/>
+          </a:p>
+        </p:txBody>
+      </p:sp>
+      <p:sp>
+        <p:nvSpPr>
+          <p:cNvPr id="14" name="Text 12"/>
+          <p:cNvSpPr txBox="1"/>
+          <p:nvPr/>
+        </p:nvSpPr>
+        <p:spPr>
+          <a:xfrm>
+            <a:off x="8351520" y="2743200"/>
+            <a:ext cx="2895600" cy="365760"/>
+          </a:xfrm>
+          <a:prstGeom prst="rect">
+            <a:avLst/>
+          </a:prstGeom>
+          <a:noFill/>
+          <a:ln/>
+        </p:spPr>
+        <p:txBody>
+          <a:bodyPr wrap="square" lIns="0" tIns="0" rIns="0" bIns="0" rtlCol="0" anchor="t"/>
+          <a:lstStyle/>
+          <a:p>
+            <a:pPr indent="0" marL="0">
+              <a:buNone/>
+            </a:pPr>
+            <a:r>
+              <a:rPr lang="en-US" sz="2100" b="1" dirty="0">
+                <a:solidFill>
+                  <a:srgbClr val="0E1B2E"/>
+                </a:solidFill>
+                <a:latin typeface="Calibri" pitchFamily="34" charset="0"/>
+                <a:ea typeface="Calibri" pitchFamily="34" charset="-122"/>
+                <a:cs typeface="Calibri" pitchFamily="34" charset="-120"/>
+              </a:rPr>
+              <a:t>LLM-ревью</a:t>
+            </a:r>
+            <a:endParaRPr lang="en-US" sz="2100" dirty="0"/>
+          </a:p>
+        </p:txBody>
+      </p:sp>
+      <p:sp>
+        <p:nvSpPr>
+          <p:cNvPr id="15" name="Text 13"/>
+          <p:cNvSpPr txBox="1"/>
+          <p:nvPr/>
+        </p:nvSpPr>
+        <p:spPr>
+          <a:xfrm>
+            <a:off x="8351520" y="3182112"/>
+            <a:ext cx="2895600" cy="868680"/>
+          </a:xfrm>
+          <a:prstGeom prst="rect">
+            <a:avLst/>
+          </a:prstGeom>
+          <a:noFill/>
+          <a:ln/>
+        </p:spPr>
+        <p:txBody>
+          <a:bodyPr wrap="square" lIns="0" tIns="0" rIns="0" bIns="0" rtlCol="0" anchor="t"/>
+          <a:lstStyle/>
+          <a:p>
+            <a:pPr indent="0" marL="0">
+              <a:lnSpc>
+                <a:spcPct val="120000"/>
+              </a:lnSpc>
+              <a:buNone/>
+            </a:pPr>
+            <a:r>
+              <a:rPr lang="en-US" sz="1700" dirty="0">
+                <a:solidFill>
+                  <a:srgbClr val="5A6678"/>
+                </a:solidFill>
+                <a:latin typeface="Calibri" pitchFamily="34" charset="0"/>
+                <a:ea typeface="Calibri" pitchFamily="34" charset="-122"/>
+                <a:cs typeface="Calibri" pitchFamily="34" charset="-120"/>
+              </a:rPr>
+              <a:t>23 категории,</a:t>
+            </a:r>
+            <a:endParaRPr lang="en-US" sz="1700" dirty="0"/>
+          </a:p>
+          <a:p>
+            <a:pPr indent="0" marL="0">
+              <a:lnSpc>
+                <a:spcPct val="120000"/>
+              </a:lnSpc>
+              <a:buNone/>
+            </a:pPr>
+            <a:r>
+              <a:rPr lang="en-US" sz="1700" dirty="0">
+                <a:solidFill>
+                  <a:srgbClr val="5A6678"/>
+                </a:solidFill>
+                <a:latin typeface="Calibri" pitchFamily="34" charset="0"/>
+                <a:ea typeface="Calibri" pitchFamily="34" charset="-122"/>
+                <a:cs typeface="Calibri" pitchFamily="34" charset="-120"/>
+              </a:rPr>
+              <a:t>обязательная цитата</a:t>
+            </a:r>
+            <a:endParaRPr lang="en-US" sz="1700" dirty="0"/>
+          </a:p>
+        </p:txBody>
+      </p:sp>
+      <p:sp>
+        <p:nvSpPr>
+          <p:cNvPr id="16" name="Text 14"/>
+          <p:cNvSpPr txBox="1"/>
+          <p:nvPr/>
+        </p:nvSpPr>
+        <p:spPr>
+          <a:xfrm>
+            <a:off x="658368" y="4800600"/>
+            <a:ext cx="10844784" cy="777240"/>
+          </a:xfrm>
+          <a:prstGeom prst="rect">
+            <a:avLst/>
+          </a:prstGeom>
+          <a:noFill/>
+          <a:ln/>
+        </p:spPr>
+        <p:txBody>
+          <a:bodyPr wrap="square" lIns="0" tIns="0" rIns="0" bIns="0" rtlCol="0" anchor="t"/>
+          <a:lstStyle/>
+          <a:p>
+            <a:pPr indent="0" marL="0">
+              <a:lnSpc>
+                <a:spcPct val="120000"/>
+              </a:lnSpc>
+              <a:buNone/>
+            </a:pPr>
+            <a:r>
+              <a:rPr lang="en-US" sz="2400" dirty="0">
+                <a:solidFill>
+                  <a:srgbClr val="1B2E4A"/>
+                </a:solidFill>
+                <a:latin typeface="Calibri" pitchFamily="34" charset="0"/>
+                <a:ea typeface="Calibri" pitchFamily="34" charset="-122"/>
+                <a:cs typeface="Calibri" pitchFamily="34" charset="-120"/>
+              </a:rPr>
+              <a:t>Структуру и критерии проверяет код. Без доступа к модели инструмент продолжает работать.</a:t>
+            </a:r>
+            <a:endParaRPr lang="en-US" sz="2400" dirty="0"/>
+          </a:p>
+        </p:txBody>
+      </p:sp>
+      <p:sp>
+        <p:nvSpPr>
+          <p:cNvPr id="17" name="Text 15"/>
+          <p:cNvSpPr txBox="1"/>
+          <p:nvPr/>
+        </p:nvSpPr>
+        <p:spPr>
+          <a:xfrm>
+            <a:off x="10954512" y="548640"/>
+            <a:ext cx="548640" cy="292608"/>
+          </a:xfrm>
+          <a:prstGeom prst="rect">
+            <a:avLst/>
+          </a:prstGeom>
+          <a:noFill/>
+          <a:ln/>
+        </p:spPr>
+        <p:txBody>
+          <a:bodyPr wrap="square" lIns="0" tIns="0" rIns="0" bIns="0" rtlCol="0" anchor="t"/>
+          <a:lstStyle/>
+          <a:p>
+            <a:pPr algn="r" indent="0" marL="0">
+              <a:buNone/>
+            </a:pPr>
+            <a:r>
+              <a:rPr lang="en-US" sz="1200" spc="100" kern="0" dirty="0">
+                <a:solidFill>
+                  <a:srgbClr val="C3CDD9"/>
+                </a:solidFill>
+                <a:latin typeface="Calibri" pitchFamily="34" charset="0"/>
+                <a:ea typeface="Calibri" pitchFamily="34" charset="-122"/>
+                <a:cs typeface="Calibri" pitchFamily="34" charset="-120"/>
+              </a:rPr>
+              <a:t>07</a:t>
+            </a:r>
+            <a:endParaRPr lang="en-US" sz="1200" dirty="0"/>
+          </a:p>
+        </p:txBody>
+      </p:sp>
+    </p:spTree>
+  </p:cSld>
+  <p:clrMapOvr>
+    <a:masterClrMapping/>
+  </p:clrMapOvr>
+</p:sld>
+</file>
+
+<file path=ppt/slides/slide8.xml><?xml version="1.0" encoding="utf-8"?>
+<p:sld xmlns:a="http://schemas.openxmlformats.org/drawingml/2006/main" xmlns:r="http://schemas.openxmlformats.org/officeDocument/2006/relationships" xmlns:p="http://schemas.openxmlformats.org/presentationml/2006/main">
+  <p:cSld name="Slide 8">
+    <p:bg>
+      <p:bgPr>
+        <a:solidFill>
+          <a:srgbClr val="0E1B2E"/>
+        </a:solidFill>
+      </p:bgPr>
+    </p:bg>
+    <p:spTree>
+      <p:nvGrpSpPr>
+        <p:cNvPr id="1" name=""/>
+        <p:cNvGrpSpPr/>
+        <p:nvPr/>
+      </p:nvGrpSpPr>
+      <p:grpSpPr>
+        <a:xfrm>
+          <a:off x="0" y="0"/>
+          <a:ext cx="0" cy="0"/>
+          <a:chOff x="0" y="0"/>
+          <a:chExt cx="0" cy="0"/>
+        </a:xfrm>
+      </p:grpSpPr>
+      <p:sp>
+        <p:nvSpPr>
+          <p:cNvPr id="2" name="Text 0"/>
+          <p:cNvSpPr txBox="1"/>
+          <p:nvPr/>
+        </p:nvSpPr>
+        <p:spPr>
+          <a:xfrm>
+            <a:off x="658368" y="566928"/>
+            <a:ext cx="10844784" cy="274320"/>
+          </a:xfrm>
+          <a:prstGeom prst="rect">
+            <a:avLst/>
+          </a:prstGeom>
+          <a:noFill/>
+          <a:ln/>
+        </p:spPr>
+        <p:txBody>
+          <a:bodyPr wrap="square" lIns="0" tIns="0" rIns="0" bIns="0" rtlCol="0" anchor="t"/>
+          <a:lstStyle/>
+          <a:p>
+            <a:pPr indent="0" marL="0">
+              <a:buNone/>
+            </a:pPr>
+            <a:r>
+              <a:rPr lang="en-US" sz="1150" b="1" spc="400" kern="0" dirty="0">
+                <a:solidFill>
+                  <a:srgbClr val="C9A227"/>
+                </a:solidFill>
+                <a:latin typeface="Calibri" pitchFamily="34" charset="0"/>
+                <a:ea typeface="Calibri" pitchFamily="34" charset="-122"/>
+                <a:cs typeface="Calibri" pitchFamily="34" charset="-120"/>
+              </a:rPr>
+              <a:t>ГОТОВНОСТЬ</a:t>
+            </a:r>
+            <a:endParaRPr lang="en-US" sz="1150" dirty="0"/>
+          </a:p>
+        </p:txBody>
+      </p:sp>
+      <p:sp>
+        <p:nvSpPr>
+          <p:cNvPr id="3" name="Text 1"/>
+          <p:cNvSpPr txBox="1"/>
+          <p:nvPr/>
+        </p:nvSpPr>
+        <p:spPr>
+          <a:xfrm>
+            <a:off x="658368" y="914400"/>
+            <a:ext cx="10844784" cy="914400"/>
+          </a:xfrm>
+          <a:prstGeom prst="rect">
+            <a:avLst/>
+          </a:prstGeom>
+          <a:noFill/>
+          <a:ln/>
+        </p:spPr>
+        <p:txBody>
+          <a:bodyPr wrap="square" lIns="0" tIns="0" rIns="0" bIns="0" rtlCol="0" anchor="t">
+            <a:normAutofit/>
+          </a:bodyPr>
+          <a:lstStyle/>
+          <a:p>
+            <a:pPr indent="0" marL="0">
+              <a:lnSpc>
+                <a:spcPct val="106000"/>
+              </a:lnSpc>
+              <a:buNone/>
+            </a:pPr>
+            <a:r>
+              <a:rPr lang="en-US" sz="3200" b="1" dirty="0">
+                <a:solidFill>
                   <a:srgbClr val="FFFFFF"/>
                 </a:solidFill>
-                <a:latin typeface="Calibri" pitchFamily="34" charset="0"/>
-                <a:ea typeface="Calibri" pitchFamily="34" charset="-122"/>
-                <a:cs typeface="Calibri" pitchFamily="34" charset="-120"/>
-              </a:rPr>
-              <a:t>ТЗ-Ревьюер уже находит в реальных ТЗ противоречия, которые люди пропускают при чтении. Чтобы измерить эффект, нам нужны реальные правки разработчиков NET — и мы готовы к пилоту.</a:t>
+                <a:latin typeface="Cambria" pitchFamily="34" charset="0"/>
+                <a:ea typeface="Cambria" pitchFamily="34" charset="-122"/>
+                <a:cs typeface="Cambria" pitchFamily="34" charset="-120"/>
+              </a:rPr>
+              <a:t>Прототип работает — следующий шаг пилот</a:t>
+            </a:r>
+            <a:endParaRPr lang="en-US" sz="3200" dirty="0"/>
+          </a:p>
+        </p:txBody>
+      </p:sp>
+      <p:sp>
+        <p:nvSpPr>
+          <p:cNvPr id="4" name="Shape 2"/>
+          <p:cNvSpPr/>
+          <p:nvPr/>
+        </p:nvSpPr>
+        <p:spPr>
+          <a:xfrm>
+            <a:off x="658368" y="2057400"/>
+            <a:ext cx="3407664" cy="2103120"/>
+          </a:xfrm>
+          <a:prstGeom prst="roundRect">
+            <a:avLst>
+              <a:gd name="adj" fmla="val 4348"/>
+            </a:avLst>
+          </a:prstGeom>
+          <a:solidFill>
+            <a:srgbClr val="1B2E4A"/>
+          </a:solidFill>
+          <a:ln w="12700">
+            <a:solidFill>
+              <a:srgbClr val="27405F"/>
+            </a:solidFill>
+            <a:prstDash val="solid"/>
+          </a:ln>
+        </p:spPr>
+      </p:sp>
+      <p:sp>
+        <p:nvSpPr>
+          <p:cNvPr id="5" name="Text 3"/>
+          <p:cNvSpPr txBox="1"/>
+          <p:nvPr/>
+        </p:nvSpPr>
+        <p:spPr>
+          <a:xfrm>
+            <a:off x="914400" y="2267712"/>
+            <a:ext cx="2895600" cy="320040"/>
+          </a:xfrm>
+          <a:prstGeom prst="rect">
+            <a:avLst/>
+          </a:prstGeom>
+          <a:noFill/>
+          <a:ln/>
+        </p:spPr>
+        <p:txBody>
+          <a:bodyPr wrap="square" lIns="0" tIns="0" rIns="0" bIns="0" rtlCol="0" anchor="t"/>
+          <a:lstStyle/>
+          <a:p>
+            <a:pPr indent="0" marL="0">
+              <a:buNone/>
+            </a:pPr>
+            <a:r>
+              <a:rPr lang="en-US" sz="1250" b="1" spc="250" kern="0" dirty="0">
+                <a:solidFill>
+                  <a:srgbClr val="2E7D5B"/>
+                </a:solidFill>
+                <a:latin typeface="Calibri" pitchFamily="34" charset="0"/>
+                <a:ea typeface="Calibri" pitchFamily="34" charset="-122"/>
+                <a:cs typeface="Calibri" pitchFamily="34" charset="-120"/>
+              </a:rPr>
+              <a:t>ИЗМЕРЕНО</a:t>
+            </a:r>
+            <a:endParaRPr lang="en-US" sz="1250" dirty="0"/>
+          </a:p>
+        </p:txBody>
+      </p:sp>
+      <p:sp>
+        <p:nvSpPr>
+          <p:cNvPr id="6" name="Text 4"/>
+          <p:cNvSpPr txBox="1"/>
+          <p:nvPr/>
+        </p:nvSpPr>
+        <p:spPr>
+          <a:xfrm>
+            <a:off x="914400" y="2697480"/>
+            <a:ext cx="2895600" cy="1325880"/>
+          </a:xfrm>
+          <a:prstGeom prst="rect">
+            <a:avLst/>
+          </a:prstGeom>
+          <a:noFill/>
+          <a:ln/>
+        </p:spPr>
+        <p:txBody>
+          <a:bodyPr wrap="square" lIns="0" tIns="0" rIns="0" bIns="0" rtlCol="0" anchor="t"/>
+          <a:lstStyle/>
+          <a:p>
+            <a:pPr marL="342900" indent="-342900">
+              <a:lnSpc>
+                <a:spcPct val="118000"/>
+              </a:lnSpc>
+              <a:spcAft>
+                <a:spcPts val="800"/>
+              </a:spcAft>
+              <a:buSzPct val="100000"/>
+              <a:buChar char="•"/>
+            </a:pPr>
+            <a:r>
+              <a:rPr lang="en-US" sz="1800" dirty="0">
+                <a:solidFill>
+                  <a:srgbClr val="D6DFEC"/>
+                </a:solidFill>
+                <a:latin typeface="Calibri" pitchFamily="34" charset="0"/>
+                <a:ea typeface="Calibri" pitchFamily="34" charset="-122"/>
+                <a:cs typeface="Calibri" pitchFamily="34" charset="-120"/>
+              </a:rPr>
+              <a:t>3 реальных ТЗ</a:t>
+            </a:r>
+            <a:endParaRPr lang="en-US" sz="1800" dirty="0"/>
+          </a:p>
+          <a:p>
+            <a:pPr marL="342900" indent="-342900">
+              <a:lnSpc>
+                <a:spcPct val="118000"/>
+              </a:lnSpc>
+              <a:spcAft>
+                <a:spcPts val="800"/>
+              </a:spcAft>
+              <a:buSzPct val="100000"/>
+              <a:buChar char="•"/>
+            </a:pPr>
+            <a:r>
+              <a:rPr lang="en-US" sz="1800" dirty="0">
+                <a:solidFill>
+                  <a:srgbClr val="D6DFEC"/>
+                </a:solidFill>
+                <a:latin typeface="Calibri" pitchFamily="34" charset="0"/>
+                <a:ea typeface="Calibri" pitchFamily="34" charset="-122"/>
+                <a:cs typeface="Calibri" pitchFamily="34" charset="-120"/>
+              </a:rPr>
+              <a:t>20 замечаний с цитатой</a:t>
+            </a:r>
+            <a:endParaRPr lang="en-US" sz="1800" dirty="0"/>
+          </a:p>
+          <a:p>
+            <a:pPr marL="342900" indent="-342900">
+              <a:lnSpc>
+                <a:spcPct val="118000"/>
+              </a:lnSpc>
+              <a:spcAft>
+                <a:spcPts val="800"/>
+              </a:spcAft>
+              <a:buSzPct val="100000"/>
+              <a:buChar char="•"/>
+            </a:pPr>
+            <a:r>
+              <a:rPr lang="en-US" sz="1800" dirty="0">
+                <a:solidFill>
+                  <a:srgbClr val="D6DFEC"/>
+                </a:solidFill>
+                <a:latin typeface="Calibri" pitchFamily="34" charset="0"/>
+                <a:ea typeface="Calibri" pitchFamily="34" charset="-122"/>
+                <a:cs typeface="Calibri" pitchFamily="34" charset="-120"/>
+              </a:rPr>
+              <a:t>73 автотеста</a:t>
+            </a:r>
+            <a:endParaRPr lang="en-US" sz="1800" dirty="0"/>
+          </a:p>
+        </p:txBody>
+      </p:sp>
+      <p:sp>
+        <p:nvSpPr>
+          <p:cNvPr id="7" name="Shape 5"/>
+          <p:cNvSpPr/>
+          <p:nvPr/>
+        </p:nvSpPr>
+        <p:spPr>
+          <a:xfrm>
+            <a:off x="4376928" y="2057400"/>
+            <a:ext cx="3407664" cy="2103120"/>
+          </a:xfrm>
+          <a:prstGeom prst="roundRect">
+            <a:avLst>
+              <a:gd name="adj" fmla="val 4348"/>
+            </a:avLst>
+          </a:prstGeom>
+          <a:solidFill>
+            <a:srgbClr val="1B2E4A"/>
+          </a:solidFill>
+          <a:ln w="12700">
+            <a:solidFill>
+              <a:srgbClr val="27405F"/>
+            </a:solidFill>
+            <a:prstDash val="solid"/>
+          </a:ln>
+        </p:spPr>
+      </p:sp>
+      <p:sp>
+        <p:nvSpPr>
+          <p:cNvPr id="8" name="Text 6"/>
+          <p:cNvSpPr txBox="1"/>
+          <p:nvPr/>
+        </p:nvSpPr>
+        <p:spPr>
+          <a:xfrm>
+            <a:off x="4632960" y="2267712"/>
+            <a:ext cx="2895600" cy="320040"/>
+          </a:xfrm>
+          <a:prstGeom prst="rect">
+            <a:avLst/>
+          </a:prstGeom>
+          <a:noFill/>
+          <a:ln/>
+        </p:spPr>
+        <p:txBody>
+          <a:bodyPr wrap="square" lIns="0" tIns="0" rIns="0" bIns="0" rtlCol="0" anchor="t"/>
+          <a:lstStyle/>
+          <a:p>
+            <a:pPr indent="0" marL="0">
+              <a:buNone/>
+            </a:pPr>
+            <a:r>
+              <a:rPr lang="en-US" sz="1250" b="1" spc="250" kern="0" dirty="0">
+                <a:solidFill>
+                  <a:srgbClr val="C8791A"/>
+                </a:solidFill>
+                <a:latin typeface="Calibri" pitchFamily="34" charset="0"/>
+                <a:ea typeface="Calibri" pitchFamily="34" charset="-122"/>
+                <a:cs typeface="Calibri" pitchFamily="34" charset="-120"/>
+              </a:rPr>
+              <a:t>ПОКА ГИПОТЕЗА</a:t>
+            </a:r>
+            <a:endParaRPr lang="en-US" sz="1250" dirty="0"/>
+          </a:p>
+        </p:txBody>
+      </p:sp>
+      <p:sp>
+        <p:nvSpPr>
+          <p:cNvPr id="9" name="Text 7"/>
+          <p:cNvSpPr txBox="1"/>
+          <p:nvPr/>
+        </p:nvSpPr>
+        <p:spPr>
+          <a:xfrm>
+            <a:off x="4632960" y="2697480"/>
+            <a:ext cx="2895600" cy="1325880"/>
+          </a:xfrm>
+          <a:prstGeom prst="rect">
+            <a:avLst/>
+          </a:prstGeom>
+          <a:noFill/>
+          <a:ln/>
+        </p:spPr>
+        <p:txBody>
+          <a:bodyPr wrap="square" lIns="0" tIns="0" rIns="0" bIns="0" rtlCol="0" anchor="t"/>
+          <a:lstStyle/>
+          <a:p>
+            <a:pPr marL="342900" indent="-342900">
+              <a:lnSpc>
+                <a:spcPct val="118000"/>
+              </a:lnSpc>
+              <a:spcAft>
+                <a:spcPts val="800"/>
+              </a:spcAft>
+              <a:buSzPct val="100000"/>
+              <a:buChar char="•"/>
+            </a:pPr>
+            <a:r>
+              <a:rPr lang="en-US" sz="1800" dirty="0">
+                <a:solidFill>
+                  <a:srgbClr val="D6DFEC"/>
+                </a:solidFill>
+                <a:latin typeface="Calibri" pitchFamily="34" charset="0"/>
+                <a:ea typeface="Calibri" pitchFamily="34" charset="-122"/>
+                <a:cs typeface="Calibri" pitchFamily="34" charset="-120"/>
+              </a:rPr>
+              <a:t>precision / recall</a:t>
+            </a:r>
+            <a:endParaRPr lang="en-US" sz="1800" dirty="0"/>
+          </a:p>
+          <a:p>
+            <a:pPr marL="342900" indent="-342900">
+              <a:lnSpc>
+                <a:spcPct val="118000"/>
+              </a:lnSpc>
+              <a:spcAft>
+                <a:spcPts val="800"/>
+              </a:spcAft>
+              <a:buSzPct val="100000"/>
+              <a:buChar char="•"/>
+            </a:pPr>
+            <a:r>
+              <a:rPr lang="en-US" sz="1800" dirty="0">
+                <a:solidFill>
+                  <a:srgbClr val="D6DFEC"/>
+                </a:solidFill>
+                <a:latin typeface="Calibri" pitchFamily="34" charset="0"/>
+                <a:ea typeface="Calibri" pitchFamily="34" charset="-122"/>
+                <a:cs typeface="Calibri" pitchFamily="34" charset="-120"/>
+              </a:rPr>
+              <a:t>эффект на уточнениях</a:t>
+            </a:r>
+            <a:endParaRPr lang="en-US" sz="1800" dirty="0"/>
+          </a:p>
+        </p:txBody>
+      </p:sp>
+      <p:sp>
+        <p:nvSpPr>
+          <p:cNvPr id="10" name="Shape 8"/>
+          <p:cNvSpPr/>
+          <p:nvPr/>
+        </p:nvSpPr>
+        <p:spPr>
+          <a:xfrm>
+            <a:off x="8095488" y="2057400"/>
+            <a:ext cx="3407664" cy="2103120"/>
+          </a:xfrm>
+          <a:prstGeom prst="roundRect">
+            <a:avLst>
+              <a:gd name="adj" fmla="val 4348"/>
+            </a:avLst>
+          </a:prstGeom>
+          <a:solidFill>
+            <a:srgbClr val="1B2E4A"/>
+          </a:solidFill>
+          <a:ln w="12700">
+            <a:solidFill>
+              <a:srgbClr val="27405F"/>
+            </a:solidFill>
+            <a:prstDash val="solid"/>
+          </a:ln>
+        </p:spPr>
+      </p:sp>
+      <p:sp>
+        <p:nvSpPr>
+          <p:cNvPr id="11" name="Text 9"/>
+          <p:cNvSpPr txBox="1"/>
+          <p:nvPr/>
+        </p:nvSpPr>
+        <p:spPr>
+          <a:xfrm>
+            <a:off x="8351520" y="2267712"/>
+            <a:ext cx="2895600" cy="320040"/>
+          </a:xfrm>
+          <a:prstGeom prst="rect">
+            <a:avLst/>
+          </a:prstGeom>
+          <a:noFill/>
+          <a:ln/>
+        </p:spPr>
+        <p:txBody>
+          <a:bodyPr wrap="square" lIns="0" tIns="0" rIns="0" bIns="0" rtlCol="0" anchor="t"/>
+          <a:lstStyle/>
+          <a:p>
+            <a:pPr indent="0" marL="0">
+              <a:buNone/>
+            </a:pPr>
+            <a:r>
+              <a:rPr lang="en-US" sz="1250" b="1" spc="250" kern="0" dirty="0">
+                <a:solidFill>
+                  <a:srgbClr val="C9A227"/>
+                </a:solidFill>
+                <a:latin typeface="Calibri" pitchFamily="34" charset="0"/>
+                <a:ea typeface="Calibri" pitchFamily="34" charset="-122"/>
+                <a:cs typeface="Calibri" pitchFamily="34" charset="-120"/>
+              </a:rPr>
+              <a:t>СЛЕДУЮЩИЙ ШАГ</a:t>
+            </a:r>
+            <a:endParaRPr lang="en-US" sz="1250" dirty="0"/>
+          </a:p>
+        </p:txBody>
+      </p:sp>
+      <p:sp>
+        <p:nvSpPr>
+          <p:cNvPr id="12" name="Text 10"/>
+          <p:cNvSpPr txBox="1"/>
+          <p:nvPr/>
+        </p:nvSpPr>
+        <p:spPr>
+          <a:xfrm>
+            <a:off x="8351520" y="2697480"/>
+            <a:ext cx="2895600" cy="1325880"/>
+          </a:xfrm>
+          <a:prstGeom prst="rect">
+            <a:avLst/>
+          </a:prstGeom>
+          <a:noFill/>
+          <a:ln/>
+        </p:spPr>
+        <p:txBody>
+          <a:bodyPr wrap="square" lIns="0" tIns="0" rIns="0" bIns="0" rtlCol="0" anchor="t"/>
+          <a:lstStyle/>
+          <a:p>
+            <a:pPr marL="342900" indent="-342900">
+              <a:lnSpc>
+                <a:spcPct val="118000"/>
+              </a:lnSpc>
+              <a:spcAft>
+                <a:spcPts val="800"/>
+              </a:spcAft>
+              <a:buSzPct val="100000"/>
+              <a:buChar char="•"/>
+            </a:pPr>
+            <a:r>
+              <a:rPr lang="en-US" sz="1800" dirty="0">
+                <a:solidFill>
+                  <a:srgbClr val="D6DFEC"/>
+                </a:solidFill>
+                <a:latin typeface="Calibri" pitchFamily="34" charset="0"/>
+                <a:ea typeface="Calibri" pitchFamily="34" charset="-122"/>
+                <a:cs typeface="Calibri" pitchFamily="34" charset="-120"/>
+              </a:rPr>
+              <a:t>правки от NET</a:t>
+            </a:r>
+            <a:endParaRPr lang="en-US" sz="1800" dirty="0"/>
+          </a:p>
+          <a:p>
+            <a:pPr marL="342900" indent="-342900">
+              <a:lnSpc>
+                <a:spcPct val="118000"/>
+              </a:lnSpc>
+              <a:spcAft>
+                <a:spcPts val="800"/>
+              </a:spcAft>
+              <a:buSzPct val="100000"/>
+              <a:buChar char="•"/>
+            </a:pPr>
+            <a:r>
+              <a:rPr lang="en-US" sz="1800" dirty="0">
+                <a:solidFill>
+                  <a:srgbClr val="D6DFEC"/>
+                </a:solidFill>
+                <a:latin typeface="Calibri" pitchFamily="34" charset="0"/>
+                <a:ea typeface="Calibri" pitchFamily="34" charset="-122"/>
+                <a:cs typeface="Calibri" pitchFamily="34" charset="-120"/>
+              </a:rPr>
+              <a:t>пилот с аналитиками</a:t>
+            </a:r>
+            <a:endParaRPr lang="en-US" sz="1800" dirty="0"/>
+          </a:p>
+        </p:txBody>
+      </p:sp>
+      <p:sp>
+        <p:nvSpPr>
+          <p:cNvPr id="13" name="Shape 11"/>
+          <p:cNvSpPr/>
+          <p:nvPr/>
+        </p:nvSpPr>
+        <p:spPr>
+          <a:xfrm>
+            <a:off x="658368" y="4572000"/>
+            <a:ext cx="10844784" cy="1371600"/>
+          </a:xfrm>
+          <a:prstGeom prst="roundRect">
+            <a:avLst>
+              <a:gd name="adj" fmla="val 6667"/>
+            </a:avLst>
+          </a:prstGeom>
+          <a:solidFill>
+            <a:srgbClr val="162944"/>
+          </a:solidFill>
+          <a:ln w="19050">
+            <a:solidFill>
+              <a:srgbClr val="C9A227"/>
+            </a:solidFill>
+            <a:prstDash val="solid"/>
+          </a:ln>
+        </p:spPr>
+      </p:sp>
+      <p:sp>
+        <p:nvSpPr>
+          <p:cNvPr id="14" name="Text 12"/>
+          <p:cNvSpPr txBox="1"/>
+          <p:nvPr/>
+        </p:nvSpPr>
+        <p:spPr>
+          <a:xfrm>
+            <a:off x="1069848" y="4572000"/>
+            <a:ext cx="10021824" cy="1371600"/>
+          </a:xfrm>
+          <a:prstGeom prst="rect">
+            <a:avLst/>
+          </a:prstGeom>
+          <a:noFill/>
+          <a:ln/>
+        </p:spPr>
+        <p:txBody>
+          <a:bodyPr wrap="square" lIns="0" tIns="0" rIns="0" bIns="0" rtlCol="0" anchor="ctr"/>
+          <a:lstStyle/>
+          <a:p>
+            <a:pPr indent="0" marL="0">
+              <a:lnSpc>
+                <a:spcPct val="122000"/>
+              </a:lnSpc>
+              <a:buNone/>
+            </a:pPr>
+            <a:r>
+              <a:rPr lang="en-US" sz="2200" b="1" dirty="0">
+                <a:solidFill>
+                  <a:srgbClr val="FFFFFF"/>
+                </a:solidFill>
+                <a:latin typeface="Calibri" pitchFamily="34" charset="0"/>
+                <a:ea typeface="Calibri" pitchFamily="34" charset="-122"/>
+                <a:cs typeface="Calibri" pitchFamily="34" charset="-120"/>
+              </a:rPr>
+              <a:t>Мы находим в реальных ТЗ противоречия, которые люди пропускают. Чтобы измерить эффект, нужны реальные правки NET — и мы готовы к пилоту.</a:t>
             </a:r>
             <a:endParaRPr lang="en-US" sz="2200" dirty="0"/>
+          </a:p>
+        </p:txBody>
+      </p:sp>
+      <p:sp>
+        <p:nvSpPr>
+          <p:cNvPr id="15" name="Text 13"/>
+          <p:cNvSpPr txBox="1"/>
+          <p:nvPr/>
+        </p:nvSpPr>
+        <p:spPr>
+          <a:xfrm>
+            <a:off x="10954512" y="548640"/>
+            <a:ext cx="548640" cy="292608"/>
+          </a:xfrm>
+          <a:prstGeom prst="rect">
+            <a:avLst/>
+          </a:prstGeom>
+          <a:noFill/>
+          <a:ln/>
+        </p:spPr>
+        <p:txBody>
+          <a:bodyPr wrap="square" lIns="0" tIns="0" rIns="0" bIns="0" rtlCol="0" anchor="t"/>
+          <a:lstStyle/>
+          <a:p>
+            <a:pPr algn="r" indent="0" marL="0">
+              <a:buNone/>
+            </a:pPr>
+            <a:r>
+              <a:rPr lang="en-US" sz="1200" spc="100" kern="0" dirty="0">
+                <a:solidFill>
+                  <a:srgbClr val="4A6280"/>
+                </a:solidFill>
+                <a:latin typeface="Calibri" pitchFamily="34" charset="0"/>
+                <a:ea typeface="Calibri" pitchFamily="34" charset="-122"/>
+                <a:cs typeface="Calibri" pitchFamily="34" charset="-120"/>
+              </a:rPr>
+              <a:t>08</a:t>
+            </a:r>
+            <a:endParaRPr lang="en-US" sz="1200" dirty="0"/>
           </a:p>
         </p:txBody>
       </p:sp>

--- a/presentation/ТЗ-Ревьюер — питч Demo Day.pptx
+++ b/presentation/ТЗ-Ревьюер — питч Demo Day.pptx
@@ -13,9 +13,10 @@
     <p:sldId id="261" r:id="rId7"/>
     <p:sldId id="262" r:id="rId8"/>
     <p:sldId id="263" r:id="rId9"/>
+    <p:sldId id="264" r:id="rId10"/>
   </p:sldIdLst>
   <p:notesMasterIdLst>
-    <p:notesMasterId r:id="rId10"/>
+    <p:notesMasterId r:id="rId11"/>
   </p:notesMasterIdLst>
   <p:sldSz cx="12192000" cy="6858000"/>
   <p:notesSz cx="6858000" cy="12192000"/>
@@ -685,7 +686,7 @@
           <a:p>
             <a:r>
               <a:rPr lang="en-US" dirty="0"/>
-              <a:t>1:00–3:10 — живое демо. План Б: этот и следующие слайды содержат настоящие экраны инструмента.</a:t>
+              <a:t>Слева выбирается провайдер, модель, ключ и base URL — инструмент не привязан к одной модели. Справа три способа подать ТЗ: вставить текст, загрузить файл, взять пример.</a:t>
             </a:r>
             <a:endParaRPr lang="en-US" dirty="0"/>
           </a:p>
@@ -773,7 +774,7 @@
           <a:p>
             <a:r>
               <a:rPr lang="en-US" dirty="0"/>
-              <a:t>Ключевое доказательство: два раздела одного ТЗ требуют разной задержки. Инструмент привёл обе цитаты и задал вопрос аналитику.</a:t>
+              <a:t>1:00–3:10 — живое демо. План Б: этот и следующие слайды содержат настоящие экраны инструмента.</a:t>
             </a:r>
             <a:endParaRPr lang="en-US" dirty="0"/>
           </a:p>
@@ -861,7 +862,7 @@
           <a:p>
             <a:r>
               <a:rPr lang="en-US" dirty="0"/>
-              <a:t>Настоящий экран инструмента: список замечаний с фильтром по категории, раскрытое замечание с цитатой, объяснением и вопросом аналитику.</a:t>
+              <a:t>Ключевое доказательство: два раздела одного ТЗ требуют разной задержки. Инструмент привёл обе цитаты и задал вопрос аналитику.</a:t>
             </a:r>
             <a:endParaRPr lang="en-US" dirty="0"/>
           </a:p>
@@ -949,7 +950,7 @@
           <a:p>
             <a:r>
               <a:rPr lang="en-US" dirty="0"/>
-              <a:t>Кроме замечаний инструмент детерминированно проверяет 21 раздел шаблона: заполнен, пустой, помечен «не применимо», упомянут вне раздела или не найден.</a:t>
+              <a:t>Настоящий экран инструмента: список замечаний с фильтром по категории, раскрытое замечание с цитатой, объяснением и вопросом аналитику.</a:t>
             </a:r>
             <a:endParaRPr lang="en-US" dirty="0"/>
           </a:p>
@@ -1037,7 +1038,7 @@
           <a:p>
             <a:r>
               <a:rPr lang="en-US" dirty="0"/>
-              <a:t>3:10–4:10. Первые два слоя — обычный код, детерминированы и воспроизводимы. LLM отвечает только за смысл, и каждое его замечание обязано содержать дословную цитату, иначе отбрасывается. Провайдера меняли на живой Gemini без единой правки кода.</a:t>
+              <a:t>Кроме замечаний инструмент детерминированно проверяет 21 раздел шаблона: заполнен, пустой, помечен «не применимо», упомянут вне раздела или не найден.</a:t>
             </a:r>
             <a:endParaRPr lang="en-US" dirty="0"/>
           </a:p>
@@ -1125,7 +1126,7 @@
           <a:p>
             <a:r>
               <a:rPr lang="en-US" dirty="0"/>
-              <a:t>4:10–5:00. Финальная фраза читается дословно, 12–15 секунд.</a:t>
+              <a:t>3:10–4:10. Первые два слоя — обычный код, детерминированы и воспроизводимы. LLM отвечает только за смысл, и каждое его замечание обязано содержать дословную цитату, иначе отбрасывается. Провайдера меняли на живой Gemini без единой правки кода.</a:t>
             </a:r>
             <a:endParaRPr lang="en-US" dirty="0"/>
           </a:p>
@@ -1149,6 +1150,94 @@
             <a:fld id="{F7021451-1387-4CA6-816F-3879F97B5CBC}" type="slidenum">
               <a:rPr lang="en-US"/>
               <a:t>8</a:t>
+            </a:fld>
+            <a:endParaRPr lang="en-US"/>
+          </a:p>
+        </p:txBody>
+      </p:sp>
+    </p:spTree>
+    <p:extLst>
+      <p:ext uri="{BB962C8B-B14F-4D97-AF65-F5344CB8AC3E}">
+        <p14:creationId xmlns:p14="http://schemas.microsoft.com/office/powerpoint/2010/main" val="1024086991"/>
+      </p:ext>
+    </p:extLst>
+  </p:cSld>
+  <p:clrMapOvr>
+    <a:masterClrMapping/>
+  </p:clrMapOvr>
+</p:notes>
+</file>
+
+<file path=ppt/notesSlides/notesSlide9.xml><?xml version="1.0" encoding="utf-8"?>
+<p:notes xmlns:a="http://schemas.openxmlformats.org/drawingml/2006/main" xmlns:r="http://schemas.openxmlformats.org/officeDocument/2006/relationships" xmlns:p="http://schemas.openxmlformats.org/presentationml/2006/main">
+  <p:cSld>
+    <p:spTree>
+      <p:nvGrpSpPr>
+        <p:cNvPr id="1" name=""/>
+        <p:cNvGrpSpPr/>
+        <p:nvPr/>
+      </p:nvGrpSpPr>
+      <p:grpSpPr>
+        <a:xfrm>
+          <a:off x="0" y="0"/>
+          <a:ext cx="0" cy="0"/>
+          <a:chOff x="0" y="0"/>
+          <a:chExt cx="0" cy="0"/>
+        </a:xfrm>
+      </p:grpSpPr>
+      <p:sp>
+        <p:nvSpPr>
+          <p:cNvPr id="2" name="Slide Image Placeholder 1"/>
+          <p:cNvSpPr>
+            <a:spLocks noGrp="1" noRot="1" noChangeAspect="1"/>
+          </p:cNvSpPr>
+          <p:nvPr>
+            <p:ph type="sldImg"/>
+          </p:nvPr>
+        </p:nvSpPr>
+        <p:spPr/>
+      </p:sp>
+      <p:sp>
+        <p:nvSpPr>
+          <p:cNvPr id="3" name="Notes Placeholder 2"/>
+          <p:cNvSpPr>
+            <a:spLocks noGrp="1"/>
+          </p:cNvSpPr>
+          <p:nvPr>
+            <p:ph type="body" idx="1"/>
+          </p:nvPr>
+        </p:nvSpPr>
+        <p:spPr/>
+        <p:txBody>
+          <a:bodyPr/>
+          <a:lstStyle/>
+          <a:p>
+            <a:r>
+              <a:rPr lang="en-US" dirty="0"/>
+              <a:t>4:10–5:00. Финальная фраза читается дословно, 12–15 секунд.</a:t>
+            </a:r>
+            <a:endParaRPr lang="en-US" dirty="0"/>
+          </a:p>
+        </p:txBody>
+      </p:sp>
+      <p:sp>
+        <p:nvSpPr>
+          <p:cNvPr id="4" name="Slide Number Placeholder 3"/>
+          <p:cNvSpPr>
+            <a:spLocks noGrp="1"/>
+          </p:cNvSpPr>
+          <p:nvPr>
+            <p:ph type="sldNum" sz="quarter" idx="10"/>
+          </p:nvPr>
+        </p:nvSpPr>
+        <p:spPr/>
+        <p:txBody>
+          <a:bodyPr/>
+          <a:lstStyle/>
+          <a:p>
+            <a:fld id="{F7021451-1387-4CA6-816F-3879F97B5CBC}" type="slidenum">
+              <a:rPr lang="en-US"/>
+              <a:t>9</a:t>
             </a:fld>
             <a:endParaRPr lang="en-US"/>
           </a:p>
@@ -2557,7 +2646,7 @@
                 <a:ea typeface="Calibri" pitchFamily="34" charset="-122"/>
                 <a:cs typeface="Calibri" pitchFamily="34" charset="-120"/>
               </a:rPr>
-              <a:t>ДЕМО</a:t>
+              <a:t>ИНТЕРФЕЙС</a:t>
             </a:r>
             <a:endParaRPr lang="en-US" sz="1150" dirty="0"/>
           </a:p>
@@ -2601,7 +2690,7 @@
                 <a:ea typeface="Cambria" pitchFamily="34" charset="-122"/>
                 <a:cs typeface="Cambria" pitchFamily="34" charset="-120"/>
               </a:rPr>
-              <a:t>Загрузил ТЗ — получил замечания с цитатами</a:t>
+              <a:t>Один экран: настройки слева, документ справа</a:t>
             </a:r>
             <a:endParaRPr lang="en-US" sz="3200" dirty="0"/>
           </a:p>
@@ -2615,493 +2704,12 @@
         </p:nvSpPr>
         <p:spPr>
           <a:xfrm>
-            <a:off x="658368" y="2057400"/>
-            <a:ext cx="2505456" cy="1234440"/>
+            <a:off x="1188720" y="1737360"/>
+            <a:ext cx="9784080" cy="4873142"/>
           </a:xfrm>
           <a:prstGeom prst="roundRect">
             <a:avLst>
-              <a:gd name="adj" fmla="val 7407"/>
-            </a:avLst>
-          </a:prstGeom>
-          <a:solidFill>
-            <a:srgbClr val="F4F7FA"/>
-          </a:solidFill>
-          <a:ln w="12700">
-            <a:solidFill>
-              <a:srgbClr val="E2E8F0"/>
-            </a:solidFill>
-            <a:prstDash val="solid"/>
-          </a:ln>
-        </p:spPr>
-      </p:sp>
-      <p:sp>
-        <p:nvSpPr>
-          <p:cNvPr id="5" name="Text 3"/>
-          <p:cNvSpPr txBox="1"/>
-          <p:nvPr/>
-        </p:nvSpPr>
-        <p:spPr>
-          <a:xfrm>
-            <a:off x="749808" y="2057400"/>
-            <a:ext cx="2322576" cy="1234440"/>
-          </a:xfrm>
-          <a:prstGeom prst="rect">
-            <a:avLst/>
-          </a:prstGeom>
-          <a:noFill/>
-          <a:ln/>
-        </p:spPr>
-        <p:txBody>
-          <a:bodyPr wrap="square" lIns="0" tIns="0" rIns="0" bIns="0" rtlCol="0" anchor="ctr">
-            <a:normAutofit/>
-          </a:bodyPr>
-          <a:lstStyle/>
-          <a:p>
-            <a:pPr algn="ctr" indent="0" marL="0">
-              <a:lnSpc>
-                <a:spcPct val="115000"/>
-              </a:lnSpc>
-              <a:buNone/>
-            </a:pPr>
-            <a:r>
-              <a:rPr lang="en-US" sz="1800" b="1" dirty="0">
-                <a:solidFill>
-                  <a:srgbClr val="1B2E4A"/>
-                </a:solidFill>
-                <a:latin typeface="Calibri" pitchFamily="34" charset="0"/>
-                <a:ea typeface="Calibri" pitchFamily="34" charset="-122"/>
-                <a:cs typeface="Calibri" pitchFamily="34" charset="-120"/>
-              </a:rPr>
-              <a:t>Аналитик</a:t>
-            </a:r>
-            <a:endParaRPr lang="en-US" sz="1800" dirty="0"/>
-          </a:p>
-          <a:p>
-            <a:pPr algn="ctr" indent="0" marL="0">
-              <a:lnSpc>
-                <a:spcPct val="115000"/>
-              </a:lnSpc>
-              <a:buNone/>
-            </a:pPr>
-            <a:r>
-              <a:rPr lang="en-US" sz="1800" b="1" dirty="0">
-                <a:solidFill>
-                  <a:srgbClr val="1B2E4A"/>
-                </a:solidFill>
-                <a:latin typeface="Calibri" pitchFamily="34" charset="0"/>
-                <a:ea typeface="Calibri" pitchFamily="34" charset="-122"/>
-                <a:cs typeface="Calibri" pitchFamily="34" charset="-120"/>
-              </a:rPr>
-              <a:t>загружает ТЗ</a:t>
-            </a:r>
-            <a:endParaRPr lang="en-US" sz="1800" dirty="0"/>
-          </a:p>
-        </p:txBody>
-      </p:sp>
-      <p:sp>
-        <p:nvSpPr>
-          <p:cNvPr id="6" name="Text 4"/>
-          <p:cNvSpPr txBox="1"/>
-          <p:nvPr/>
-        </p:nvSpPr>
-        <p:spPr>
-          <a:xfrm>
-            <a:off x="3163824" y="2057400"/>
-            <a:ext cx="274320" cy="1234440"/>
-          </a:xfrm>
-          <a:prstGeom prst="rect">
-            <a:avLst/>
-          </a:prstGeom>
-          <a:noFill/>
-          <a:ln/>
-        </p:spPr>
-        <p:txBody>
-          <a:bodyPr wrap="square" lIns="0" tIns="0" rIns="0" bIns="0" rtlCol="0" anchor="ctr"/>
-          <a:lstStyle/>
-          <a:p>
-            <a:pPr algn="ctr" indent="0" marL="0">
-              <a:buNone/>
-            </a:pPr>
-            <a:r>
-              <a:rPr lang="en-US" sz="2400" b="1" dirty="0">
-                <a:solidFill>
-                  <a:srgbClr val="C3CDD9"/>
-                </a:solidFill>
-                <a:latin typeface="Calibri" pitchFamily="34" charset="0"/>
-                <a:ea typeface="Calibri" pitchFamily="34" charset="-122"/>
-                <a:cs typeface="Calibri" pitchFamily="34" charset="-120"/>
-              </a:rPr>
-              <a:t>›</a:t>
-            </a:r>
-            <a:endParaRPr lang="en-US" sz="2400" dirty="0"/>
-          </a:p>
-        </p:txBody>
-      </p:sp>
-      <p:sp>
-        <p:nvSpPr>
-          <p:cNvPr id="7" name="Shape 5"/>
-          <p:cNvSpPr/>
-          <p:nvPr/>
-        </p:nvSpPr>
-        <p:spPr>
-          <a:xfrm>
-            <a:off x="3438144" y="2057400"/>
-            <a:ext cx="2505456" cy="1234440"/>
-          </a:xfrm>
-          <a:prstGeom prst="roundRect">
-            <a:avLst>
-              <a:gd name="adj" fmla="val 7407"/>
-            </a:avLst>
-          </a:prstGeom>
-          <a:solidFill>
-            <a:srgbClr val="F4F7FA"/>
-          </a:solidFill>
-          <a:ln w="12700">
-            <a:solidFill>
-              <a:srgbClr val="E2E8F0"/>
-            </a:solidFill>
-            <a:prstDash val="solid"/>
-          </a:ln>
-        </p:spPr>
-      </p:sp>
-      <p:sp>
-        <p:nvSpPr>
-          <p:cNvPr id="8" name="Text 6"/>
-          <p:cNvSpPr txBox="1"/>
-          <p:nvPr/>
-        </p:nvSpPr>
-        <p:spPr>
-          <a:xfrm>
-            <a:off x="3529584" y="2057400"/>
-            <a:ext cx="2322576" cy="1234440"/>
-          </a:xfrm>
-          <a:prstGeom prst="rect">
-            <a:avLst/>
-          </a:prstGeom>
-          <a:noFill/>
-          <a:ln/>
-        </p:spPr>
-        <p:txBody>
-          <a:bodyPr wrap="square" lIns="0" tIns="0" rIns="0" bIns="0" rtlCol="0" anchor="ctr">
-            <a:normAutofit/>
-          </a:bodyPr>
-          <a:lstStyle/>
-          <a:p>
-            <a:pPr algn="ctr" indent="0" marL="0">
-              <a:lnSpc>
-                <a:spcPct val="115000"/>
-              </a:lnSpc>
-              <a:buNone/>
-            </a:pPr>
-            <a:r>
-              <a:rPr lang="en-US" sz="1800" b="1" dirty="0">
-                <a:solidFill>
-                  <a:srgbClr val="1B2E4A"/>
-                </a:solidFill>
-                <a:latin typeface="Calibri" pitchFamily="34" charset="0"/>
-                <a:ea typeface="Calibri" pitchFamily="34" charset="-122"/>
-                <a:cs typeface="Calibri" pitchFamily="34" charset="-120"/>
-              </a:rPr>
-              <a:t>Нажимает</a:t>
-            </a:r>
-            <a:endParaRPr lang="en-US" sz="1800" dirty="0"/>
-          </a:p>
-          <a:p>
-            <a:pPr algn="ctr" indent="0" marL="0">
-              <a:lnSpc>
-                <a:spcPct val="115000"/>
-              </a:lnSpc>
-              <a:buNone/>
-            </a:pPr>
-            <a:r>
-              <a:rPr lang="en-US" sz="1800" b="1" dirty="0">
-                <a:solidFill>
-                  <a:srgbClr val="1B2E4A"/>
-                </a:solidFill>
-                <a:latin typeface="Calibri" pitchFamily="34" charset="0"/>
-                <a:ea typeface="Calibri" pitchFamily="34" charset="-122"/>
-                <a:cs typeface="Calibri" pitchFamily="34" charset="-120"/>
-              </a:rPr>
-              <a:t>«Проверить»</a:t>
-            </a:r>
-            <a:endParaRPr lang="en-US" sz="1800" dirty="0"/>
-          </a:p>
-        </p:txBody>
-      </p:sp>
-      <p:sp>
-        <p:nvSpPr>
-          <p:cNvPr id="9" name="Text 7"/>
-          <p:cNvSpPr txBox="1"/>
-          <p:nvPr/>
-        </p:nvSpPr>
-        <p:spPr>
-          <a:xfrm>
-            <a:off x="5943600" y="2057400"/>
-            <a:ext cx="274320" cy="1234440"/>
-          </a:xfrm>
-          <a:prstGeom prst="rect">
-            <a:avLst/>
-          </a:prstGeom>
-          <a:noFill/>
-          <a:ln/>
-        </p:spPr>
-        <p:txBody>
-          <a:bodyPr wrap="square" lIns="0" tIns="0" rIns="0" bIns="0" rtlCol="0" anchor="ctr"/>
-          <a:lstStyle/>
-          <a:p>
-            <a:pPr algn="ctr" indent="0" marL="0">
-              <a:buNone/>
-            </a:pPr>
-            <a:r>
-              <a:rPr lang="en-US" sz="2400" b="1" dirty="0">
-                <a:solidFill>
-                  <a:srgbClr val="C3CDD9"/>
-                </a:solidFill>
-                <a:latin typeface="Calibri" pitchFamily="34" charset="0"/>
-                <a:ea typeface="Calibri" pitchFamily="34" charset="-122"/>
-                <a:cs typeface="Calibri" pitchFamily="34" charset="-120"/>
-              </a:rPr>
-              <a:t>›</a:t>
-            </a:r>
-            <a:endParaRPr lang="en-US" sz="2400" dirty="0"/>
-          </a:p>
-        </p:txBody>
-      </p:sp>
-      <p:sp>
-        <p:nvSpPr>
-          <p:cNvPr id="10" name="Shape 8"/>
-          <p:cNvSpPr/>
-          <p:nvPr/>
-        </p:nvSpPr>
-        <p:spPr>
-          <a:xfrm>
-            <a:off x="6217920" y="2057400"/>
-            <a:ext cx="2505456" cy="1234440"/>
-          </a:xfrm>
-          <a:prstGeom prst="roundRect">
-            <a:avLst>
-              <a:gd name="adj" fmla="val 7407"/>
-            </a:avLst>
-          </a:prstGeom>
-          <a:solidFill>
-            <a:srgbClr val="F4F7FA"/>
-          </a:solidFill>
-          <a:ln w="12700">
-            <a:solidFill>
-              <a:srgbClr val="E2E8F0"/>
-            </a:solidFill>
-            <a:prstDash val="solid"/>
-          </a:ln>
-        </p:spPr>
-      </p:sp>
-      <p:sp>
-        <p:nvSpPr>
-          <p:cNvPr id="11" name="Text 9"/>
-          <p:cNvSpPr txBox="1"/>
-          <p:nvPr/>
-        </p:nvSpPr>
-        <p:spPr>
-          <a:xfrm>
-            <a:off x="6309360" y="2057400"/>
-            <a:ext cx="2322576" cy="1234440"/>
-          </a:xfrm>
-          <a:prstGeom prst="rect">
-            <a:avLst/>
-          </a:prstGeom>
-          <a:noFill/>
-          <a:ln/>
-        </p:spPr>
-        <p:txBody>
-          <a:bodyPr wrap="square" lIns="0" tIns="0" rIns="0" bIns="0" rtlCol="0" anchor="ctr">
-            <a:normAutofit/>
-          </a:bodyPr>
-          <a:lstStyle/>
-          <a:p>
-            <a:pPr algn="ctr" indent="0" marL="0">
-              <a:lnSpc>
-                <a:spcPct val="115000"/>
-              </a:lnSpc>
-              <a:buNone/>
-            </a:pPr>
-            <a:r>
-              <a:rPr lang="en-US" sz="1800" b="1" dirty="0">
-                <a:solidFill>
-                  <a:srgbClr val="1B2E4A"/>
-                </a:solidFill>
-                <a:latin typeface="Calibri" pitchFamily="34" charset="0"/>
-                <a:ea typeface="Calibri" pitchFamily="34" charset="-122"/>
-                <a:cs typeface="Calibri" pitchFamily="34" charset="-120"/>
-              </a:rPr>
-              <a:t>Разбор → шаблон</a:t>
-            </a:r>
-            <a:endParaRPr lang="en-US" sz="1800" dirty="0"/>
-          </a:p>
-          <a:p>
-            <a:pPr algn="ctr" indent="0" marL="0">
-              <a:lnSpc>
-                <a:spcPct val="115000"/>
-              </a:lnSpc>
-              <a:buNone/>
-            </a:pPr>
-            <a:r>
-              <a:rPr lang="en-US" sz="1800" b="1" dirty="0">
-                <a:solidFill>
-                  <a:srgbClr val="1B2E4A"/>
-                </a:solidFill>
-                <a:latin typeface="Calibri" pitchFamily="34" charset="0"/>
-                <a:ea typeface="Calibri" pitchFamily="34" charset="-122"/>
-                <a:cs typeface="Calibri" pitchFamily="34" charset="-120"/>
-              </a:rPr>
-              <a:t>→ LLM</a:t>
-            </a:r>
-            <a:endParaRPr lang="en-US" sz="1800" dirty="0"/>
-          </a:p>
-        </p:txBody>
-      </p:sp>
-      <p:sp>
-        <p:nvSpPr>
-          <p:cNvPr id="12" name="Text 10"/>
-          <p:cNvSpPr txBox="1"/>
-          <p:nvPr/>
-        </p:nvSpPr>
-        <p:spPr>
-          <a:xfrm>
-            <a:off x="8723376" y="2057400"/>
-            <a:ext cx="274320" cy="1234440"/>
-          </a:xfrm>
-          <a:prstGeom prst="rect">
-            <a:avLst/>
-          </a:prstGeom>
-          <a:noFill/>
-          <a:ln/>
-        </p:spPr>
-        <p:txBody>
-          <a:bodyPr wrap="square" lIns="0" tIns="0" rIns="0" bIns="0" rtlCol="0" anchor="ctr"/>
-          <a:lstStyle/>
-          <a:p>
-            <a:pPr algn="ctr" indent="0" marL="0">
-              <a:buNone/>
-            </a:pPr>
-            <a:r>
-              <a:rPr lang="en-US" sz="2400" b="1" dirty="0">
-                <a:solidFill>
-                  <a:srgbClr val="C3CDD9"/>
-                </a:solidFill>
-                <a:latin typeface="Calibri" pitchFamily="34" charset="0"/>
-                <a:ea typeface="Calibri" pitchFamily="34" charset="-122"/>
-                <a:cs typeface="Calibri" pitchFamily="34" charset="-120"/>
-              </a:rPr>
-              <a:t>›</a:t>
-            </a:r>
-            <a:endParaRPr lang="en-US" sz="2400" dirty="0"/>
-          </a:p>
-        </p:txBody>
-      </p:sp>
-      <p:sp>
-        <p:nvSpPr>
-          <p:cNvPr id="13" name="Shape 11"/>
-          <p:cNvSpPr/>
-          <p:nvPr/>
-        </p:nvSpPr>
-        <p:spPr>
-          <a:xfrm>
-            <a:off x="8997696" y="2057400"/>
-            <a:ext cx="2505456" cy="1234440"/>
-          </a:xfrm>
-          <a:prstGeom prst="roundRect">
-            <a:avLst>
-              <a:gd name="adj" fmla="val 7407"/>
-            </a:avLst>
-          </a:prstGeom>
-          <a:solidFill>
-            <a:srgbClr val="E9F4EF"/>
-          </a:solidFill>
-          <a:ln w="19050">
-            <a:solidFill>
-              <a:srgbClr val="2E7D5B"/>
-            </a:solidFill>
-            <a:prstDash val="solid"/>
-          </a:ln>
-        </p:spPr>
-      </p:sp>
-      <p:sp>
-        <p:nvSpPr>
-          <p:cNvPr id="14" name="Text 12"/>
-          <p:cNvSpPr txBox="1"/>
-          <p:nvPr/>
-        </p:nvSpPr>
-        <p:spPr>
-          <a:xfrm>
-            <a:off x="9089136" y="2057400"/>
-            <a:ext cx="2322576" cy="1234440"/>
-          </a:xfrm>
-          <a:prstGeom prst="rect">
-            <a:avLst/>
-          </a:prstGeom>
-          <a:noFill/>
-          <a:ln/>
-        </p:spPr>
-        <p:txBody>
-          <a:bodyPr wrap="square" lIns="0" tIns="0" rIns="0" bIns="0" rtlCol="0" anchor="ctr">
-            <a:normAutofit/>
-          </a:bodyPr>
-          <a:lstStyle/>
-          <a:p>
-            <a:pPr algn="ctr" indent="0" marL="0">
-              <a:lnSpc>
-                <a:spcPct val="115000"/>
-              </a:lnSpc>
-              <a:buNone/>
-            </a:pPr>
-            <a:r>
-              <a:rPr lang="en-US" sz="1800" b="1" dirty="0">
-                <a:solidFill>
-                  <a:srgbClr val="1F5C44"/>
-                </a:solidFill>
-                <a:latin typeface="Calibri" pitchFamily="34" charset="0"/>
-                <a:ea typeface="Calibri" pitchFamily="34" charset="-122"/>
-                <a:cs typeface="Calibri" pitchFamily="34" charset="-120"/>
-              </a:rPr>
-              <a:t>Замечания</a:t>
-            </a:r>
-            <a:endParaRPr lang="en-US" sz="1800" dirty="0"/>
-          </a:p>
-          <a:p>
-            <a:pPr algn="ctr" indent="0" marL="0">
-              <a:lnSpc>
-                <a:spcPct val="115000"/>
-              </a:lnSpc>
-              <a:buNone/>
-            </a:pPr>
-            <a:r>
-              <a:rPr lang="en-US" sz="1800" b="1" dirty="0">
-                <a:solidFill>
-                  <a:srgbClr val="1F5C44"/>
-                </a:solidFill>
-                <a:latin typeface="Calibri" pitchFamily="34" charset="0"/>
-                <a:ea typeface="Calibri" pitchFamily="34" charset="-122"/>
-                <a:cs typeface="Calibri" pitchFamily="34" charset="-120"/>
-              </a:rPr>
-              <a:t>с цитатами</a:t>
-            </a:r>
-            <a:endParaRPr lang="en-US" sz="1800" dirty="0"/>
-          </a:p>
-        </p:txBody>
-      </p:sp>
-      <p:sp>
-        <p:nvSpPr>
-          <p:cNvPr id="15" name="Shape 13"/>
-          <p:cNvSpPr/>
-          <p:nvPr/>
-        </p:nvSpPr>
-        <p:spPr>
-          <a:xfrm>
-            <a:off x="822960" y="3703320"/>
-            <a:ext cx="10515600" cy="3083560"/>
-          </a:xfrm>
-          <a:prstGeom prst="roundRect">
-            <a:avLst>
-              <a:gd name="adj" fmla="val 1483"/>
+              <a:gd name="adj" fmla="val 938"/>
             </a:avLst>
           </a:prstGeom>
           <a:solidFill>
@@ -3124,7 +2732,7 @@
       </p:sp>
       <p:pic>
         <p:nvPicPr>
-          <p:cNvPr id="16" name="Image 0" descr="C:\Masaüstü\tz-reviewer\presentation\assets\ui-result.png">    </p:cNvPr>
+          <p:cNvPr id="5" name="Image 0" descr="C:\Masaüstü\tz-reviewer\presentation\assets\full-input.png">    </p:cNvPr>
           <p:cNvPicPr>
             <a:picLocks noChangeAspect="1"/>
           </p:cNvPicPr>
@@ -3138,8 +2746,8 @@
         </p:blipFill>
         <p:spPr>
           <a:xfrm>
-            <a:off x="868680" y="3749040"/>
-            <a:ext cx="10424160" cy="2992120"/>
+            <a:off x="1234440" y="1783080"/>
+            <a:ext cx="9692640" cy="4781702"/>
           </a:xfrm>
           <a:prstGeom prst="rect">
             <a:avLst/>
@@ -3148,7 +2756,7 @@
       </p:pic>
       <p:sp>
         <p:nvSpPr>
-          <p:cNvPr id="17" name="Text 14"/>
+          <p:cNvPr id="6" name="Text 3"/>
           <p:cNvSpPr txBox="1"/>
           <p:nvPr/>
         </p:nvSpPr>
@@ -3250,7 +2858,7 @@
                 <a:ea typeface="Calibri" pitchFamily="34" charset="-122"/>
                 <a:cs typeface="Calibri" pitchFamily="34" charset="-120"/>
               </a:rPr>
-              <a:t>ЧТО НАХОДИТ · 1</a:t>
+              <a:t>ДЕМО</a:t>
             </a:r>
             <a:endParaRPr lang="en-US" sz="1150" dirty="0"/>
           </a:p>
@@ -3294,7 +2902,7 @@
                 <a:ea typeface="Cambria" pitchFamily="34" charset="-122"/>
                 <a:cs typeface="Cambria" pitchFamily="34" charset="-120"/>
               </a:rPr>
-              <a:t>Противоречие внутри одного документа</a:t>
+              <a:t>Загрузил ТЗ — получил замечания с цитатами</a:t>
             </a:r>
             <a:endParaRPr lang="en-US" sz="3200" dirty="0"/>
           </a:p>
@@ -3308,12 +2916,493 @@
         </p:nvSpPr>
         <p:spPr>
           <a:xfrm>
-            <a:off x="822960" y="1965960"/>
-            <a:ext cx="10515600" cy="4028224"/>
+            <a:off x="658368" y="2057400"/>
+            <a:ext cx="2505456" cy="1234440"/>
           </a:xfrm>
           <a:prstGeom prst="roundRect">
             <a:avLst>
-              <a:gd name="adj" fmla="val 1135"/>
+              <a:gd name="adj" fmla="val 7407"/>
+            </a:avLst>
+          </a:prstGeom>
+          <a:solidFill>
+            <a:srgbClr val="F4F7FA"/>
+          </a:solidFill>
+          <a:ln w="12700">
+            <a:solidFill>
+              <a:srgbClr val="E2E8F0"/>
+            </a:solidFill>
+            <a:prstDash val="solid"/>
+          </a:ln>
+        </p:spPr>
+      </p:sp>
+      <p:sp>
+        <p:nvSpPr>
+          <p:cNvPr id="5" name="Text 3"/>
+          <p:cNvSpPr txBox="1"/>
+          <p:nvPr/>
+        </p:nvSpPr>
+        <p:spPr>
+          <a:xfrm>
+            <a:off x="749808" y="2057400"/>
+            <a:ext cx="2322576" cy="1234440"/>
+          </a:xfrm>
+          <a:prstGeom prst="rect">
+            <a:avLst/>
+          </a:prstGeom>
+          <a:noFill/>
+          <a:ln/>
+        </p:spPr>
+        <p:txBody>
+          <a:bodyPr wrap="square" lIns="0" tIns="0" rIns="0" bIns="0" rtlCol="0" anchor="ctr">
+            <a:normAutofit/>
+          </a:bodyPr>
+          <a:lstStyle/>
+          <a:p>
+            <a:pPr algn="ctr" indent="0" marL="0">
+              <a:lnSpc>
+                <a:spcPct val="115000"/>
+              </a:lnSpc>
+              <a:buNone/>
+            </a:pPr>
+            <a:r>
+              <a:rPr lang="en-US" sz="1800" b="1" dirty="0">
+                <a:solidFill>
+                  <a:srgbClr val="1B2E4A"/>
+                </a:solidFill>
+                <a:latin typeface="Calibri" pitchFamily="34" charset="0"/>
+                <a:ea typeface="Calibri" pitchFamily="34" charset="-122"/>
+                <a:cs typeface="Calibri" pitchFamily="34" charset="-120"/>
+              </a:rPr>
+              <a:t>Аналитик</a:t>
+            </a:r>
+            <a:endParaRPr lang="en-US" sz="1800" dirty="0"/>
+          </a:p>
+          <a:p>
+            <a:pPr algn="ctr" indent="0" marL="0">
+              <a:lnSpc>
+                <a:spcPct val="115000"/>
+              </a:lnSpc>
+              <a:buNone/>
+            </a:pPr>
+            <a:r>
+              <a:rPr lang="en-US" sz="1800" b="1" dirty="0">
+                <a:solidFill>
+                  <a:srgbClr val="1B2E4A"/>
+                </a:solidFill>
+                <a:latin typeface="Calibri" pitchFamily="34" charset="0"/>
+                <a:ea typeface="Calibri" pitchFamily="34" charset="-122"/>
+                <a:cs typeface="Calibri" pitchFamily="34" charset="-120"/>
+              </a:rPr>
+              <a:t>загружает ТЗ</a:t>
+            </a:r>
+            <a:endParaRPr lang="en-US" sz="1800" dirty="0"/>
+          </a:p>
+        </p:txBody>
+      </p:sp>
+      <p:sp>
+        <p:nvSpPr>
+          <p:cNvPr id="6" name="Text 4"/>
+          <p:cNvSpPr txBox="1"/>
+          <p:nvPr/>
+        </p:nvSpPr>
+        <p:spPr>
+          <a:xfrm>
+            <a:off x="3163824" y="2057400"/>
+            <a:ext cx="274320" cy="1234440"/>
+          </a:xfrm>
+          <a:prstGeom prst="rect">
+            <a:avLst/>
+          </a:prstGeom>
+          <a:noFill/>
+          <a:ln/>
+        </p:spPr>
+        <p:txBody>
+          <a:bodyPr wrap="square" lIns="0" tIns="0" rIns="0" bIns="0" rtlCol="0" anchor="ctr"/>
+          <a:lstStyle/>
+          <a:p>
+            <a:pPr algn="ctr" indent="0" marL="0">
+              <a:buNone/>
+            </a:pPr>
+            <a:r>
+              <a:rPr lang="en-US" sz="2400" b="1" dirty="0">
+                <a:solidFill>
+                  <a:srgbClr val="C3CDD9"/>
+                </a:solidFill>
+                <a:latin typeface="Calibri" pitchFamily="34" charset="0"/>
+                <a:ea typeface="Calibri" pitchFamily="34" charset="-122"/>
+                <a:cs typeface="Calibri" pitchFamily="34" charset="-120"/>
+              </a:rPr>
+              <a:t>›</a:t>
+            </a:r>
+            <a:endParaRPr lang="en-US" sz="2400" dirty="0"/>
+          </a:p>
+        </p:txBody>
+      </p:sp>
+      <p:sp>
+        <p:nvSpPr>
+          <p:cNvPr id="7" name="Shape 5"/>
+          <p:cNvSpPr/>
+          <p:nvPr/>
+        </p:nvSpPr>
+        <p:spPr>
+          <a:xfrm>
+            <a:off x="3438144" y="2057400"/>
+            <a:ext cx="2505456" cy="1234440"/>
+          </a:xfrm>
+          <a:prstGeom prst="roundRect">
+            <a:avLst>
+              <a:gd name="adj" fmla="val 7407"/>
+            </a:avLst>
+          </a:prstGeom>
+          <a:solidFill>
+            <a:srgbClr val="F4F7FA"/>
+          </a:solidFill>
+          <a:ln w="12700">
+            <a:solidFill>
+              <a:srgbClr val="E2E8F0"/>
+            </a:solidFill>
+            <a:prstDash val="solid"/>
+          </a:ln>
+        </p:spPr>
+      </p:sp>
+      <p:sp>
+        <p:nvSpPr>
+          <p:cNvPr id="8" name="Text 6"/>
+          <p:cNvSpPr txBox="1"/>
+          <p:nvPr/>
+        </p:nvSpPr>
+        <p:spPr>
+          <a:xfrm>
+            <a:off x="3529584" y="2057400"/>
+            <a:ext cx="2322576" cy="1234440"/>
+          </a:xfrm>
+          <a:prstGeom prst="rect">
+            <a:avLst/>
+          </a:prstGeom>
+          <a:noFill/>
+          <a:ln/>
+        </p:spPr>
+        <p:txBody>
+          <a:bodyPr wrap="square" lIns="0" tIns="0" rIns="0" bIns="0" rtlCol="0" anchor="ctr">
+            <a:normAutofit/>
+          </a:bodyPr>
+          <a:lstStyle/>
+          <a:p>
+            <a:pPr algn="ctr" indent="0" marL="0">
+              <a:lnSpc>
+                <a:spcPct val="115000"/>
+              </a:lnSpc>
+              <a:buNone/>
+            </a:pPr>
+            <a:r>
+              <a:rPr lang="en-US" sz="1800" b="1" dirty="0">
+                <a:solidFill>
+                  <a:srgbClr val="1B2E4A"/>
+                </a:solidFill>
+                <a:latin typeface="Calibri" pitchFamily="34" charset="0"/>
+                <a:ea typeface="Calibri" pitchFamily="34" charset="-122"/>
+                <a:cs typeface="Calibri" pitchFamily="34" charset="-120"/>
+              </a:rPr>
+              <a:t>Нажимает</a:t>
+            </a:r>
+            <a:endParaRPr lang="en-US" sz="1800" dirty="0"/>
+          </a:p>
+          <a:p>
+            <a:pPr algn="ctr" indent="0" marL="0">
+              <a:lnSpc>
+                <a:spcPct val="115000"/>
+              </a:lnSpc>
+              <a:buNone/>
+            </a:pPr>
+            <a:r>
+              <a:rPr lang="en-US" sz="1800" b="1" dirty="0">
+                <a:solidFill>
+                  <a:srgbClr val="1B2E4A"/>
+                </a:solidFill>
+                <a:latin typeface="Calibri" pitchFamily="34" charset="0"/>
+                <a:ea typeface="Calibri" pitchFamily="34" charset="-122"/>
+                <a:cs typeface="Calibri" pitchFamily="34" charset="-120"/>
+              </a:rPr>
+              <a:t>«Проверить»</a:t>
+            </a:r>
+            <a:endParaRPr lang="en-US" sz="1800" dirty="0"/>
+          </a:p>
+        </p:txBody>
+      </p:sp>
+      <p:sp>
+        <p:nvSpPr>
+          <p:cNvPr id="9" name="Text 7"/>
+          <p:cNvSpPr txBox="1"/>
+          <p:nvPr/>
+        </p:nvSpPr>
+        <p:spPr>
+          <a:xfrm>
+            <a:off x="5943600" y="2057400"/>
+            <a:ext cx="274320" cy="1234440"/>
+          </a:xfrm>
+          <a:prstGeom prst="rect">
+            <a:avLst/>
+          </a:prstGeom>
+          <a:noFill/>
+          <a:ln/>
+        </p:spPr>
+        <p:txBody>
+          <a:bodyPr wrap="square" lIns="0" tIns="0" rIns="0" bIns="0" rtlCol="0" anchor="ctr"/>
+          <a:lstStyle/>
+          <a:p>
+            <a:pPr algn="ctr" indent="0" marL="0">
+              <a:buNone/>
+            </a:pPr>
+            <a:r>
+              <a:rPr lang="en-US" sz="2400" b="1" dirty="0">
+                <a:solidFill>
+                  <a:srgbClr val="C3CDD9"/>
+                </a:solidFill>
+                <a:latin typeface="Calibri" pitchFamily="34" charset="0"/>
+                <a:ea typeface="Calibri" pitchFamily="34" charset="-122"/>
+                <a:cs typeface="Calibri" pitchFamily="34" charset="-120"/>
+              </a:rPr>
+              <a:t>›</a:t>
+            </a:r>
+            <a:endParaRPr lang="en-US" sz="2400" dirty="0"/>
+          </a:p>
+        </p:txBody>
+      </p:sp>
+      <p:sp>
+        <p:nvSpPr>
+          <p:cNvPr id="10" name="Shape 8"/>
+          <p:cNvSpPr/>
+          <p:nvPr/>
+        </p:nvSpPr>
+        <p:spPr>
+          <a:xfrm>
+            <a:off x="6217920" y="2057400"/>
+            <a:ext cx="2505456" cy="1234440"/>
+          </a:xfrm>
+          <a:prstGeom prst="roundRect">
+            <a:avLst>
+              <a:gd name="adj" fmla="val 7407"/>
+            </a:avLst>
+          </a:prstGeom>
+          <a:solidFill>
+            <a:srgbClr val="F4F7FA"/>
+          </a:solidFill>
+          <a:ln w="12700">
+            <a:solidFill>
+              <a:srgbClr val="E2E8F0"/>
+            </a:solidFill>
+            <a:prstDash val="solid"/>
+          </a:ln>
+        </p:spPr>
+      </p:sp>
+      <p:sp>
+        <p:nvSpPr>
+          <p:cNvPr id="11" name="Text 9"/>
+          <p:cNvSpPr txBox="1"/>
+          <p:nvPr/>
+        </p:nvSpPr>
+        <p:spPr>
+          <a:xfrm>
+            <a:off x="6309360" y="2057400"/>
+            <a:ext cx="2322576" cy="1234440"/>
+          </a:xfrm>
+          <a:prstGeom prst="rect">
+            <a:avLst/>
+          </a:prstGeom>
+          <a:noFill/>
+          <a:ln/>
+        </p:spPr>
+        <p:txBody>
+          <a:bodyPr wrap="square" lIns="0" tIns="0" rIns="0" bIns="0" rtlCol="0" anchor="ctr">
+            <a:normAutofit/>
+          </a:bodyPr>
+          <a:lstStyle/>
+          <a:p>
+            <a:pPr algn="ctr" indent="0" marL="0">
+              <a:lnSpc>
+                <a:spcPct val="115000"/>
+              </a:lnSpc>
+              <a:buNone/>
+            </a:pPr>
+            <a:r>
+              <a:rPr lang="en-US" sz="1800" b="1" dirty="0">
+                <a:solidFill>
+                  <a:srgbClr val="1B2E4A"/>
+                </a:solidFill>
+                <a:latin typeface="Calibri" pitchFamily="34" charset="0"/>
+                <a:ea typeface="Calibri" pitchFamily="34" charset="-122"/>
+                <a:cs typeface="Calibri" pitchFamily="34" charset="-120"/>
+              </a:rPr>
+              <a:t>Разбор → шаблон</a:t>
+            </a:r>
+            <a:endParaRPr lang="en-US" sz="1800" dirty="0"/>
+          </a:p>
+          <a:p>
+            <a:pPr algn="ctr" indent="0" marL="0">
+              <a:lnSpc>
+                <a:spcPct val="115000"/>
+              </a:lnSpc>
+              <a:buNone/>
+            </a:pPr>
+            <a:r>
+              <a:rPr lang="en-US" sz="1800" b="1" dirty="0">
+                <a:solidFill>
+                  <a:srgbClr val="1B2E4A"/>
+                </a:solidFill>
+                <a:latin typeface="Calibri" pitchFamily="34" charset="0"/>
+                <a:ea typeface="Calibri" pitchFamily="34" charset="-122"/>
+                <a:cs typeface="Calibri" pitchFamily="34" charset="-120"/>
+              </a:rPr>
+              <a:t>→ LLM</a:t>
+            </a:r>
+            <a:endParaRPr lang="en-US" sz="1800" dirty="0"/>
+          </a:p>
+        </p:txBody>
+      </p:sp>
+      <p:sp>
+        <p:nvSpPr>
+          <p:cNvPr id="12" name="Text 10"/>
+          <p:cNvSpPr txBox="1"/>
+          <p:nvPr/>
+        </p:nvSpPr>
+        <p:spPr>
+          <a:xfrm>
+            <a:off x="8723376" y="2057400"/>
+            <a:ext cx="274320" cy="1234440"/>
+          </a:xfrm>
+          <a:prstGeom prst="rect">
+            <a:avLst/>
+          </a:prstGeom>
+          <a:noFill/>
+          <a:ln/>
+        </p:spPr>
+        <p:txBody>
+          <a:bodyPr wrap="square" lIns="0" tIns="0" rIns="0" bIns="0" rtlCol="0" anchor="ctr"/>
+          <a:lstStyle/>
+          <a:p>
+            <a:pPr algn="ctr" indent="0" marL="0">
+              <a:buNone/>
+            </a:pPr>
+            <a:r>
+              <a:rPr lang="en-US" sz="2400" b="1" dirty="0">
+                <a:solidFill>
+                  <a:srgbClr val="C3CDD9"/>
+                </a:solidFill>
+                <a:latin typeface="Calibri" pitchFamily="34" charset="0"/>
+                <a:ea typeface="Calibri" pitchFamily="34" charset="-122"/>
+                <a:cs typeface="Calibri" pitchFamily="34" charset="-120"/>
+              </a:rPr>
+              <a:t>›</a:t>
+            </a:r>
+            <a:endParaRPr lang="en-US" sz="2400" dirty="0"/>
+          </a:p>
+        </p:txBody>
+      </p:sp>
+      <p:sp>
+        <p:nvSpPr>
+          <p:cNvPr id="13" name="Shape 11"/>
+          <p:cNvSpPr/>
+          <p:nvPr/>
+        </p:nvSpPr>
+        <p:spPr>
+          <a:xfrm>
+            <a:off x="8997696" y="2057400"/>
+            <a:ext cx="2505456" cy="1234440"/>
+          </a:xfrm>
+          <a:prstGeom prst="roundRect">
+            <a:avLst>
+              <a:gd name="adj" fmla="val 7407"/>
+            </a:avLst>
+          </a:prstGeom>
+          <a:solidFill>
+            <a:srgbClr val="E9F4EF"/>
+          </a:solidFill>
+          <a:ln w="19050">
+            <a:solidFill>
+              <a:srgbClr val="2E7D5B"/>
+            </a:solidFill>
+            <a:prstDash val="solid"/>
+          </a:ln>
+        </p:spPr>
+      </p:sp>
+      <p:sp>
+        <p:nvSpPr>
+          <p:cNvPr id="14" name="Text 12"/>
+          <p:cNvSpPr txBox="1"/>
+          <p:nvPr/>
+        </p:nvSpPr>
+        <p:spPr>
+          <a:xfrm>
+            <a:off x="9089136" y="2057400"/>
+            <a:ext cx="2322576" cy="1234440"/>
+          </a:xfrm>
+          <a:prstGeom prst="rect">
+            <a:avLst/>
+          </a:prstGeom>
+          <a:noFill/>
+          <a:ln/>
+        </p:spPr>
+        <p:txBody>
+          <a:bodyPr wrap="square" lIns="0" tIns="0" rIns="0" bIns="0" rtlCol="0" anchor="ctr">
+            <a:normAutofit/>
+          </a:bodyPr>
+          <a:lstStyle/>
+          <a:p>
+            <a:pPr algn="ctr" indent="0" marL="0">
+              <a:lnSpc>
+                <a:spcPct val="115000"/>
+              </a:lnSpc>
+              <a:buNone/>
+            </a:pPr>
+            <a:r>
+              <a:rPr lang="en-US" sz="1800" b="1" dirty="0">
+                <a:solidFill>
+                  <a:srgbClr val="1F5C44"/>
+                </a:solidFill>
+                <a:latin typeface="Calibri" pitchFamily="34" charset="0"/>
+                <a:ea typeface="Calibri" pitchFamily="34" charset="-122"/>
+                <a:cs typeface="Calibri" pitchFamily="34" charset="-120"/>
+              </a:rPr>
+              <a:t>Замечания</a:t>
+            </a:r>
+            <a:endParaRPr lang="en-US" sz="1800" dirty="0"/>
+          </a:p>
+          <a:p>
+            <a:pPr algn="ctr" indent="0" marL="0">
+              <a:lnSpc>
+                <a:spcPct val="115000"/>
+              </a:lnSpc>
+              <a:buNone/>
+            </a:pPr>
+            <a:r>
+              <a:rPr lang="en-US" sz="1800" b="1" dirty="0">
+                <a:solidFill>
+                  <a:srgbClr val="1F5C44"/>
+                </a:solidFill>
+                <a:latin typeface="Calibri" pitchFamily="34" charset="0"/>
+                <a:ea typeface="Calibri" pitchFamily="34" charset="-122"/>
+                <a:cs typeface="Calibri" pitchFamily="34" charset="-120"/>
+              </a:rPr>
+              <a:t>с цитатами</a:t>
+            </a:r>
+            <a:endParaRPr lang="en-US" sz="1800" dirty="0"/>
+          </a:p>
+        </p:txBody>
+      </p:sp>
+      <p:sp>
+        <p:nvSpPr>
+          <p:cNvPr id="15" name="Shape 13"/>
+          <p:cNvSpPr/>
+          <p:nvPr/>
+        </p:nvSpPr>
+        <p:spPr>
+          <a:xfrm>
+            <a:off x="822960" y="3703320"/>
+            <a:ext cx="10515600" cy="3083560"/>
+          </a:xfrm>
+          <a:prstGeom prst="roundRect">
+            <a:avLst>
+              <a:gd name="adj" fmla="val 1483"/>
             </a:avLst>
           </a:prstGeom>
           <a:solidFill>
@@ -3336,7 +3425,7 @@
       </p:sp>
       <p:pic>
         <p:nvPicPr>
-          <p:cNvPr id="5" name="Image 0" descr="C:\Masaüstü\tz-reviewer\presentation\assets\llm-output.png">    </p:cNvPr>
+          <p:cNvPr id="16" name="Image 0" descr="C:\Masaüstü\tz-reviewer\presentation\assets\ui-result.png">    </p:cNvPr>
           <p:cNvPicPr>
             <a:picLocks noChangeAspect="1"/>
           </p:cNvPicPr>
@@ -3350,8 +3439,8 @@
         </p:blipFill>
         <p:spPr>
           <a:xfrm>
-            <a:off x="868680" y="2011680"/>
-            <a:ext cx="10424160" cy="3936784"/>
+            <a:off x="868680" y="3749040"/>
+            <a:ext cx="10424160" cy="2992120"/>
           </a:xfrm>
           <a:prstGeom prst="rect">
             <a:avLst/>
@@ -3360,7 +3449,7 @@
       </p:pic>
       <p:sp>
         <p:nvSpPr>
-          <p:cNvPr id="6" name="Text 3"/>
+          <p:cNvPr id="17" name="Text 14"/>
           <p:cNvSpPr txBox="1"/>
           <p:nvPr/>
         </p:nvSpPr>
@@ -3462,7 +3551,7 @@
                 <a:ea typeface="Calibri" pitchFamily="34" charset="-122"/>
                 <a:cs typeface="Calibri" pitchFamily="34" charset="-120"/>
               </a:rPr>
-              <a:t>ИНТЕРФЕЙС</a:t>
+              <a:t>ЧТО НАХОДИТ · 1</a:t>
             </a:r>
             <a:endParaRPr lang="en-US" sz="1150" dirty="0"/>
           </a:p>
@@ -3506,7 +3595,7 @@
                 <a:ea typeface="Cambria" pitchFamily="34" charset="-122"/>
                 <a:cs typeface="Cambria" pitchFamily="34" charset="-120"/>
               </a:rPr>
-              <a:t>Каждое замечание раскрывается до цитаты и вопроса</a:t>
+              <a:t>Противоречие внутри одного документа</a:t>
             </a:r>
             <a:endParaRPr lang="en-US" sz="3200" dirty="0"/>
           </a:p>
@@ -3520,12 +3609,12 @@
         </p:nvSpPr>
         <p:spPr>
           <a:xfrm>
-            <a:off x="1188720" y="1965960"/>
-            <a:ext cx="9784080" cy="4617720"/>
+            <a:off x="822960" y="1965960"/>
+            <a:ext cx="10515600" cy="4028224"/>
           </a:xfrm>
           <a:prstGeom prst="roundRect">
             <a:avLst>
-              <a:gd name="adj" fmla="val 990"/>
+              <a:gd name="adj" fmla="val 1135"/>
             </a:avLst>
           </a:prstGeom>
           <a:solidFill>
@@ -3548,7 +3637,7 @@
       </p:sp>
       <p:pic>
         <p:nvPicPr>
-          <p:cNvPr id="5" name="Image 0" descr="C:\Masaüstü\tz-reviewer\presentation\assets\ui-findings.png">    </p:cNvPr>
+          <p:cNvPr id="5" name="Image 0" descr="C:\Masaüstü\tz-reviewer\presentation\assets\llm-output.png">    </p:cNvPr>
           <p:cNvPicPr>
             <a:picLocks noChangeAspect="1"/>
           </p:cNvPicPr>
@@ -3562,8 +3651,8 @@
         </p:blipFill>
         <p:spPr>
           <a:xfrm>
-            <a:off x="1234440" y="2011680"/>
-            <a:ext cx="9692640" cy="4526280"/>
+            <a:off x="868680" y="2011680"/>
+            <a:ext cx="10424160" cy="3936784"/>
           </a:xfrm>
           <a:prstGeom prst="rect">
             <a:avLst/>
@@ -3674,7 +3763,7 @@
                 <a:ea typeface="Calibri" pitchFamily="34" charset="-122"/>
                 <a:cs typeface="Calibri" pitchFamily="34" charset="-120"/>
               </a:rPr>
-              <a:t>ВТОРОЙ РЕЗУЛЬТАТ</a:t>
+              <a:t>ИНТЕРФЕЙС</a:t>
             </a:r>
             <a:endParaRPr lang="en-US" sz="1150" dirty="0"/>
           </a:p>
@@ -3718,7 +3807,7 @@
                 <a:ea typeface="Cambria" pitchFamily="34" charset="-122"/>
                 <a:cs typeface="Cambria" pitchFamily="34" charset="-120"/>
               </a:rPr>
-              <a:t>Проверка структуры по официальному шаблону МТС</a:t>
+              <a:t>Каждое замечание раскрывается до цитаты и вопроса</a:t>
             </a:r>
             <a:endParaRPr lang="en-US" sz="3200" dirty="0"/>
           </a:p>
@@ -3732,12 +3821,12 @@
         </p:nvSpPr>
         <p:spPr>
           <a:xfrm>
-            <a:off x="1005840" y="2148840"/>
-            <a:ext cx="10149840" cy="3792172"/>
+            <a:off x="1188720" y="1965960"/>
+            <a:ext cx="9784080" cy="4617720"/>
           </a:xfrm>
           <a:prstGeom prst="roundRect">
             <a:avLst>
-              <a:gd name="adj" fmla="val 1206"/>
+              <a:gd name="adj" fmla="val 990"/>
             </a:avLst>
           </a:prstGeom>
           <a:solidFill>
@@ -3760,7 +3849,7 @@
       </p:sp>
       <p:pic>
         <p:nvPicPr>
-          <p:cNvPr id="5" name="Image 0" descr="C:\Masaüstü\tz-reviewer\presentation\assets\ui-coverage.png">    </p:cNvPr>
+          <p:cNvPr id="5" name="Image 0" descr="C:\Masaüstü\tz-reviewer\presentation\assets\ui-findings.png">    </p:cNvPr>
           <p:cNvPicPr>
             <a:picLocks noChangeAspect="1"/>
           </p:cNvPicPr>
@@ -3774,8 +3863,8 @@
         </p:blipFill>
         <p:spPr>
           <a:xfrm>
-            <a:off x="1051560" y="2194560"/>
-            <a:ext cx="10058400" cy="3700732"/>
+            <a:off x="1234440" y="2011680"/>
+            <a:ext cx="9692640" cy="4526280"/>
           </a:xfrm>
           <a:prstGeom prst="rect">
             <a:avLst/>
@@ -3886,7 +3975,7 @@
                 <a:ea typeface="Calibri" pitchFamily="34" charset="-122"/>
                 <a:cs typeface="Calibri" pitchFamily="34" charset="-120"/>
               </a:rPr>
-              <a:t>АРХИТЕКТУРА</a:t>
+              <a:t>ВТОРОЙ РЕЗУЛЬТАТ</a:t>
             </a:r>
             <a:endParaRPr lang="en-US" sz="1150" dirty="0"/>
           </a:p>
@@ -3930,7 +4019,7 @@
                 <a:ea typeface="Cambria" pitchFamily="34" charset="-122"/>
                 <a:cs typeface="Cambria" pitchFamily="34" charset="-120"/>
               </a:rPr>
-              <a:t>Три слоя — и LLM только один из них</a:t>
+              <a:t>Проверка структуры по официальному шаблону МТС</a:t>
             </a:r>
             <a:endParaRPr lang="en-US" sz="3200" dirty="0"/>
           </a:p>
@@ -3944,16 +4033,16 @@
         </p:nvSpPr>
         <p:spPr>
           <a:xfrm>
-            <a:off x="658368" y="2103120"/>
-            <a:ext cx="3407664" cy="2148840"/>
+            <a:off x="1005840" y="2148840"/>
+            <a:ext cx="10149840" cy="3792172"/>
           </a:xfrm>
           <a:prstGeom prst="roundRect">
             <a:avLst>
-              <a:gd name="adj" fmla="val 4255"/>
+              <a:gd name="adj" fmla="val 1206"/>
             </a:avLst>
           </a:prstGeom>
           <a:solidFill>
-            <a:srgbClr val="F4F7FA"/>
+            <a:srgbClr val="FFFFFF"/>
           </a:solidFill>
           <a:ln w="12700">
             <a:solidFill>
@@ -3961,527 +4050,42 @@
             </a:solidFill>
             <a:prstDash val="solid"/>
           </a:ln>
-        </p:spPr>
-      </p:sp>
-      <p:sp>
-        <p:nvSpPr>
-          <p:cNvPr id="5" name="Text 3"/>
-          <p:cNvSpPr txBox="1"/>
-          <p:nvPr/>
-        </p:nvSpPr>
-        <p:spPr>
-          <a:xfrm>
-            <a:off x="914400" y="2304288"/>
-            <a:ext cx="2895600" cy="384048"/>
-          </a:xfrm>
-          <a:prstGeom prst="rect">
-            <a:avLst/>
-          </a:prstGeom>
-          <a:noFill/>
-          <a:ln/>
-        </p:spPr>
-        <p:txBody>
-          <a:bodyPr wrap="square" lIns="0" tIns="0" rIns="0" bIns="0" rtlCol="0" anchor="t"/>
-          <a:lstStyle/>
-          <a:p>
-            <a:pPr indent="0" marL="0">
-              <a:buNone/>
-            </a:pPr>
-            <a:r>
-              <a:rPr lang="en-US" sz="2200" b="1" dirty="0">
-                <a:solidFill>
-                  <a:srgbClr val="B9C4D2"/>
-                </a:solidFill>
-                <a:latin typeface="Cambria" pitchFamily="34" charset="0"/>
-                <a:ea typeface="Cambria" pitchFamily="34" charset="-122"/>
-                <a:cs typeface="Cambria" pitchFamily="34" charset="-120"/>
-              </a:rPr>
-              <a:t>01</a:t>
-            </a:r>
-            <a:endParaRPr lang="en-US" sz="2200" dirty="0"/>
-          </a:p>
-        </p:txBody>
-      </p:sp>
-      <p:sp>
-        <p:nvSpPr>
-          <p:cNvPr id="6" name="Text 4"/>
-          <p:cNvSpPr txBox="1"/>
-          <p:nvPr/>
-        </p:nvSpPr>
-        <p:spPr>
-          <a:xfrm>
-            <a:off x="914400" y="2743200"/>
-            <a:ext cx="2895600" cy="365760"/>
-          </a:xfrm>
-          <a:prstGeom prst="rect">
-            <a:avLst/>
-          </a:prstGeom>
-          <a:noFill/>
-          <a:ln/>
-        </p:spPr>
-        <p:txBody>
-          <a:bodyPr wrap="square" lIns="0" tIns="0" rIns="0" bIns="0" rtlCol="0" anchor="t"/>
-          <a:lstStyle/>
-          <a:p>
-            <a:pPr indent="0" marL="0">
-              <a:buNone/>
-            </a:pPr>
-            <a:r>
-              <a:rPr lang="en-US" sz="2100" b="1" dirty="0">
-                <a:solidFill>
-                  <a:srgbClr val="0E1B2E"/>
-                </a:solidFill>
-                <a:latin typeface="Calibri" pitchFamily="34" charset="0"/>
-                <a:ea typeface="Calibri" pitchFamily="34" charset="-122"/>
-                <a:cs typeface="Calibri" pitchFamily="34" charset="-120"/>
-              </a:rPr>
-              <a:t>Разбор документа</a:t>
-            </a:r>
-            <a:endParaRPr lang="en-US" sz="2100" dirty="0"/>
-          </a:p>
-        </p:txBody>
-      </p:sp>
-      <p:sp>
-        <p:nvSpPr>
-          <p:cNvPr id="7" name="Text 5"/>
-          <p:cNvSpPr txBox="1"/>
-          <p:nvPr/>
-        </p:nvSpPr>
-        <p:spPr>
-          <a:xfrm>
-            <a:off x="914400" y="3182112"/>
-            <a:ext cx="2895600" cy="868680"/>
-          </a:xfrm>
-          <a:prstGeom prst="rect">
-            <a:avLst/>
-          </a:prstGeom>
-          <a:noFill/>
-          <a:ln/>
-        </p:spPr>
-        <p:txBody>
-          <a:bodyPr wrap="square" lIns="0" tIns="0" rIns="0" bIns="0" rtlCol="0" anchor="t"/>
-          <a:lstStyle/>
-          <a:p>
-            <a:pPr indent="0" marL="0">
-              <a:lnSpc>
-                <a:spcPct val="120000"/>
-              </a:lnSpc>
-              <a:buNone/>
-            </a:pPr>
-            <a:r>
-              <a:rPr lang="en-US" sz="1700" dirty="0">
-                <a:solidFill>
-                  <a:srgbClr val="5A6678"/>
-                </a:solidFill>
-                <a:latin typeface="Calibri" pitchFamily="34" charset="0"/>
-                <a:ea typeface="Calibri" pitchFamily="34" charset="-122"/>
-                <a:cs typeface="Calibri" pitchFamily="34" charset="-120"/>
-              </a:rPr>
-              <a:t>Word и Markdown →</a:t>
-            </a:r>
-            <a:endParaRPr lang="en-US" sz="1700" dirty="0"/>
-          </a:p>
-          <a:p>
-            <a:pPr indent="0" marL="0">
-              <a:lnSpc>
-                <a:spcPct val="120000"/>
-              </a:lnSpc>
-              <a:buNone/>
-            </a:pPr>
-            <a:r>
-              <a:rPr lang="en-US" sz="1700" dirty="0">
-                <a:solidFill>
-                  <a:srgbClr val="5A6678"/>
-                </a:solidFill>
-                <a:latin typeface="Calibri" pitchFamily="34" charset="0"/>
-                <a:ea typeface="Calibri" pitchFamily="34" charset="-122"/>
-                <a:cs typeface="Calibri" pitchFamily="34" charset="-120"/>
-              </a:rPr>
-              <a:t>разделы и таблицы</a:t>
-            </a:r>
-            <a:endParaRPr lang="en-US" sz="1700" dirty="0"/>
-          </a:p>
-        </p:txBody>
-      </p:sp>
-      <p:sp>
-        <p:nvSpPr>
-          <p:cNvPr id="8" name="Shape 6"/>
-          <p:cNvSpPr/>
-          <p:nvPr/>
-        </p:nvSpPr>
-        <p:spPr>
-          <a:xfrm>
-            <a:off x="4376928" y="2103120"/>
-            <a:ext cx="3407664" cy="2148840"/>
-          </a:xfrm>
-          <a:prstGeom prst="roundRect">
-            <a:avLst>
-              <a:gd name="adj" fmla="val 4255"/>
-            </a:avLst>
-          </a:prstGeom>
-          <a:solidFill>
-            <a:srgbClr val="F4F7FA"/>
-          </a:solidFill>
-          <a:ln w="12700">
-            <a:solidFill>
-              <a:srgbClr val="E2E8F0"/>
-            </a:solidFill>
-            <a:prstDash val="solid"/>
-          </a:ln>
-        </p:spPr>
-      </p:sp>
-      <p:sp>
-        <p:nvSpPr>
-          <p:cNvPr id="9" name="Text 7"/>
-          <p:cNvSpPr txBox="1"/>
-          <p:nvPr/>
-        </p:nvSpPr>
-        <p:spPr>
-          <a:xfrm>
-            <a:off x="4632960" y="2304288"/>
-            <a:ext cx="2895600" cy="384048"/>
-          </a:xfrm>
-          <a:prstGeom prst="rect">
-            <a:avLst/>
-          </a:prstGeom>
-          <a:noFill/>
-          <a:ln/>
-        </p:spPr>
-        <p:txBody>
-          <a:bodyPr wrap="square" lIns="0" tIns="0" rIns="0" bIns="0" rtlCol="0" anchor="t"/>
-          <a:lstStyle/>
-          <a:p>
-            <a:pPr indent="0" marL="0">
-              <a:buNone/>
-            </a:pPr>
-            <a:r>
-              <a:rPr lang="en-US" sz="2200" b="1" dirty="0">
-                <a:solidFill>
-                  <a:srgbClr val="B9C4D2"/>
-                </a:solidFill>
-                <a:latin typeface="Cambria" pitchFamily="34" charset="0"/>
-                <a:ea typeface="Cambria" pitchFamily="34" charset="-122"/>
-                <a:cs typeface="Cambria" pitchFamily="34" charset="-120"/>
-              </a:rPr>
-              <a:t>02</a:t>
-            </a:r>
-            <a:endParaRPr lang="en-US" sz="2200" dirty="0"/>
-          </a:p>
-        </p:txBody>
-      </p:sp>
-      <p:sp>
-        <p:nvSpPr>
-          <p:cNvPr id="10" name="Text 8"/>
-          <p:cNvSpPr txBox="1"/>
-          <p:nvPr/>
-        </p:nvSpPr>
-        <p:spPr>
-          <a:xfrm>
-            <a:off x="4632960" y="2743200"/>
-            <a:ext cx="2895600" cy="365760"/>
-          </a:xfrm>
-          <a:prstGeom prst="rect">
-            <a:avLst/>
-          </a:prstGeom>
-          <a:noFill/>
-          <a:ln/>
-        </p:spPr>
-        <p:txBody>
-          <a:bodyPr wrap="square" lIns="0" tIns="0" rIns="0" bIns="0" rtlCol="0" anchor="t"/>
-          <a:lstStyle/>
-          <a:p>
-            <a:pPr indent="0" marL="0">
-              <a:buNone/>
-            </a:pPr>
-            <a:r>
-              <a:rPr lang="en-US" sz="2100" b="1" dirty="0">
-                <a:solidFill>
-                  <a:srgbClr val="0E1B2E"/>
-                </a:solidFill>
-                <a:latin typeface="Calibri" pitchFamily="34" charset="0"/>
-                <a:ea typeface="Calibri" pitchFamily="34" charset="-122"/>
-                <a:cs typeface="Calibri" pitchFamily="34" charset="-120"/>
-              </a:rPr>
-              <a:t>Критерии МТС</a:t>
-            </a:r>
-            <a:endParaRPr lang="en-US" sz="2100" dirty="0"/>
-          </a:p>
-        </p:txBody>
-      </p:sp>
-      <p:sp>
-        <p:nvSpPr>
-          <p:cNvPr id="11" name="Text 9"/>
-          <p:cNvSpPr txBox="1"/>
-          <p:nvPr/>
-        </p:nvSpPr>
-        <p:spPr>
-          <a:xfrm>
-            <a:off x="4632960" y="3182112"/>
-            <a:ext cx="2895600" cy="868680"/>
-          </a:xfrm>
-          <a:prstGeom prst="rect">
-            <a:avLst/>
-          </a:prstGeom>
-          <a:noFill/>
-          <a:ln/>
-        </p:spPr>
-        <p:txBody>
-          <a:bodyPr wrap="square" lIns="0" tIns="0" rIns="0" bIns="0" rtlCol="0" anchor="t"/>
-          <a:lstStyle/>
-          <a:p>
-            <a:pPr indent="0" marL="0">
-              <a:lnSpc>
-                <a:spcPct val="120000"/>
-              </a:lnSpc>
-              <a:buNone/>
-            </a:pPr>
-            <a:r>
-              <a:rPr lang="en-US" sz="1700" dirty="0">
-                <a:solidFill>
-                  <a:srgbClr val="5A6678"/>
-                </a:solidFill>
-                <a:latin typeface="Calibri" pitchFamily="34" charset="0"/>
-                <a:ea typeface="Calibri" pitchFamily="34" charset="-122"/>
-                <a:cs typeface="Calibri" pitchFamily="34" charset="-120"/>
-              </a:rPr>
-              <a:t>21 раздел шаблона +</a:t>
-            </a:r>
-            <a:endParaRPr lang="en-US" sz="1700" dirty="0"/>
-          </a:p>
-          <a:p>
-            <a:pPr indent="0" marL="0">
-              <a:lnSpc>
-                <a:spcPct val="120000"/>
-              </a:lnSpc>
-              <a:buNone/>
-            </a:pPr>
-            <a:r>
-              <a:rPr lang="en-US" sz="1700" dirty="0">
-                <a:solidFill>
-                  <a:srgbClr val="5A6678"/>
-                </a:solidFill>
-                <a:latin typeface="Calibri" pitchFamily="34" charset="0"/>
-                <a:ea typeface="Calibri" pitchFamily="34" charset="-122"/>
-                <a:cs typeface="Calibri" pitchFamily="34" charset="-120"/>
-              </a:rPr>
-              <a:t>8 требований кейса</a:t>
-            </a:r>
-            <a:endParaRPr lang="en-US" sz="1700" dirty="0"/>
-          </a:p>
-        </p:txBody>
-      </p:sp>
-      <p:sp>
-        <p:nvSpPr>
-          <p:cNvPr id="12" name="Shape 10"/>
-          <p:cNvSpPr/>
-          <p:nvPr/>
-        </p:nvSpPr>
-        <p:spPr>
-          <a:xfrm>
-            <a:off x="8095488" y="2103120"/>
-            <a:ext cx="3407664" cy="2148840"/>
-          </a:xfrm>
-          <a:prstGeom prst="roundRect">
-            <a:avLst>
-              <a:gd name="adj" fmla="val 4255"/>
-            </a:avLst>
-          </a:prstGeom>
-          <a:solidFill>
-            <a:srgbClr val="FBF3E4"/>
-          </a:solidFill>
-          <a:ln w="19050">
-            <a:solidFill>
-              <a:srgbClr val="C8791A"/>
-            </a:solidFill>
-            <a:prstDash val="solid"/>
-          </a:ln>
-        </p:spPr>
-      </p:sp>
-      <p:sp>
-        <p:nvSpPr>
-          <p:cNvPr id="13" name="Text 11"/>
-          <p:cNvSpPr txBox="1"/>
-          <p:nvPr/>
-        </p:nvSpPr>
-        <p:spPr>
-          <a:xfrm>
-            <a:off x="8351520" y="2304288"/>
-            <a:ext cx="2895600" cy="384048"/>
-          </a:xfrm>
-          <a:prstGeom prst="rect">
-            <a:avLst/>
-          </a:prstGeom>
-          <a:noFill/>
-          <a:ln/>
-        </p:spPr>
-        <p:txBody>
-          <a:bodyPr wrap="square" lIns="0" tIns="0" rIns="0" bIns="0" rtlCol="0" anchor="t"/>
-          <a:lstStyle/>
-          <a:p>
-            <a:pPr indent="0" marL="0">
-              <a:buNone/>
-            </a:pPr>
-            <a:r>
-              <a:rPr lang="en-US" sz="2200" b="1" dirty="0">
-                <a:solidFill>
-                  <a:srgbClr val="C8791A"/>
-                </a:solidFill>
-                <a:latin typeface="Cambria" pitchFamily="34" charset="0"/>
-                <a:ea typeface="Cambria" pitchFamily="34" charset="-122"/>
-                <a:cs typeface="Cambria" pitchFamily="34" charset="-120"/>
-              </a:rPr>
-              <a:t>03</a:t>
-            </a:r>
-            <a:endParaRPr lang="en-US" sz="2200" dirty="0"/>
-          </a:p>
-        </p:txBody>
-      </p:sp>
-      <p:sp>
-        <p:nvSpPr>
-          <p:cNvPr id="14" name="Text 12"/>
-          <p:cNvSpPr txBox="1"/>
-          <p:nvPr/>
-        </p:nvSpPr>
-        <p:spPr>
-          <a:xfrm>
-            <a:off x="8351520" y="2743200"/>
-            <a:ext cx="2895600" cy="365760"/>
-          </a:xfrm>
-          <a:prstGeom prst="rect">
-            <a:avLst/>
-          </a:prstGeom>
-          <a:noFill/>
-          <a:ln/>
-        </p:spPr>
-        <p:txBody>
-          <a:bodyPr wrap="square" lIns="0" tIns="0" rIns="0" bIns="0" rtlCol="0" anchor="t"/>
-          <a:lstStyle/>
-          <a:p>
-            <a:pPr indent="0" marL="0">
-              <a:buNone/>
-            </a:pPr>
-            <a:r>
-              <a:rPr lang="en-US" sz="2100" b="1" dirty="0">
-                <a:solidFill>
-                  <a:srgbClr val="0E1B2E"/>
-                </a:solidFill>
-                <a:latin typeface="Calibri" pitchFamily="34" charset="0"/>
-                <a:ea typeface="Calibri" pitchFamily="34" charset="-122"/>
-                <a:cs typeface="Calibri" pitchFamily="34" charset="-120"/>
-              </a:rPr>
-              <a:t>LLM-ревью</a:t>
-            </a:r>
-            <a:endParaRPr lang="en-US" sz="2100" dirty="0"/>
-          </a:p>
-        </p:txBody>
-      </p:sp>
-      <p:sp>
-        <p:nvSpPr>
-          <p:cNvPr id="15" name="Text 13"/>
-          <p:cNvSpPr txBox="1"/>
-          <p:nvPr/>
-        </p:nvSpPr>
-        <p:spPr>
-          <a:xfrm>
-            <a:off x="8351520" y="3182112"/>
-            <a:ext cx="2895600" cy="868680"/>
-          </a:xfrm>
-          <a:prstGeom prst="rect">
-            <a:avLst/>
-          </a:prstGeom>
-          <a:noFill/>
-          <a:ln/>
-        </p:spPr>
-        <p:txBody>
-          <a:bodyPr wrap="square" lIns="0" tIns="0" rIns="0" bIns="0" rtlCol="0" anchor="t"/>
-          <a:lstStyle/>
-          <a:p>
-            <a:pPr indent="0" marL="0">
-              <a:lnSpc>
-                <a:spcPct val="120000"/>
-              </a:lnSpc>
-              <a:buNone/>
-            </a:pPr>
-            <a:r>
-              <a:rPr lang="en-US" sz="1700" dirty="0">
-                <a:solidFill>
-                  <a:srgbClr val="5A6678"/>
-                </a:solidFill>
-                <a:latin typeface="Calibri" pitchFamily="34" charset="0"/>
-                <a:ea typeface="Calibri" pitchFamily="34" charset="-122"/>
-                <a:cs typeface="Calibri" pitchFamily="34" charset="-120"/>
-              </a:rPr>
-              <a:t>23 категории,</a:t>
-            </a:r>
-            <a:endParaRPr lang="en-US" sz="1700" dirty="0"/>
-          </a:p>
-          <a:p>
-            <a:pPr indent="0" marL="0">
-              <a:lnSpc>
-                <a:spcPct val="120000"/>
-              </a:lnSpc>
-              <a:buNone/>
-            </a:pPr>
-            <a:r>
-              <a:rPr lang="en-US" sz="1700" dirty="0">
-                <a:solidFill>
-                  <a:srgbClr val="5A6678"/>
-                </a:solidFill>
-                <a:latin typeface="Calibri" pitchFamily="34" charset="0"/>
-                <a:ea typeface="Calibri" pitchFamily="34" charset="-122"/>
-                <a:cs typeface="Calibri" pitchFamily="34" charset="-120"/>
-              </a:rPr>
-              <a:t>обязательная цитата</a:t>
-            </a:r>
-            <a:endParaRPr lang="en-US" sz="1700" dirty="0"/>
-          </a:p>
-        </p:txBody>
-      </p:sp>
-      <p:sp>
-        <p:nvSpPr>
-          <p:cNvPr id="16" name="Text 14"/>
-          <p:cNvSpPr txBox="1"/>
-          <p:nvPr/>
-        </p:nvSpPr>
-        <p:spPr>
-          <a:xfrm>
-            <a:off x="658368" y="4800600"/>
-            <a:ext cx="10844784" cy="777240"/>
-          </a:xfrm>
-          <a:prstGeom prst="rect">
-            <a:avLst/>
-          </a:prstGeom>
-          <a:noFill/>
-          <a:ln/>
-        </p:spPr>
-        <p:txBody>
-          <a:bodyPr wrap="square" lIns="0" tIns="0" rIns="0" bIns="0" rtlCol="0" anchor="t"/>
-          <a:lstStyle/>
-          <a:p>
-            <a:pPr indent="0" marL="0">
-              <a:lnSpc>
-                <a:spcPct val="120000"/>
-              </a:lnSpc>
-              <a:buNone/>
-            </a:pPr>
-            <a:r>
-              <a:rPr lang="en-US" sz="2400" dirty="0">
-                <a:solidFill>
-                  <a:srgbClr val="1B2E4A"/>
-                </a:solidFill>
-                <a:latin typeface="Calibri" pitchFamily="34" charset="0"/>
-                <a:ea typeface="Calibri" pitchFamily="34" charset="-122"/>
-                <a:cs typeface="Calibri" pitchFamily="34" charset="-120"/>
-              </a:rPr>
-              <a:t>Структуру и критерии проверяет код. Без доступа к модели инструмент продолжает работать.</a:t>
-            </a:r>
-            <a:endParaRPr lang="en-US" sz="2400" dirty="0"/>
-          </a:p>
-        </p:txBody>
-      </p:sp>
-      <p:sp>
-        <p:nvSpPr>
-          <p:cNvPr id="17" name="Text 15"/>
+          <a:effectLst>
+            <a:outerShdw sx="100000" sy="100000" kx="0" ky="0" algn="bl" rotWithShape="0" blurRad="177800" dist="50800" dir="5400000">
+              <a:srgbClr val="8FA0B5">
+                <a:alpha val="28000"/>
+              </a:srgbClr>
+            </a:outerShdw>
+          </a:effectLst>
+        </p:spPr>
+      </p:sp>
+      <p:pic>
+        <p:nvPicPr>
+          <p:cNvPr id="5" name="Image 0" descr="C:\Masaüstü\tz-reviewer\presentation\assets\ui-coverage.png">    </p:cNvPr>
+          <p:cNvPicPr>
+            <a:picLocks noChangeAspect="1"/>
+          </p:cNvPicPr>
+          <p:nvPr/>
+        </p:nvPicPr>
+        <p:blipFill>
+          <a:blip r:embed="rId1"/>
+          <a:stretch>
+            <a:fillRect/>
+          </a:stretch>
+        </p:blipFill>
+        <p:spPr>
+          <a:xfrm>
+            <a:off x="1051560" y="2194560"/>
+            <a:ext cx="10058400" cy="3700732"/>
+          </a:xfrm>
+          <a:prstGeom prst="rect">
+            <a:avLst/>
+          </a:prstGeom>
+        </p:spPr>
+      </p:pic>
+      <p:sp>
+        <p:nvSpPr>
+          <p:cNvPr id="6" name="Text 3"/>
           <p:cNvSpPr txBox="1"/>
           <p:nvPr/>
         </p:nvSpPr>
@@ -4529,6 +4133,703 @@
 <file path=ppt/slides/slide8.xml><?xml version="1.0" encoding="utf-8"?>
 <p:sld xmlns:a="http://schemas.openxmlformats.org/drawingml/2006/main" xmlns:r="http://schemas.openxmlformats.org/officeDocument/2006/relationships" xmlns:p="http://schemas.openxmlformats.org/presentationml/2006/main">
   <p:cSld name="Slide 8">
+    <p:bg>
+      <p:bgPr>
+        <a:solidFill>
+          <a:srgbClr val="FFFFFF"/>
+        </a:solidFill>
+      </p:bgPr>
+    </p:bg>
+    <p:spTree>
+      <p:nvGrpSpPr>
+        <p:cNvPr id="1" name=""/>
+        <p:cNvGrpSpPr/>
+        <p:nvPr/>
+      </p:nvGrpSpPr>
+      <p:grpSpPr>
+        <a:xfrm>
+          <a:off x="0" y="0"/>
+          <a:ext cx="0" cy="0"/>
+          <a:chOff x="0" y="0"/>
+          <a:chExt cx="0" cy="0"/>
+        </a:xfrm>
+      </p:grpSpPr>
+      <p:sp>
+        <p:nvSpPr>
+          <p:cNvPr id="2" name="Text 0"/>
+          <p:cNvSpPr txBox="1"/>
+          <p:nvPr/>
+        </p:nvSpPr>
+        <p:spPr>
+          <a:xfrm>
+            <a:off x="658368" y="566928"/>
+            <a:ext cx="10844784" cy="274320"/>
+          </a:xfrm>
+          <a:prstGeom prst="rect">
+            <a:avLst/>
+          </a:prstGeom>
+          <a:noFill/>
+          <a:ln/>
+        </p:spPr>
+        <p:txBody>
+          <a:bodyPr wrap="square" lIns="0" tIns="0" rIns="0" bIns="0" rtlCol="0" anchor="t"/>
+          <a:lstStyle/>
+          <a:p>
+            <a:pPr indent="0" marL="0">
+              <a:buNone/>
+            </a:pPr>
+            <a:r>
+              <a:rPr lang="en-US" sz="1150" b="1" spc="400" kern="0" dirty="0">
+                <a:solidFill>
+                  <a:srgbClr val="E5534B"/>
+                </a:solidFill>
+                <a:latin typeface="Calibri" pitchFamily="34" charset="0"/>
+                <a:ea typeface="Calibri" pitchFamily="34" charset="-122"/>
+                <a:cs typeface="Calibri" pitchFamily="34" charset="-120"/>
+              </a:rPr>
+              <a:t>АРХИТЕКТУРА</a:t>
+            </a:r>
+            <a:endParaRPr lang="en-US" sz="1150" dirty="0"/>
+          </a:p>
+        </p:txBody>
+      </p:sp>
+      <p:sp>
+        <p:nvSpPr>
+          <p:cNvPr id="3" name="Text 1"/>
+          <p:cNvSpPr txBox="1"/>
+          <p:nvPr/>
+        </p:nvSpPr>
+        <p:spPr>
+          <a:xfrm>
+            <a:off x="658368" y="914400"/>
+            <a:ext cx="10844784" cy="914400"/>
+          </a:xfrm>
+          <a:prstGeom prst="rect">
+            <a:avLst/>
+          </a:prstGeom>
+          <a:noFill/>
+          <a:ln/>
+        </p:spPr>
+        <p:txBody>
+          <a:bodyPr wrap="square" lIns="0" tIns="0" rIns="0" bIns="0" rtlCol="0" anchor="t">
+            <a:normAutofit/>
+          </a:bodyPr>
+          <a:lstStyle/>
+          <a:p>
+            <a:pPr indent="0" marL="0">
+              <a:lnSpc>
+                <a:spcPct val="106000"/>
+              </a:lnSpc>
+              <a:buNone/>
+            </a:pPr>
+            <a:r>
+              <a:rPr lang="en-US" sz="3200" b="1" dirty="0">
+                <a:solidFill>
+                  <a:srgbClr val="0E1B2E"/>
+                </a:solidFill>
+                <a:latin typeface="Cambria" pitchFamily="34" charset="0"/>
+                <a:ea typeface="Cambria" pitchFamily="34" charset="-122"/>
+                <a:cs typeface="Cambria" pitchFamily="34" charset="-120"/>
+              </a:rPr>
+              <a:t>Три слоя — и LLM только один из них</a:t>
+            </a:r>
+            <a:endParaRPr lang="en-US" sz="3200" dirty="0"/>
+          </a:p>
+        </p:txBody>
+      </p:sp>
+      <p:sp>
+        <p:nvSpPr>
+          <p:cNvPr id="4" name="Shape 2"/>
+          <p:cNvSpPr/>
+          <p:nvPr/>
+        </p:nvSpPr>
+        <p:spPr>
+          <a:xfrm>
+            <a:off x="658368" y="2103120"/>
+            <a:ext cx="3407664" cy="2148840"/>
+          </a:xfrm>
+          <a:prstGeom prst="roundRect">
+            <a:avLst>
+              <a:gd name="adj" fmla="val 4255"/>
+            </a:avLst>
+          </a:prstGeom>
+          <a:solidFill>
+            <a:srgbClr val="F4F7FA"/>
+          </a:solidFill>
+          <a:ln w="12700">
+            <a:solidFill>
+              <a:srgbClr val="E2E8F0"/>
+            </a:solidFill>
+            <a:prstDash val="solid"/>
+          </a:ln>
+        </p:spPr>
+      </p:sp>
+      <p:sp>
+        <p:nvSpPr>
+          <p:cNvPr id="5" name="Text 3"/>
+          <p:cNvSpPr txBox="1"/>
+          <p:nvPr/>
+        </p:nvSpPr>
+        <p:spPr>
+          <a:xfrm>
+            <a:off x="914400" y="2304288"/>
+            <a:ext cx="2895600" cy="384048"/>
+          </a:xfrm>
+          <a:prstGeom prst="rect">
+            <a:avLst/>
+          </a:prstGeom>
+          <a:noFill/>
+          <a:ln/>
+        </p:spPr>
+        <p:txBody>
+          <a:bodyPr wrap="square" lIns="0" tIns="0" rIns="0" bIns="0" rtlCol="0" anchor="t"/>
+          <a:lstStyle/>
+          <a:p>
+            <a:pPr indent="0" marL="0">
+              <a:buNone/>
+            </a:pPr>
+            <a:r>
+              <a:rPr lang="en-US" sz="2200" b="1" dirty="0">
+                <a:solidFill>
+                  <a:srgbClr val="B9C4D2"/>
+                </a:solidFill>
+                <a:latin typeface="Cambria" pitchFamily="34" charset="0"/>
+                <a:ea typeface="Cambria" pitchFamily="34" charset="-122"/>
+                <a:cs typeface="Cambria" pitchFamily="34" charset="-120"/>
+              </a:rPr>
+              <a:t>01</a:t>
+            </a:r>
+            <a:endParaRPr lang="en-US" sz="2200" dirty="0"/>
+          </a:p>
+        </p:txBody>
+      </p:sp>
+      <p:sp>
+        <p:nvSpPr>
+          <p:cNvPr id="6" name="Text 4"/>
+          <p:cNvSpPr txBox="1"/>
+          <p:nvPr/>
+        </p:nvSpPr>
+        <p:spPr>
+          <a:xfrm>
+            <a:off x="914400" y="2743200"/>
+            <a:ext cx="2895600" cy="365760"/>
+          </a:xfrm>
+          <a:prstGeom prst="rect">
+            <a:avLst/>
+          </a:prstGeom>
+          <a:noFill/>
+          <a:ln/>
+        </p:spPr>
+        <p:txBody>
+          <a:bodyPr wrap="square" lIns="0" tIns="0" rIns="0" bIns="0" rtlCol="0" anchor="t"/>
+          <a:lstStyle/>
+          <a:p>
+            <a:pPr indent="0" marL="0">
+              <a:buNone/>
+            </a:pPr>
+            <a:r>
+              <a:rPr lang="en-US" sz="2100" b="1" dirty="0">
+                <a:solidFill>
+                  <a:srgbClr val="0E1B2E"/>
+                </a:solidFill>
+                <a:latin typeface="Calibri" pitchFamily="34" charset="0"/>
+                <a:ea typeface="Calibri" pitchFamily="34" charset="-122"/>
+                <a:cs typeface="Calibri" pitchFamily="34" charset="-120"/>
+              </a:rPr>
+              <a:t>Разбор документа</a:t>
+            </a:r>
+            <a:endParaRPr lang="en-US" sz="2100" dirty="0"/>
+          </a:p>
+        </p:txBody>
+      </p:sp>
+      <p:sp>
+        <p:nvSpPr>
+          <p:cNvPr id="7" name="Text 5"/>
+          <p:cNvSpPr txBox="1"/>
+          <p:nvPr/>
+        </p:nvSpPr>
+        <p:spPr>
+          <a:xfrm>
+            <a:off x="914400" y="3182112"/>
+            <a:ext cx="2895600" cy="868680"/>
+          </a:xfrm>
+          <a:prstGeom prst="rect">
+            <a:avLst/>
+          </a:prstGeom>
+          <a:noFill/>
+          <a:ln/>
+        </p:spPr>
+        <p:txBody>
+          <a:bodyPr wrap="square" lIns="0" tIns="0" rIns="0" bIns="0" rtlCol="0" anchor="t"/>
+          <a:lstStyle/>
+          <a:p>
+            <a:pPr indent="0" marL="0">
+              <a:lnSpc>
+                <a:spcPct val="120000"/>
+              </a:lnSpc>
+              <a:buNone/>
+            </a:pPr>
+            <a:r>
+              <a:rPr lang="en-US" sz="1700" dirty="0">
+                <a:solidFill>
+                  <a:srgbClr val="5A6678"/>
+                </a:solidFill>
+                <a:latin typeface="Calibri" pitchFamily="34" charset="0"/>
+                <a:ea typeface="Calibri" pitchFamily="34" charset="-122"/>
+                <a:cs typeface="Calibri" pitchFamily="34" charset="-120"/>
+              </a:rPr>
+              <a:t>Word и Markdown →</a:t>
+            </a:r>
+            <a:endParaRPr lang="en-US" sz="1700" dirty="0"/>
+          </a:p>
+          <a:p>
+            <a:pPr indent="0" marL="0">
+              <a:lnSpc>
+                <a:spcPct val="120000"/>
+              </a:lnSpc>
+              <a:buNone/>
+            </a:pPr>
+            <a:r>
+              <a:rPr lang="en-US" sz="1700" dirty="0">
+                <a:solidFill>
+                  <a:srgbClr val="5A6678"/>
+                </a:solidFill>
+                <a:latin typeface="Calibri" pitchFamily="34" charset="0"/>
+                <a:ea typeface="Calibri" pitchFamily="34" charset="-122"/>
+                <a:cs typeface="Calibri" pitchFamily="34" charset="-120"/>
+              </a:rPr>
+              <a:t>разделы и таблицы</a:t>
+            </a:r>
+            <a:endParaRPr lang="en-US" sz="1700" dirty="0"/>
+          </a:p>
+        </p:txBody>
+      </p:sp>
+      <p:sp>
+        <p:nvSpPr>
+          <p:cNvPr id="8" name="Shape 6"/>
+          <p:cNvSpPr/>
+          <p:nvPr/>
+        </p:nvSpPr>
+        <p:spPr>
+          <a:xfrm>
+            <a:off x="4376928" y="2103120"/>
+            <a:ext cx="3407664" cy="2148840"/>
+          </a:xfrm>
+          <a:prstGeom prst="roundRect">
+            <a:avLst>
+              <a:gd name="adj" fmla="val 4255"/>
+            </a:avLst>
+          </a:prstGeom>
+          <a:solidFill>
+            <a:srgbClr val="F4F7FA"/>
+          </a:solidFill>
+          <a:ln w="12700">
+            <a:solidFill>
+              <a:srgbClr val="E2E8F0"/>
+            </a:solidFill>
+            <a:prstDash val="solid"/>
+          </a:ln>
+        </p:spPr>
+      </p:sp>
+      <p:sp>
+        <p:nvSpPr>
+          <p:cNvPr id="9" name="Text 7"/>
+          <p:cNvSpPr txBox="1"/>
+          <p:nvPr/>
+        </p:nvSpPr>
+        <p:spPr>
+          <a:xfrm>
+            <a:off x="4632960" y="2304288"/>
+            <a:ext cx="2895600" cy="384048"/>
+          </a:xfrm>
+          <a:prstGeom prst="rect">
+            <a:avLst/>
+          </a:prstGeom>
+          <a:noFill/>
+          <a:ln/>
+        </p:spPr>
+        <p:txBody>
+          <a:bodyPr wrap="square" lIns="0" tIns="0" rIns="0" bIns="0" rtlCol="0" anchor="t"/>
+          <a:lstStyle/>
+          <a:p>
+            <a:pPr indent="0" marL="0">
+              <a:buNone/>
+            </a:pPr>
+            <a:r>
+              <a:rPr lang="en-US" sz="2200" b="1" dirty="0">
+                <a:solidFill>
+                  <a:srgbClr val="B9C4D2"/>
+                </a:solidFill>
+                <a:latin typeface="Cambria" pitchFamily="34" charset="0"/>
+                <a:ea typeface="Cambria" pitchFamily="34" charset="-122"/>
+                <a:cs typeface="Cambria" pitchFamily="34" charset="-120"/>
+              </a:rPr>
+              <a:t>02</a:t>
+            </a:r>
+            <a:endParaRPr lang="en-US" sz="2200" dirty="0"/>
+          </a:p>
+        </p:txBody>
+      </p:sp>
+      <p:sp>
+        <p:nvSpPr>
+          <p:cNvPr id="10" name="Text 8"/>
+          <p:cNvSpPr txBox="1"/>
+          <p:nvPr/>
+        </p:nvSpPr>
+        <p:spPr>
+          <a:xfrm>
+            <a:off x="4632960" y="2743200"/>
+            <a:ext cx="2895600" cy="365760"/>
+          </a:xfrm>
+          <a:prstGeom prst="rect">
+            <a:avLst/>
+          </a:prstGeom>
+          <a:noFill/>
+          <a:ln/>
+        </p:spPr>
+        <p:txBody>
+          <a:bodyPr wrap="square" lIns="0" tIns="0" rIns="0" bIns="0" rtlCol="0" anchor="t"/>
+          <a:lstStyle/>
+          <a:p>
+            <a:pPr indent="0" marL="0">
+              <a:buNone/>
+            </a:pPr>
+            <a:r>
+              <a:rPr lang="en-US" sz="2100" b="1" dirty="0">
+                <a:solidFill>
+                  <a:srgbClr val="0E1B2E"/>
+                </a:solidFill>
+                <a:latin typeface="Calibri" pitchFamily="34" charset="0"/>
+                <a:ea typeface="Calibri" pitchFamily="34" charset="-122"/>
+                <a:cs typeface="Calibri" pitchFamily="34" charset="-120"/>
+              </a:rPr>
+              <a:t>Критерии МТС</a:t>
+            </a:r>
+            <a:endParaRPr lang="en-US" sz="2100" dirty="0"/>
+          </a:p>
+        </p:txBody>
+      </p:sp>
+      <p:sp>
+        <p:nvSpPr>
+          <p:cNvPr id="11" name="Text 9"/>
+          <p:cNvSpPr txBox="1"/>
+          <p:nvPr/>
+        </p:nvSpPr>
+        <p:spPr>
+          <a:xfrm>
+            <a:off x="4632960" y="3182112"/>
+            <a:ext cx="2895600" cy="868680"/>
+          </a:xfrm>
+          <a:prstGeom prst="rect">
+            <a:avLst/>
+          </a:prstGeom>
+          <a:noFill/>
+          <a:ln/>
+        </p:spPr>
+        <p:txBody>
+          <a:bodyPr wrap="square" lIns="0" tIns="0" rIns="0" bIns="0" rtlCol="0" anchor="t"/>
+          <a:lstStyle/>
+          <a:p>
+            <a:pPr indent="0" marL="0">
+              <a:lnSpc>
+                <a:spcPct val="120000"/>
+              </a:lnSpc>
+              <a:buNone/>
+            </a:pPr>
+            <a:r>
+              <a:rPr lang="en-US" sz="1700" dirty="0">
+                <a:solidFill>
+                  <a:srgbClr val="5A6678"/>
+                </a:solidFill>
+                <a:latin typeface="Calibri" pitchFamily="34" charset="0"/>
+                <a:ea typeface="Calibri" pitchFamily="34" charset="-122"/>
+                <a:cs typeface="Calibri" pitchFamily="34" charset="-120"/>
+              </a:rPr>
+              <a:t>21 раздел шаблона +</a:t>
+            </a:r>
+            <a:endParaRPr lang="en-US" sz="1700" dirty="0"/>
+          </a:p>
+          <a:p>
+            <a:pPr indent="0" marL="0">
+              <a:lnSpc>
+                <a:spcPct val="120000"/>
+              </a:lnSpc>
+              <a:buNone/>
+            </a:pPr>
+            <a:r>
+              <a:rPr lang="en-US" sz="1700" dirty="0">
+                <a:solidFill>
+                  <a:srgbClr val="5A6678"/>
+                </a:solidFill>
+                <a:latin typeface="Calibri" pitchFamily="34" charset="0"/>
+                <a:ea typeface="Calibri" pitchFamily="34" charset="-122"/>
+                <a:cs typeface="Calibri" pitchFamily="34" charset="-120"/>
+              </a:rPr>
+              <a:t>8 требований кейса</a:t>
+            </a:r>
+            <a:endParaRPr lang="en-US" sz="1700" dirty="0"/>
+          </a:p>
+        </p:txBody>
+      </p:sp>
+      <p:sp>
+        <p:nvSpPr>
+          <p:cNvPr id="12" name="Shape 10"/>
+          <p:cNvSpPr/>
+          <p:nvPr/>
+        </p:nvSpPr>
+        <p:spPr>
+          <a:xfrm>
+            <a:off x="8095488" y="2103120"/>
+            <a:ext cx="3407664" cy="2148840"/>
+          </a:xfrm>
+          <a:prstGeom prst="roundRect">
+            <a:avLst>
+              <a:gd name="adj" fmla="val 4255"/>
+            </a:avLst>
+          </a:prstGeom>
+          <a:solidFill>
+            <a:srgbClr val="FBF3E4"/>
+          </a:solidFill>
+          <a:ln w="19050">
+            <a:solidFill>
+              <a:srgbClr val="C8791A"/>
+            </a:solidFill>
+            <a:prstDash val="solid"/>
+          </a:ln>
+        </p:spPr>
+      </p:sp>
+      <p:sp>
+        <p:nvSpPr>
+          <p:cNvPr id="13" name="Text 11"/>
+          <p:cNvSpPr txBox="1"/>
+          <p:nvPr/>
+        </p:nvSpPr>
+        <p:spPr>
+          <a:xfrm>
+            <a:off x="8351520" y="2304288"/>
+            <a:ext cx="2895600" cy="384048"/>
+          </a:xfrm>
+          <a:prstGeom prst="rect">
+            <a:avLst/>
+          </a:prstGeom>
+          <a:noFill/>
+          <a:ln/>
+        </p:spPr>
+        <p:txBody>
+          <a:bodyPr wrap="square" lIns="0" tIns="0" rIns="0" bIns="0" rtlCol="0" anchor="t"/>
+          <a:lstStyle/>
+          <a:p>
+            <a:pPr indent="0" marL="0">
+              <a:buNone/>
+            </a:pPr>
+            <a:r>
+              <a:rPr lang="en-US" sz="2200" b="1" dirty="0">
+                <a:solidFill>
+                  <a:srgbClr val="C8791A"/>
+                </a:solidFill>
+                <a:latin typeface="Cambria" pitchFamily="34" charset="0"/>
+                <a:ea typeface="Cambria" pitchFamily="34" charset="-122"/>
+                <a:cs typeface="Cambria" pitchFamily="34" charset="-120"/>
+              </a:rPr>
+              <a:t>03</a:t>
+            </a:r>
+            <a:endParaRPr lang="en-US" sz="2200" dirty="0"/>
+          </a:p>
+        </p:txBody>
+      </p:sp>
+      <p:sp>
+        <p:nvSpPr>
+          <p:cNvPr id="14" name="Text 12"/>
+          <p:cNvSpPr txBox="1"/>
+          <p:nvPr/>
+        </p:nvSpPr>
+        <p:spPr>
+          <a:xfrm>
+            <a:off x="8351520" y="2743200"/>
+            <a:ext cx="2895600" cy="365760"/>
+          </a:xfrm>
+          <a:prstGeom prst="rect">
+            <a:avLst/>
+          </a:prstGeom>
+          <a:noFill/>
+          <a:ln/>
+        </p:spPr>
+        <p:txBody>
+          <a:bodyPr wrap="square" lIns="0" tIns="0" rIns="0" bIns="0" rtlCol="0" anchor="t"/>
+          <a:lstStyle/>
+          <a:p>
+            <a:pPr indent="0" marL="0">
+              <a:buNone/>
+            </a:pPr>
+            <a:r>
+              <a:rPr lang="en-US" sz="2100" b="1" dirty="0">
+                <a:solidFill>
+                  <a:srgbClr val="0E1B2E"/>
+                </a:solidFill>
+                <a:latin typeface="Calibri" pitchFamily="34" charset="0"/>
+                <a:ea typeface="Calibri" pitchFamily="34" charset="-122"/>
+                <a:cs typeface="Calibri" pitchFamily="34" charset="-120"/>
+              </a:rPr>
+              <a:t>LLM-ревью</a:t>
+            </a:r>
+            <a:endParaRPr lang="en-US" sz="2100" dirty="0"/>
+          </a:p>
+        </p:txBody>
+      </p:sp>
+      <p:sp>
+        <p:nvSpPr>
+          <p:cNvPr id="15" name="Text 13"/>
+          <p:cNvSpPr txBox="1"/>
+          <p:nvPr/>
+        </p:nvSpPr>
+        <p:spPr>
+          <a:xfrm>
+            <a:off x="8351520" y="3182112"/>
+            <a:ext cx="2895600" cy="868680"/>
+          </a:xfrm>
+          <a:prstGeom prst="rect">
+            <a:avLst/>
+          </a:prstGeom>
+          <a:noFill/>
+          <a:ln/>
+        </p:spPr>
+        <p:txBody>
+          <a:bodyPr wrap="square" lIns="0" tIns="0" rIns="0" bIns="0" rtlCol="0" anchor="t"/>
+          <a:lstStyle/>
+          <a:p>
+            <a:pPr indent="0" marL="0">
+              <a:lnSpc>
+                <a:spcPct val="120000"/>
+              </a:lnSpc>
+              <a:buNone/>
+            </a:pPr>
+            <a:r>
+              <a:rPr lang="en-US" sz="1700" dirty="0">
+                <a:solidFill>
+                  <a:srgbClr val="5A6678"/>
+                </a:solidFill>
+                <a:latin typeface="Calibri" pitchFamily="34" charset="0"/>
+                <a:ea typeface="Calibri" pitchFamily="34" charset="-122"/>
+                <a:cs typeface="Calibri" pitchFamily="34" charset="-120"/>
+              </a:rPr>
+              <a:t>23 категории,</a:t>
+            </a:r>
+            <a:endParaRPr lang="en-US" sz="1700" dirty="0"/>
+          </a:p>
+          <a:p>
+            <a:pPr indent="0" marL="0">
+              <a:lnSpc>
+                <a:spcPct val="120000"/>
+              </a:lnSpc>
+              <a:buNone/>
+            </a:pPr>
+            <a:r>
+              <a:rPr lang="en-US" sz="1700" dirty="0">
+                <a:solidFill>
+                  <a:srgbClr val="5A6678"/>
+                </a:solidFill>
+                <a:latin typeface="Calibri" pitchFamily="34" charset="0"/>
+                <a:ea typeface="Calibri" pitchFamily="34" charset="-122"/>
+                <a:cs typeface="Calibri" pitchFamily="34" charset="-120"/>
+              </a:rPr>
+              <a:t>обязательная цитата</a:t>
+            </a:r>
+            <a:endParaRPr lang="en-US" sz="1700" dirty="0"/>
+          </a:p>
+        </p:txBody>
+      </p:sp>
+      <p:sp>
+        <p:nvSpPr>
+          <p:cNvPr id="16" name="Text 14"/>
+          <p:cNvSpPr txBox="1"/>
+          <p:nvPr/>
+        </p:nvSpPr>
+        <p:spPr>
+          <a:xfrm>
+            <a:off x="658368" y="4800600"/>
+            <a:ext cx="10844784" cy="777240"/>
+          </a:xfrm>
+          <a:prstGeom prst="rect">
+            <a:avLst/>
+          </a:prstGeom>
+          <a:noFill/>
+          <a:ln/>
+        </p:spPr>
+        <p:txBody>
+          <a:bodyPr wrap="square" lIns="0" tIns="0" rIns="0" bIns="0" rtlCol="0" anchor="t"/>
+          <a:lstStyle/>
+          <a:p>
+            <a:pPr indent="0" marL="0">
+              <a:lnSpc>
+                <a:spcPct val="120000"/>
+              </a:lnSpc>
+              <a:buNone/>
+            </a:pPr>
+            <a:r>
+              <a:rPr lang="en-US" sz="2400" dirty="0">
+                <a:solidFill>
+                  <a:srgbClr val="1B2E4A"/>
+                </a:solidFill>
+                <a:latin typeface="Calibri" pitchFamily="34" charset="0"/>
+                <a:ea typeface="Calibri" pitchFamily="34" charset="-122"/>
+                <a:cs typeface="Calibri" pitchFamily="34" charset="-120"/>
+              </a:rPr>
+              <a:t>Структуру и критерии проверяет код. Без доступа к модели инструмент продолжает работать.</a:t>
+            </a:r>
+            <a:endParaRPr lang="en-US" sz="2400" dirty="0"/>
+          </a:p>
+        </p:txBody>
+      </p:sp>
+      <p:sp>
+        <p:nvSpPr>
+          <p:cNvPr id="17" name="Text 15"/>
+          <p:cNvSpPr txBox="1"/>
+          <p:nvPr/>
+        </p:nvSpPr>
+        <p:spPr>
+          <a:xfrm>
+            <a:off x="10954512" y="548640"/>
+            <a:ext cx="548640" cy="292608"/>
+          </a:xfrm>
+          <a:prstGeom prst="rect">
+            <a:avLst/>
+          </a:prstGeom>
+          <a:noFill/>
+          <a:ln/>
+        </p:spPr>
+        <p:txBody>
+          <a:bodyPr wrap="square" lIns="0" tIns="0" rIns="0" bIns="0" rtlCol="0" anchor="t"/>
+          <a:lstStyle/>
+          <a:p>
+            <a:pPr algn="r" indent="0" marL="0">
+              <a:buNone/>
+            </a:pPr>
+            <a:r>
+              <a:rPr lang="en-US" sz="1200" spc="100" kern="0" dirty="0">
+                <a:solidFill>
+                  <a:srgbClr val="C3CDD9"/>
+                </a:solidFill>
+                <a:latin typeface="Calibri" pitchFamily="34" charset="0"/>
+                <a:ea typeface="Calibri" pitchFamily="34" charset="-122"/>
+                <a:cs typeface="Calibri" pitchFamily="34" charset="-120"/>
+              </a:rPr>
+              <a:t>08</a:t>
+            </a:r>
+            <a:endParaRPr lang="en-US" sz="1200" dirty="0"/>
+          </a:p>
+        </p:txBody>
+      </p:sp>
+    </p:spTree>
+  </p:cSld>
+  <p:clrMapOvr>
+    <a:masterClrMapping/>
+  </p:clrMapOvr>
+</p:sld>
+</file>
+
+<file path=ppt/slides/slide9.xml><?xml version="1.0" encoding="utf-8"?>
+<p:sld xmlns:a="http://schemas.openxmlformats.org/drawingml/2006/main" xmlns:r="http://schemas.openxmlformats.org/officeDocument/2006/relationships" xmlns:p="http://schemas.openxmlformats.org/presentationml/2006/main">
+  <p:cSld name="Slide 9">
     <p:bg>
       <p:bgPr>
         <a:solidFill>
@@ -5167,7 +5468,7 @@
                 <a:ea typeface="Calibri" pitchFamily="34" charset="-122"/>
                 <a:cs typeface="Calibri" pitchFamily="34" charset="-120"/>
               </a:rPr>
-              <a:t>08</a:t>
+              <a:t>09</a:t>
             </a:r>
             <a:endParaRPr lang="en-US" sz="1200" dirty="0"/>
           </a:p>

--- a/presentation/ТЗ-Ревьюер — питч Demo Day.pptx
+++ b/presentation/ТЗ-Ревьюер — питч Demo Day.pptx
@@ -1126,7 +1126,7 @@
           <a:p>
             <a:r>
               <a:rPr lang="en-US" dirty="0"/>
-              <a:t>3:10–4:10. Первые два слоя — обычный код, детерминированы и воспроизводимы. LLM отвечает только за смысл, и каждое его замечание обязано содержать дословную цитату, иначе отбрасывается. Провайдера меняли на живой Gemini без единой правки кода.</a:t>
+              <a:t>3:10–4:10. Первые два слоя — обычный код, детерминированы и воспроизводимы. LLM отвечает только за смысл; промпт требует к каждому замечанию дословную цитату — в наших прогонах её содержали все двадцать. Провайдера меняли на живой Gemini без единой правки кода.</a:t>
             </a:r>
             <a:endParaRPr lang="en-US" dirty="0"/>
           </a:p>
